--- a/presentation/Mitron_Bank_Credit_Card_Launch_Strategy.pptx
+++ b/presentation/Mitron_Bank_Credit_Card_Launch_Strategy.pptx
@@ -3114,8 +3114,88 @@
         </p:nvSpPr>
         <p:spPr>
           <a:xfrm>
-            <a:off x="812800" y="812800"/>
-            <a:ext cx="5715000" cy="190500"/>
+            <a:off x="822960" y="822960"/>
+            <a:ext cx="9692640" cy="5760720"/>
+          </a:xfrm>
+          <a:prstGeom prst="rect">
+            <a:avLst/>
+          </a:prstGeom>
+          <a:noFill/>
+        </p:spPr>
+        <p:txBody>
+          <a:bodyPr wrap="square" lIns="0" rIns="0" tIns="0" bIns="0">
+            <a:spAutoFit/>
+          </a:bodyPr>
+          <a:lstStyle/>
+          <a:p>
+            <a:pPr>
+              <a:lnSpc>
+                <a:spcPct val="100000"/>
+              </a:lnSpc>
+              <a:spcAft>
+                <a:spcPts val="2000"/>
+              </a:spcAft>
+            </a:pPr>
+            <a:r>
+              <a:rPr sz="1200" b="1" spc="120">
+                <a:solidFill>
+                  <a:srgbClr val="D9A857"/>
+                </a:solidFill>
+                <a:latin typeface="IBM Plex Sans"/>
+              </a:rPr>
+              <a:t>MITRON BANK · CREDIT CARD STRATEGY</a:t>
+            </a:r>
+          </a:p>
+          <a:p>
+            <a:pPr>
+              <a:lnSpc>
+                <a:spcPct val="115000"/>
+              </a:lnSpc>
+              <a:spcAft>
+                <a:spcPts val="2000"/>
+              </a:spcAft>
+            </a:pPr>
+            <a:r>
+              <a:rPr sz="4000" b="0">
+                <a:solidFill>
+                  <a:srgbClr val="F8F6F1"/>
+                </a:solidFill>
+                <a:latin typeface="Source Serif 4"/>
+              </a:rPr>
+              <a:t>A card portfolio built on where the money already moves</a:t>
+            </a:r>
+          </a:p>
+          <a:p>
+            <a:pPr>
+              <a:lnSpc>
+                <a:spcPct val="140000"/>
+              </a:lnSpc>
+              <a:spcAft>
+                <a:spcPts val="0"/>
+              </a:spcAft>
+            </a:pPr>
+            <a:r>
+              <a:rPr sz="1500" b="0">
+                <a:solidFill>
+                  <a:srgbClr val="B9C2D6"/>
+                </a:solidFill>
+                <a:latin typeface="IBM Plex Sans"/>
+              </a:rPr>
+              <a:t>Six months of transaction data across 4,000 customers and ₹530.9M in spend point to three distinct card propositions, and the order to launch them in.</a:t>
+            </a:r>
+          </a:p>
+        </p:txBody>
+      </p:sp>
+      <p:sp>
+        <p:nvSpPr>
+          <p:cNvPr id="3" name="TextBox 2"/>
+          <p:cNvSpPr txBox="1"/>
+          <p:nvPr/>
+        </p:nvSpPr>
+        <p:spPr>
+          <a:xfrm>
+            <a:off x="822960" y="5989320"/>
+            <a:ext cx="5943600" cy="274320"/>
           </a:xfrm>
           <a:prstGeom prst="rect">
             <a:avLst/>
@@ -3134,27 +3214,27 @@
               </a:lnSpc>
             </a:pPr>
             <a:r>
-              <a:rPr sz="1200" b="1" spc="120">
-                <a:solidFill>
-                  <a:srgbClr val="D9A857"/>
+              <a:rPr sz="1200" b="0" i="0">
+                <a:solidFill>
+                  <a:srgbClr val="B9C2D6"/>
                 </a:solidFill>
                 <a:latin typeface="IBM Plex Sans"/>
               </a:rPr>
-              <a:t>MITRON BANK · CREDIT CARD STRATEGY</a:t>
-            </a:r>
-          </a:p>
-        </p:txBody>
-      </p:sp>
-      <p:sp>
-        <p:nvSpPr>
-          <p:cNvPr id="3" name="TextBox 2"/>
+              <a:t>Prepared for the Executive Committee</a:t>
+            </a:r>
+          </a:p>
+        </p:txBody>
+      </p:sp>
+      <p:sp>
+        <p:nvSpPr>
+          <p:cNvPr id="4" name="TextBox 3"/>
           <p:cNvSpPr txBox="1"/>
           <p:nvPr/>
         </p:nvSpPr>
         <p:spPr>
           <a:xfrm>
-            <a:off x="812800" y="1206500"/>
-            <a:ext cx="7239000" cy="1651000"/>
+            <a:off x="8625535" y="5989320"/>
+            <a:ext cx="2743200" cy="274320"/>
           </a:xfrm>
           <a:prstGeom prst="rect">
             <a:avLst/>
@@ -3167,130 +3247,13 @@
           </a:bodyPr>
           <a:lstStyle/>
           <a:p>
-            <a:pPr algn="l">
-              <a:lnSpc>
-                <a:spcPct val="112000"/>
-              </a:lnSpc>
-            </a:pPr>
-            <a:r>
-              <a:rPr sz="4800" b="0">
-                <a:solidFill>
-                  <a:srgbClr val="F8F6F1"/>
-                </a:solidFill>
-                <a:latin typeface="Source Serif 4"/>
-              </a:rPr>
-              <a:t>A card portfolio built on where the money already moves</a:t>
-            </a:r>
-          </a:p>
-        </p:txBody>
-      </p:sp>
-      <p:sp>
-        <p:nvSpPr>
-          <p:cNvPr id="4" name="TextBox 3"/>
-          <p:cNvSpPr txBox="1"/>
-          <p:nvPr/>
-        </p:nvSpPr>
-        <p:spPr>
-          <a:xfrm>
-            <a:off x="812800" y="2984500"/>
-            <a:ext cx="5715000" cy="762000"/>
-          </a:xfrm>
-          <a:prstGeom prst="rect">
-            <a:avLst/>
-          </a:prstGeom>
-          <a:noFill/>
-        </p:spPr>
-        <p:txBody>
-          <a:bodyPr wrap="square" anchor="t" lIns="0" rIns="0" tIns="0" bIns="0">
-            <a:spAutoFit/>
-          </a:bodyPr>
-          <a:lstStyle/>
-          <a:p>
-            <a:pPr algn="l">
-              <a:lnSpc>
-                <a:spcPct val="140000"/>
-              </a:lnSpc>
-            </a:pPr>
-            <a:r>
-              <a:rPr sz="1500" b="0">
-                <a:solidFill>
-                  <a:srgbClr val="B9C2D6"/>
-                </a:solidFill>
-                <a:latin typeface="IBM Plex Sans"/>
-              </a:rPr>
-              <a:t>Six months of transaction data across 4,000 customers and ₹530.9M in spend point to three distinct card propositions, and the order to launch them in.</a:t>
-            </a:r>
-          </a:p>
-        </p:txBody>
-      </p:sp>
-      <p:sp>
-        <p:nvSpPr>
-          <p:cNvPr id="5" name="TextBox 4"/>
-          <p:cNvSpPr txBox="1"/>
-          <p:nvPr/>
-        </p:nvSpPr>
-        <p:spPr>
-          <a:xfrm>
-            <a:off x="812800" y="5969000"/>
-            <a:ext cx="4445000" cy="190500"/>
-          </a:xfrm>
-          <a:prstGeom prst="rect">
-            <a:avLst/>
-          </a:prstGeom>
-          <a:noFill/>
-        </p:spPr>
-        <p:txBody>
-          <a:bodyPr wrap="square" anchor="t" lIns="0" rIns="0" tIns="0" bIns="0">
-            <a:spAutoFit/>
-          </a:bodyPr>
-          <a:lstStyle/>
-          <a:p>
-            <a:pPr algn="l">
+            <a:pPr algn="r">
               <a:lnSpc>
                 <a:spcPct val="115000"/>
               </a:lnSpc>
             </a:pPr>
             <a:r>
-              <a:rPr sz="1200" b="0">
-                <a:solidFill>
-                  <a:srgbClr val="B9C2D6"/>
-                </a:solidFill>
-                <a:latin typeface="IBM Plex Sans"/>
-              </a:rPr>
-              <a:t>Prepared for the Executive Committee</a:t>
-            </a:r>
-          </a:p>
-        </p:txBody>
-      </p:sp>
-      <p:sp>
-        <p:nvSpPr>
-          <p:cNvPr id="6" name="TextBox 5"/>
-          <p:cNvSpPr txBox="1"/>
-          <p:nvPr/>
-        </p:nvSpPr>
-        <p:spPr>
-          <a:xfrm>
-            <a:off x="8890000" y="5969000"/>
-            <a:ext cx="2489200" cy="190500"/>
-          </a:xfrm>
-          <a:prstGeom prst="rect">
-            <a:avLst/>
-          </a:prstGeom>
-          <a:noFill/>
-        </p:spPr>
-        <p:txBody>
-          <a:bodyPr wrap="square" anchor="t" lIns="0" rIns="0" tIns="0" bIns="0">
-            <a:spAutoFit/>
-          </a:bodyPr>
-          <a:lstStyle/>
-          <a:p>
-            <a:pPr algn="r">
-              <a:lnSpc>
-                <a:spcPct val="115000"/>
-              </a:lnSpc>
-            </a:pPr>
-            <a:r>
-              <a:rPr sz="1200" b="0">
+              <a:rPr sz="1200" b="0" i="0">
                 <a:solidFill>
                   <a:srgbClr val="D9A857"/>
                 </a:solidFill>
@@ -3335,8 +3298,8 @@
         </p:nvSpPr>
         <p:spPr>
           <a:xfrm>
-            <a:off x="812800" y="812800"/>
-            <a:ext cx="5715000" cy="190500"/>
+            <a:off x="822960" y="777240"/>
+            <a:ext cx="9692640" cy="5806440"/>
           </a:xfrm>
           <a:prstGeom prst="rect">
             <a:avLst/>
@@ -3344,57 +3307,40 @@
           <a:noFill/>
         </p:spPr>
         <p:txBody>
-          <a:bodyPr wrap="square" anchor="t" lIns="0" rIns="0" tIns="0" bIns="0">
+          <a:bodyPr wrap="square" lIns="0" rIns="0" tIns="0" bIns="0">
             <a:spAutoFit/>
           </a:bodyPr>
           <a:lstStyle/>
           <a:p>
-            <a:pPr algn="l">
+            <a:pPr>
+              <a:lnSpc>
+                <a:spcPct val="100000"/>
+              </a:lnSpc>
+              <a:spcAft>
+                <a:spcPts val="1000"/>
+              </a:spcAft>
+            </a:pPr>
+            <a:r>
+              <a:rPr sz="1200" b="1" spc="120">
+                <a:solidFill>
+                  <a:srgbClr val="7A5A1E"/>
+                </a:solidFill>
+                <a:latin typeface="IBM Plex Sans"/>
+              </a:rPr>
+              <a:t>ACTION</a:t>
+            </a:r>
+          </a:p>
+          <a:p>
+            <a:pPr>
               <a:lnSpc>
                 <a:spcPct val="115000"/>
               </a:lnSpc>
-            </a:pPr>
-            <a:r>
-              <a:rPr sz="1200" b="1" spc="120">
-                <a:solidFill>
-                  <a:srgbClr val="7A5A1E"/>
-                </a:solidFill>
-                <a:latin typeface="IBM Plex Sans"/>
-              </a:rPr>
-              <a:t>ACTION</a:t>
-            </a:r>
-          </a:p>
-        </p:txBody>
-      </p:sp>
-      <p:sp>
-        <p:nvSpPr>
-          <p:cNvPr id="3" name="TextBox 2"/>
-          <p:cNvSpPr txBox="1"/>
-          <p:nvPr/>
-        </p:nvSpPr>
-        <p:spPr>
-          <a:xfrm>
-            <a:off x="812800" y="1066800"/>
-            <a:ext cx="9525000" cy="635000"/>
-          </a:xfrm>
-          <a:prstGeom prst="rect">
-            <a:avLst/>
-          </a:prstGeom>
-          <a:noFill/>
-        </p:spPr>
-        <p:txBody>
-          <a:bodyPr wrap="square" anchor="t" lIns="0" rIns="0" tIns="0" bIns="0">
-            <a:spAutoFit/>
-          </a:bodyPr>
-          <a:lstStyle/>
-          <a:p>
-            <a:pPr algn="l">
-              <a:lnSpc>
-                <a:spcPct val="115000"/>
-              </a:lnSpc>
-            </a:pPr>
-            <a:r>
-              <a:rPr sz="3200" b="0">
+              <a:spcAft>
+                <a:spcPts val="1200"/>
+              </a:spcAft>
+            </a:pPr>
+            <a:r>
+              <a:rPr sz="3000" b="0">
                 <a:solidFill>
                   <a:srgbClr val="0E1F33"/>
                 </a:solidFill>
@@ -3407,18 +3353,18 @@
       </p:sp>
       <p:sp>
         <p:nvSpPr>
-          <p:cNvPr id="4" name="Rounded Rectangle 3"/>
+          <p:cNvPr id="3" name="Rounded Rectangle 2"/>
           <p:cNvSpPr/>
           <p:nvPr/>
         </p:nvSpPr>
         <p:spPr>
           <a:xfrm>
-            <a:off x="5644" y="23812"/>
-            <a:ext cx="74612" cy="6667"/>
+            <a:off x="822960" y="3246120"/>
+            <a:ext cx="10545775" cy="914400"/>
           </a:xfrm>
           <a:prstGeom prst="roundRect">
             <a:avLst>
-              <a:gd name="adj" fmla="val 6000"/>
+              <a:gd name="adj" fmla="val 8000"/>
             </a:avLst>
           </a:prstGeom>
           <a:solidFill>
@@ -3455,14 +3401,14 @@
       </p:sp>
       <p:sp>
         <p:nvSpPr>
-          <p:cNvPr id="5" name="Oval 4"/>
+          <p:cNvPr id="4" name="Oval 3"/>
           <p:cNvSpPr/>
           <p:nvPr/>
         </p:nvSpPr>
         <p:spPr>
           <a:xfrm>
-            <a:off x="8501" y="25717"/>
-            <a:ext cx="2857" cy="2857"/>
+            <a:off x="1097280" y="3474720"/>
+            <a:ext cx="457200" cy="457200"/>
           </a:xfrm>
           <a:prstGeom prst="ellipse">
             <a:avLst/>
@@ -3499,14 +3445,14 @@
       </p:sp>
       <p:sp>
         <p:nvSpPr>
-          <p:cNvPr id="6" name="TextBox 5"/>
+          <p:cNvPr id="5" name="TextBox 4"/>
           <p:cNvSpPr txBox="1"/>
           <p:nvPr/>
         </p:nvSpPr>
         <p:spPr>
           <a:xfrm>
-            <a:off x="8501" y="25844"/>
-            <a:ext cx="2857" cy="2666"/>
+            <a:off x="1097280" y="3502151"/>
+            <a:ext cx="457200" cy="402336"/>
           </a:xfrm>
           <a:prstGeom prst="rect">
             <a:avLst/>
@@ -3525,7 +3471,7 @@
               </a:lnSpc>
             </a:pPr>
             <a:r>
-              <a:rPr sz="1600" b="1">
+              <a:rPr sz="1600" b="1" i="0">
                 <a:solidFill>
                   <a:srgbClr val="F8F6F1"/>
                 </a:solidFill>
@@ -3538,14 +3484,14 @@
       </p:sp>
       <p:sp>
         <p:nvSpPr>
-          <p:cNvPr id="7" name="TextBox 6"/>
+          <p:cNvPr id="6" name="TextBox 5"/>
           <p:cNvSpPr txBox="1"/>
           <p:nvPr/>
         </p:nvSpPr>
         <p:spPr>
           <a:xfrm>
-            <a:off x="14851" y="24701"/>
-            <a:ext cx="62230" cy="2222"/>
+            <a:off x="1828800" y="3392424"/>
+            <a:ext cx="9265615" cy="320040"/>
           </a:xfrm>
           <a:prstGeom prst="rect">
             <a:avLst/>
@@ -3564,7 +3510,7 @@
               </a:lnSpc>
             </a:pPr>
             <a:r>
-              <a:rPr sz="1700" b="1">
+              <a:rPr sz="1600" b="1" i="0">
                 <a:solidFill>
                   <a:srgbClr val="0E1F33"/>
                 </a:solidFill>
@@ -3577,14 +3523,14 @@
       </p:sp>
       <p:sp>
         <p:nvSpPr>
-          <p:cNvPr id="8" name="TextBox 7"/>
+          <p:cNvPr id="7" name="TextBox 6"/>
           <p:cNvSpPr txBox="1"/>
           <p:nvPr/>
         </p:nvSpPr>
         <p:spPr>
           <a:xfrm>
-            <a:off x="14851" y="27114"/>
-            <a:ext cx="62230" cy="2857"/>
+            <a:off x="1828800" y="3730752"/>
+            <a:ext cx="9265615" cy="365760"/>
           </a:xfrm>
           <a:prstGeom prst="rect">
             <a:avLst/>
@@ -3603,7 +3549,7 @@
               </a:lnSpc>
             </a:pPr>
             <a:r>
-              <a:rPr sz="1300" b="0">
+              <a:rPr sz="1200" b="0" i="0">
                 <a:solidFill>
                   <a:srgbClr val="4A5568"/>
                 </a:solidFill>
@@ -3616,18 +3562,18 @@
       </p:sp>
       <p:sp>
         <p:nvSpPr>
-          <p:cNvPr id="9" name="Rounded Rectangle 8"/>
+          <p:cNvPr id="8" name="Rounded Rectangle 7"/>
           <p:cNvSpPr/>
           <p:nvPr/>
         </p:nvSpPr>
         <p:spPr>
           <a:xfrm>
-            <a:off x="5644" y="32258"/>
-            <a:ext cx="74612" cy="6667"/>
+            <a:off x="822960" y="4361688"/>
+            <a:ext cx="10545775" cy="914400"/>
           </a:xfrm>
           <a:prstGeom prst="roundRect">
             <a:avLst>
-              <a:gd name="adj" fmla="val 6000"/>
+              <a:gd name="adj" fmla="val 8000"/>
             </a:avLst>
           </a:prstGeom>
           <a:solidFill>
@@ -3664,14 +3610,14 @@
       </p:sp>
       <p:sp>
         <p:nvSpPr>
-          <p:cNvPr id="10" name="Oval 9"/>
+          <p:cNvPr id="9" name="Oval 8"/>
           <p:cNvSpPr/>
           <p:nvPr/>
         </p:nvSpPr>
         <p:spPr>
           <a:xfrm>
-            <a:off x="8501" y="34163"/>
-            <a:ext cx="2857" cy="2857"/>
+            <a:off x="1097280" y="4590288"/>
+            <a:ext cx="457200" cy="457200"/>
           </a:xfrm>
           <a:prstGeom prst="ellipse">
             <a:avLst/>
@@ -3708,14 +3654,14 @@
       </p:sp>
       <p:sp>
         <p:nvSpPr>
-          <p:cNvPr id="11" name="TextBox 10"/>
+          <p:cNvPr id="10" name="TextBox 9"/>
           <p:cNvSpPr txBox="1"/>
           <p:nvPr/>
         </p:nvSpPr>
         <p:spPr>
           <a:xfrm>
-            <a:off x="8501" y="34290"/>
-            <a:ext cx="2857" cy="2666"/>
+            <a:off x="1097280" y="4617720"/>
+            <a:ext cx="457200" cy="402336"/>
           </a:xfrm>
           <a:prstGeom prst="rect">
             <a:avLst/>
@@ -3734,7 +3680,7 @@
               </a:lnSpc>
             </a:pPr>
             <a:r>
-              <a:rPr sz="1600" b="1">
+              <a:rPr sz="1600" b="1" i="0">
                 <a:solidFill>
                   <a:srgbClr val="F8F6F1"/>
                 </a:solidFill>
@@ -3747,14 +3693,14 @@
       </p:sp>
       <p:sp>
         <p:nvSpPr>
-          <p:cNvPr id="12" name="TextBox 11"/>
+          <p:cNvPr id="11" name="TextBox 10"/>
           <p:cNvSpPr txBox="1"/>
           <p:nvPr/>
         </p:nvSpPr>
         <p:spPr>
           <a:xfrm>
-            <a:off x="14851" y="33147"/>
-            <a:ext cx="62230" cy="2222"/>
+            <a:off x="1828800" y="4507992"/>
+            <a:ext cx="9265615" cy="320040"/>
           </a:xfrm>
           <a:prstGeom prst="rect">
             <a:avLst/>
@@ -3773,7 +3719,7 @@
               </a:lnSpc>
             </a:pPr>
             <a:r>
-              <a:rPr sz="1700" b="1">
+              <a:rPr sz="1600" b="1" i="0">
                 <a:solidFill>
                   <a:srgbClr val="0E1F33"/>
                 </a:solidFill>
@@ -3786,14 +3732,14 @@
       </p:sp>
       <p:sp>
         <p:nvSpPr>
-          <p:cNvPr id="13" name="TextBox 12"/>
+          <p:cNvPr id="12" name="TextBox 11"/>
           <p:cNvSpPr txBox="1"/>
           <p:nvPr/>
         </p:nvSpPr>
         <p:spPr>
           <a:xfrm>
-            <a:off x="14851" y="35560"/>
-            <a:ext cx="62230" cy="2857"/>
+            <a:off x="1828800" y="4846320"/>
+            <a:ext cx="9265615" cy="365760"/>
           </a:xfrm>
           <a:prstGeom prst="rect">
             <a:avLst/>
@@ -3812,7 +3758,7 @@
               </a:lnSpc>
             </a:pPr>
             <a:r>
-              <a:rPr sz="1300" b="0">
+              <a:rPr sz="1200" b="0" i="0">
                 <a:solidFill>
                   <a:srgbClr val="4A5568"/>
                 </a:solidFill>
@@ -3825,18 +3771,18 @@
       </p:sp>
       <p:sp>
         <p:nvSpPr>
-          <p:cNvPr id="14" name="Rounded Rectangle 13"/>
+          <p:cNvPr id="13" name="Rounded Rectangle 12"/>
           <p:cNvSpPr/>
           <p:nvPr/>
         </p:nvSpPr>
         <p:spPr>
           <a:xfrm>
-            <a:off x="5644" y="40703"/>
-            <a:ext cx="74612" cy="6667"/>
+            <a:off x="822960" y="5477256"/>
+            <a:ext cx="10545775" cy="914400"/>
           </a:xfrm>
           <a:prstGeom prst="roundRect">
             <a:avLst>
-              <a:gd name="adj" fmla="val 6000"/>
+              <a:gd name="adj" fmla="val 8000"/>
             </a:avLst>
           </a:prstGeom>
           <a:solidFill>
@@ -3873,14 +3819,14 @@
       </p:sp>
       <p:sp>
         <p:nvSpPr>
-          <p:cNvPr id="15" name="Oval 14"/>
+          <p:cNvPr id="14" name="Oval 13"/>
           <p:cNvSpPr/>
           <p:nvPr/>
         </p:nvSpPr>
         <p:spPr>
           <a:xfrm>
-            <a:off x="8501" y="42608"/>
-            <a:ext cx="2857" cy="2857"/>
+            <a:off x="1097280" y="5705856"/>
+            <a:ext cx="457200" cy="457200"/>
           </a:xfrm>
           <a:prstGeom prst="ellipse">
             <a:avLst/>
@@ -3917,14 +3863,14 @@
       </p:sp>
       <p:sp>
         <p:nvSpPr>
-          <p:cNvPr id="16" name="TextBox 15"/>
+          <p:cNvPr id="15" name="TextBox 14"/>
           <p:cNvSpPr txBox="1"/>
           <p:nvPr/>
         </p:nvSpPr>
         <p:spPr>
           <a:xfrm>
-            <a:off x="8501" y="42735"/>
-            <a:ext cx="2857" cy="2666"/>
+            <a:off x="1097280" y="5733288"/>
+            <a:ext cx="457200" cy="402336"/>
           </a:xfrm>
           <a:prstGeom prst="rect">
             <a:avLst/>
@@ -3943,7 +3889,7 @@
               </a:lnSpc>
             </a:pPr>
             <a:r>
-              <a:rPr sz="1600" b="1">
+              <a:rPr sz="1600" b="1" i="0">
                 <a:solidFill>
                   <a:srgbClr val="F8F6F1"/>
                 </a:solidFill>
@@ -3956,14 +3902,14 @@
       </p:sp>
       <p:sp>
         <p:nvSpPr>
-          <p:cNvPr id="17" name="TextBox 16"/>
+          <p:cNvPr id="16" name="TextBox 15"/>
           <p:cNvSpPr txBox="1"/>
           <p:nvPr/>
         </p:nvSpPr>
         <p:spPr>
           <a:xfrm>
-            <a:off x="14851" y="41592"/>
-            <a:ext cx="62230" cy="2222"/>
+            <a:off x="1828800" y="5623560"/>
+            <a:ext cx="9265615" cy="320040"/>
           </a:xfrm>
           <a:prstGeom prst="rect">
             <a:avLst/>
@@ -3982,7 +3928,7 @@
               </a:lnSpc>
             </a:pPr>
             <a:r>
-              <a:rPr sz="1700" b="1">
+              <a:rPr sz="1600" b="1" i="0">
                 <a:solidFill>
                   <a:srgbClr val="0E1F33"/>
                 </a:solidFill>
@@ -3995,14 +3941,14 @@
       </p:sp>
       <p:sp>
         <p:nvSpPr>
-          <p:cNvPr id="18" name="TextBox 17"/>
+          <p:cNvPr id="17" name="TextBox 16"/>
           <p:cNvSpPr txBox="1"/>
           <p:nvPr/>
         </p:nvSpPr>
         <p:spPr>
           <a:xfrm>
-            <a:off x="14851" y="44005"/>
-            <a:ext cx="62230" cy="2857"/>
+            <a:off x="1828800" y="5961888"/>
+            <a:ext cx="9265615" cy="365760"/>
           </a:xfrm>
           <a:prstGeom prst="rect">
             <a:avLst/>
@@ -4021,7 +3967,7 @@
               </a:lnSpc>
             </a:pPr>
             <a:r>
-              <a:rPr sz="1300" b="0">
+              <a:rPr sz="1200" b="0" i="0">
                 <a:solidFill>
                   <a:srgbClr val="4A5568"/>
                 </a:solidFill>
@@ -4034,14 +3980,14 @@
       </p:sp>
       <p:sp>
         <p:nvSpPr>
-          <p:cNvPr id="19" name="TextBox 18"/>
+          <p:cNvPr id="18" name="TextBox 17"/>
           <p:cNvSpPr txBox="1"/>
           <p:nvPr/>
         </p:nvSpPr>
         <p:spPr>
           <a:xfrm>
-            <a:off x="812800" y="6451600"/>
-            <a:ext cx="6350000" cy="190500"/>
+            <a:off x="822960" y="6419088"/>
+            <a:ext cx="8686800" cy="274320"/>
           </a:xfrm>
           <a:prstGeom prst="rect">
             <a:avLst/>
@@ -4060,7 +4006,7 @@
               </a:lnSpc>
             </a:pPr>
             <a:r>
-              <a:rPr sz="1100" b="0">
+              <a:rPr sz="1100" b="0" i="0">
                 <a:solidFill>
                   <a:srgbClr val="6A7179"/>
                 </a:solidFill>
@@ -4073,14 +4019,14 @@
       </p:sp>
       <p:sp>
         <p:nvSpPr>
-          <p:cNvPr id="20" name="TextBox 19"/>
+          <p:cNvPr id="19" name="TextBox 18"/>
           <p:cNvSpPr txBox="1"/>
           <p:nvPr/>
         </p:nvSpPr>
         <p:spPr>
           <a:xfrm>
-            <a:off x="10541000" y="6451600"/>
-            <a:ext cx="838200" cy="190500"/>
+            <a:off x="10454335" y="6419088"/>
+            <a:ext cx="914400" cy="274320"/>
           </a:xfrm>
           <a:prstGeom prst="rect">
             <a:avLst/>
@@ -4099,7 +4045,7 @@
               </a:lnSpc>
             </a:pPr>
             <a:r>
-              <a:rPr sz="1100" b="0">
+              <a:rPr sz="1100" b="0" i="0">
                 <a:solidFill>
                   <a:srgbClr val="6A7179"/>
                 </a:solidFill>
@@ -4144,8 +4090,69 @@
         </p:nvSpPr>
         <p:spPr>
           <a:xfrm>
-            <a:off x="812800" y="812800"/>
-            <a:ext cx="5715000" cy="190500"/>
+            <a:off x="822960" y="777240"/>
+            <a:ext cx="9692640" cy="5806440"/>
+          </a:xfrm>
+          <a:prstGeom prst="rect">
+            <a:avLst/>
+          </a:prstGeom>
+          <a:noFill/>
+        </p:spPr>
+        <p:txBody>
+          <a:bodyPr wrap="square" lIns="0" rIns="0" tIns="0" bIns="0">
+            <a:spAutoFit/>
+          </a:bodyPr>
+          <a:lstStyle/>
+          <a:p>
+            <a:pPr>
+              <a:lnSpc>
+                <a:spcPct val="100000"/>
+              </a:lnSpc>
+              <a:spcAft>
+                <a:spcPts val="1000"/>
+              </a:spcAft>
+            </a:pPr>
+            <a:r>
+              <a:rPr sz="1200" b="1" spc="120">
+                <a:solidFill>
+                  <a:srgbClr val="D9A857"/>
+                </a:solidFill>
+                <a:latin typeface="IBM Plex Sans"/>
+              </a:rPr>
+              <a:t>RISKS &amp; THE ASK</a:t>
+            </a:r>
+          </a:p>
+          <a:p>
+            <a:pPr>
+              <a:lnSpc>
+                <a:spcPct val="115000"/>
+              </a:lnSpc>
+              <a:spcAft>
+                <a:spcPts val="1200"/>
+              </a:spcAft>
+            </a:pPr>
+            <a:r>
+              <a:rPr sz="3000" b="0">
+                <a:solidFill>
+                  <a:srgbClr val="F8F6F1"/>
+                </a:solidFill>
+                <a:latin typeface="Source Serif 4"/>
+              </a:rPr>
+              <a:t>Two caveats, and what we are asking for</a:t>
+            </a:r>
+          </a:p>
+        </p:txBody>
+      </p:sp>
+      <p:sp>
+        <p:nvSpPr>
+          <p:cNvPr id="3" name="TextBox 2"/>
+          <p:cNvSpPr txBox="1"/>
+          <p:nvPr/>
+        </p:nvSpPr>
+        <p:spPr>
+          <a:xfrm>
+            <a:off x="822960" y="3246120"/>
+            <a:ext cx="4998567" cy="320040"/>
           </a:xfrm>
           <a:prstGeom prst="rect">
             <a:avLst/>
@@ -4164,27 +4171,27 @@
               </a:lnSpc>
             </a:pPr>
             <a:r>
-              <a:rPr sz="1200" b="1" spc="120">
+              <a:rPr sz="1200" b="1" i="0" spc="120">
                 <a:solidFill>
                   <a:srgbClr val="D9A857"/>
                 </a:solidFill>
                 <a:latin typeface="IBM Plex Sans"/>
               </a:rPr>
-              <a:t>RISKS &amp; THE ASK</a:t>
-            </a:r>
-          </a:p>
-        </p:txBody>
-      </p:sp>
-      <p:sp>
-        <p:nvSpPr>
-          <p:cNvPr id="3" name="TextBox 2"/>
+              <a:t>WHAT TO WATCH</a:t>
+            </a:r>
+          </a:p>
+        </p:txBody>
+      </p:sp>
+      <p:sp>
+        <p:nvSpPr>
+          <p:cNvPr id="4" name="TextBox 3"/>
           <p:cNvSpPr txBox="1"/>
           <p:nvPr/>
         </p:nvSpPr>
         <p:spPr>
           <a:xfrm>
-            <a:off x="812800" y="1066800"/>
-            <a:ext cx="9525000" cy="635000"/>
+            <a:off x="822960" y="3703320"/>
+            <a:ext cx="365760" cy="365760"/>
           </a:xfrm>
           <a:prstGeom prst="rect">
             <a:avLst/>
@@ -4203,27 +4210,27 @@
               </a:lnSpc>
             </a:pPr>
             <a:r>
-              <a:rPr sz="3200" b="0">
-                <a:solidFill>
-                  <a:srgbClr val="F8F6F1"/>
-                </a:solidFill>
-                <a:latin typeface="Source Serif 4"/>
-              </a:rPr>
-              <a:t>Two caveats, and what we are asking for</a:t>
-            </a:r>
-          </a:p>
-        </p:txBody>
-      </p:sp>
-      <p:sp>
-        <p:nvSpPr>
-          <p:cNvPr id="4" name="TextBox 3"/>
+              <a:rPr sz="1800" b="1" i="0">
+                <a:solidFill>
+                  <a:srgbClr val="D9A857"/>
+                </a:solidFill>
+                <a:latin typeface="IBM Plex Sans"/>
+              </a:rPr>
+              <a:t>!</a:t>
+            </a:r>
+          </a:p>
+        </p:txBody>
+      </p:sp>
+      <p:sp>
+        <p:nvSpPr>
+          <p:cNvPr id="5" name="TextBox 4"/>
           <p:cNvSpPr txBox="1"/>
           <p:nvPr/>
         </p:nvSpPr>
         <p:spPr>
           <a:xfrm>
-            <a:off x="5644" y="23495"/>
-            <a:ext cx="35560" cy="2222"/>
+            <a:off x="1234440" y="3685032"/>
+            <a:ext cx="4587087" cy="640080"/>
           </a:xfrm>
           <a:prstGeom prst="rect">
             <a:avLst/>
@@ -4238,31 +4245,31 @@
           <a:p>
             <a:pPr algn="l">
               <a:lnSpc>
-                <a:spcPct val="115000"/>
-              </a:lnSpc>
-            </a:pPr>
-            <a:r>
-              <a:rPr sz="1200" b="1" spc="120">
-                <a:solidFill>
-                  <a:srgbClr val="D9A857"/>
+                <a:spcPct val="135000"/>
+              </a:lnSpc>
+            </a:pPr>
+            <a:r>
+              <a:rPr sz="1300" b="0" i="0">
+                <a:solidFill>
+                  <a:srgbClr val="B9C2D6"/>
                 </a:solidFill>
                 <a:latin typeface="IBM Plex Sans"/>
               </a:rPr>
-              <a:t>WHAT TO WATCH</a:t>
-            </a:r>
-          </a:p>
-        </p:txBody>
-      </p:sp>
-      <p:sp>
-        <p:nvSpPr>
-          <p:cNvPr id="5" name="TextBox 4"/>
+              <a:t>Income utilization is a proxy for credit propensity, not a default-risk predictor.</a:t>
+            </a:r>
+          </a:p>
+        </p:txBody>
+      </p:sp>
+      <p:sp>
+        <p:nvSpPr>
+          <p:cNvPr id="6" name="TextBox 5"/>
           <p:cNvSpPr txBox="1"/>
           <p:nvPr/>
         </p:nvSpPr>
         <p:spPr>
           <a:xfrm>
-            <a:off x="5644" y="26352"/>
-            <a:ext cx="2540" cy="2540"/>
+            <a:off x="822960" y="4526280"/>
+            <a:ext cx="365760" cy="365760"/>
           </a:xfrm>
           <a:prstGeom prst="rect">
             <a:avLst/>
@@ -4281,7 +4288,7 @@
               </a:lnSpc>
             </a:pPr>
             <a:r>
-              <a:rPr sz="1800" b="1">
+              <a:rPr sz="1800" b="1" i="0">
                 <a:solidFill>
                   <a:srgbClr val="D9A857"/>
                 </a:solidFill>
@@ -4294,14 +4301,14 @@
       </p:sp>
       <p:sp>
         <p:nvSpPr>
-          <p:cNvPr id="6" name="TextBox 5"/>
+          <p:cNvPr id="7" name="TextBox 6"/>
           <p:cNvSpPr txBox="1"/>
           <p:nvPr/>
         </p:nvSpPr>
         <p:spPr>
           <a:xfrm>
-            <a:off x="8501" y="26225"/>
-            <a:ext cx="32702" cy="3810"/>
+            <a:off x="1234440" y="4507992"/>
+            <a:ext cx="4587087" cy="640080"/>
           </a:xfrm>
           <a:prstGeom prst="rect">
             <a:avLst/>
@@ -4320,27 +4327,27 @@
               </a:lnSpc>
             </a:pPr>
             <a:r>
-              <a:rPr sz="1400" b="0">
+              <a:rPr sz="1300" b="0" i="0">
                 <a:solidFill>
                   <a:srgbClr val="B9C2D6"/>
                 </a:solidFill>
                 <a:latin typeface="IBM Plex Sans"/>
               </a:rPr>
-              <a:t>Income utilization is a proxy for credit propensity, not a default-risk predictor.</a:t>
-            </a:r>
-          </a:p>
-        </p:txBody>
-      </p:sp>
-      <p:sp>
-        <p:nvSpPr>
-          <p:cNvPr id="7" name="TextBox 6"/>
+              <a:t>The analysis is a six-month snapshot, May–Oct. Continuous monitoring is needed post-launch.</a:t>
+            </a:r>
+          </a:p>
+        </p:txBody>
+      </p:sp>
+      <p:sp>
+        <p:nvSpPr>
+          <p:cNvPr id="8" name="TextBox 7"/>
           <p:cNvSpPr txBox="1"/>
           <p:nvPr/>
         </p:nvSpPr>
         <p:spPr>
           <a:xfrm>
-            <a:off x="5644" y="31750"/>
-            <a:ext cx="2540" cy="2540"/>
+            <a:off x="6370167" y="3246120"/>
+            <a:ext cx="4998567" cy="320040"/>
           </a:xfrm>
           <a:prstGeom prst="rect">
             <a:avLst/>
@@ -4359,27 +4366,27 @@
               </a:lnSpc>
             </a:pPr>
             <a:r>
-              <a:rPr sz="1800" b="1">
+              <a:rPr sz="1200" b="1" i="0" spc="120">
                 <a:solidFill>
                   <a:srgbClr val="D9A857"/>
                 </a:solidFill>
                 <a:latin typeface="IBM Plex Sans"/>
               </a:rPr>
-              <a:t>!</a:t>
-            </a:r>
-          </a:p>
-        </p:txBody>
-      </p:sp>
-      <p:sp>
-        <p:nvSpPr>
-          <p:cNvPr id="8" name="TextBox 7"/>
+              <a:t>THE ASK</a:t>
+            </a:r>
+          </a:p>
+        </p:txBody>
+      </p:sp>
+      <p:sp>
+        <p:nvSpPr>
+          <p:cNvPr id="9" name="TextBox 8"/>
           <p:cNvSpPr txBox="1"/>
           <p:nvPr/>
         </p:nvSpPr>
         <p:spPr>
           <a:xfrm>
-            <a:off x="8501" y="31623"/>
-            <a:ext cx="32702" cy="3810"/>
+            <a:off x="6370167" y="3703320"/>
+            <a:ext cx="365760" cy="365760"/>
           </a:xfrm>
           <a:prstGeom prst="rect">
             <a:avLst/>
@@ -4394,31 +4401,31 @@
           <a:p>
             <a:pPr algn="l">
               <a:lnSpc>
-                <a:spcPct val="135000"/>
-              </a:lnSpc>
-            </a:pPr>
-            <a:r>
-              <a:rPr sz="1400" b="0">
-                <a:solidFill>
-                  <a:srgbClr val="B9C2D6"/>
+                <a:spcPct val="115000"/>
+              </a:lnSpc>
+            </a:pPr>
+            <a:r>
+              <a:rPr sz="1800" b="1" i="0">
+                <a:solidFill>
+                  <a:srgbClr val="D9A857"/>
                 </a:solidFill>
                 <a:latin typeface="IBM Plex Sans"/>
               </a:rPr>
-              <a:t>The analysis is a six-month snapshot, May–Oct. Continuous monitoring is needed post-launch.</a:t>
-            </a:r>
-          </a:p>
-        </p:txBody>
-      </p:sp>
-      <p:sp>
-        <p:nvSpPr>
-          <p:cNvPr id="9" name="TextBox 8"/>
+              <a:t>✓</a:t>
+            </a:r>
+          </a:p>
+        </p:txBody>
+      </p:sp>
+      <p:sp>
+        <p:nvSpPr>
+          <p:cNvPr id="10" name="TextBox 9"/>
           <p:cNvSpPr txBox="1"/>
           <p:nvPr/>
         </p:nvSpPr>
         <p:spPr>
           <a:xfrm>
-            <a:off x="43497" y="23495"/>
-            <a:ext cx="35560" cy="2222"/>
+            <a:off x="6781647" y="3685032"/>
+            <a:ext cx="4587087" cy="640080"/>
           </a:xfrm>
           <a:prstGeom prst="rect">
             <a:avLst/>
@@ -4433,31 +4440,31 @@
           <a:p>
             <a:pPr algn="l">
               <a:lnSpc>
-                <a:spcPct val="115000"/>
-              </a:lnSpc>
-            </a:pPr>
-            <a:r>
-              <a:rPr sz="1200" b="1" spc="120">
-                <a:solidFill>
-                  <a:srgbClr val="D9A857"/>
+                <a:spcPct val="135000"/>
+              </a:lnSpc>
+            </a:pPr>
+            <a:r>
+              <a:rPr sz="1300" b="0" i="0">
+                <a:solidFill>
+                  <a:srgbClr val="F8F6F1"/>
                 </a:solidFill>
                 <a:latin typeface="IBM Plex Sans"/>
               </a:rPr>
-              <a:t>THE ASK</a:t>
-            </a:r>
-          </a:p>
-        </p:txBody>
-      </p:sp>
-      <p:sp>
-        <p:nvSpPr>
-          <p:cNvPr id="10" name="TextBox 9"/>
+              <a:t>Approve the three-card charter and the feature sets on the prior slide.</a:t>
+            </a:r>
+          </a:p>
+        </p:txBody>
+      </p:sp>
+      <p:sp>
+        <p:nvSpPr>
+          <p:cNvPr id="11" name="TextBox 10"/>
           <p:cNvSpPr txBox="1"/>
           <p:nvPr/>
         </p:nvSpPr>
         <p:spPr>
           <a:xfrm>
-            <a:off x="43497" y="26352"/>
-            <a:ext cx="2540" cy="2540"/>
+            <a:off x="6370167" y="4526280"/>
+            <a:ext cx="365760" cy="365760"/>
           </a:xfrm>
           <a:prstGeom prst="rect">
             <a:avLst/>
@@ -4476,7 +4483,7 @@
               </a:lnSpc>
             </a:pPr>
             <a:r>
-              <a:rPr sz="1800" b="1">
+              <a:rPr sz="1800" b="1" i="0">
                 <a:solidFill>
                   <a:srgbClr val="D9A857"/>
                 </a:solidFill>
@@ -4489,14 +4496,14 @@
       </p:sp>
       <p:sp>
         <p:nvSpPr>
-          <p:cNvPr id="11" name="TextBox 10"/>
+          <p:cNvPr id="12" name="TextBox 11"/>
           <p:cNvSpPr txBox="1"/>
           <p:nvPr/>
         </p:nvSpPr>
         <p:spPr>
           <a:xfrm>
-            <a:off x="46355" y="26225"/>
-            <a:ext cx="32702" cy="3810"/>
+            <a:off x="6781647" y="4507992"/>
+            <a:ext cx="4587087" cy="640080"/>
           </a:xfrm>
           <a:prstGeom prst="rect">
             <a:avLst/>
@@ -4515,27 +4522,27 @@
               </a:lnSpc>
             </a:pPr>
             <a:r>
-              <a:rPr sz="1400" b="0">
+              <a:rPr sz="1300" b="0" i="0">
                 <a:solidFill>
                   <a:srgbClr val="F8F6F1"/>
                 </a:solidFill>
                 <a:latin typeface="IBM Plex Sans"/>
               </a:rPr>
-              <a:t>Approve the three-card charter and the feature sets on the prior slide.</a:t>
-            </a:r>
-          </a:p>
-        </p:txBody>
-      </p:sp>
-      <p:sp>
-        <p:nvSpPr>
-          <p:cNvPr id="12" name="TextBox 11"/>
+              <a:t>Fund the payroll and UPI go-to-market sprint, targeting the metro IT segment first.</a:t>
+            </a:r>
+          </a:p>
+        </p:txBody>
+      </p:sp>
+      <p:sp>
+        <p:nvSpPr>
+          <p:cNvPr id="13" name="TextBox 12"/>
           <p:cNvSpPr txBox="1"/>
           <p:nvPr/>
         </p:nvSpPr>
         <p:spPr>
           <a:xfrm>
-            <a:off x="43497" y="31750"/>
-            <a:ext cx="2540" cy="2540"/>
+            <a:off x="822960" y="6419088"/>
+            <a:ext cx="8686800" cy="274320"/>
           </a:xfrm>
           <a:prstGeom prst="rect">
             <a:avLst/>
@@ -4554,27 +4561,27 @@
               </a:lnSpc>
             </a:pPr>
             <a:r>
-              <a:rPr sz="1800" b="1">
-                <a:solidFill>
-                  <a:srgbClr val="D9A857"/>
+              <a:rPr sz="1100" b="0" i="0">
+                <a:solidFill>
+                  <a:srgbClr val="B9C2D6"/>
                 </a:solidFill>
                 <a:latin typeface="IBM Plex Sans"/>
               </a:rPr>
-              <a:t>✓</a:t>
-            </a:r>
-          </a:p>
-        </p:txBody>
-      </p:sp>
-      <p:sp>
-        <p:nvSpPr>
-          <p:cNvPr id="13" name="TextBox 12"/>
+              <a:t>Mitron Bank · Credit Card Strategy</a:t>
+            </a:r>
+          </a:p>
+        </p:txBody>
+      </p:sp>
+      <p:sp>
+        <p:nvSpPr>
+          <p:cNvPr id="14" name="TextBox 13"/>
           <p:cNvSpPr txBox="1"/>
           <p:nvPr/>
         </p:nvSpPr>
         <p:spPr>
           <a:xfrm>
-            <a:off x="46355" y="31623"/>
-            <a:ext cx="32702" cy="3810"/>
+            <a:off x="10454335" y="6419088"/>
+            <a:ext cx="914400" cy="274320"/>
           </a:xfrm>
           <a:prstGeom prst="rect">
             <a:avLst/>
@@ -4587,91 +4594,13 @@
           </a:bodyPr>
           <a:lstStyle/>
           <a:p>
-            <a:pPr algn="l">
-              <a:lnSpc>
-                <a:spcPct val="135000"/>
-              </a:lnSpc>
-            </a:pPr>
-            <a:r>
-              <a:rPr sz="1400" b="0">
-                <a:solidFill>
-                  <a:srgbClr val="F8F6F1"/>
-                </a:solidFill>
-                <a:latin typeface="IBM Plex Sans"/>
-              </a:rPr>
-              <a:t>Fund the payroll and UPI go-to-market sprint, targeting the metro IT segment first.</a:t>
-            </a:r>
-          </a:p>
-        </p:txBody>
-      </p:sp>
-      <p:sp>
-        <p:nvSpPr>
-          <p:cNvPr id="14" name="TextBox 13"/>
-          <p:cNvSpPr txBox="1"/>
-          <p:nvPr/>
-        </p:nvSpPr>
-        <p:spPr>
-          <a:xfrm>
-            <a:off x="812800" y="6451600"/>
-            <a:ext cx="6350000" cy="190500"/>
-          </a:xfrm>
-          <a:prstGeom prst="rect">
-            <a:avLst/>
-          </a:prstGeom>
-          <a:noFill/>
-        </p:spPr>
-        <p:txBody>
-          <a:bodyPr wrap="square" anchor="t" lIns="0" rIns="0" tIns="0" bIns="0">
-            <a:spAutoFit/>
-          </a:bodyPr>
-          <a:lstStyle/>
-          <a:p>
-            <a:pPr algn="l">
+            <a:pPr algn="r">
               <a:lnSpc>
                 <a:spcPct val="115000"/>
               </a:lnSpc>
             </a:pPr>
             <a:r>
-              <a:rPr sz="1100" b="0">
-                <a:solidFill>
-                  <a:srgbClr val="B9C2D6"/>
-                </a:solidFill>
-                <a:latin typeface="IBM Plex Sans"/>
-              </a:rPr>
-              <a:t>Mitron Bank · Credit Card Strategy</a:t>
-            </a:r>
-          </a:p>
-        </p:txBody>
-      </p:sp>
-      <p:sp>
-        <p:nvSpPr>
-          <p:cNvPr id="15" name="TextBox 14"/>
-          <p:cNvSpPr txBox="1"/>
-          <p:nvPr/>
-        </p:nvSpPr>
-        <p:spPr>
-          <a:xfrm>
-            <a:off x="10541000" y="6451600"/>
-            <a:ext cx="838200" cy="190500"/>
-          </a:xfrm>
-          <a:prstGeom prst="rect">
-            <a:avLst/>
-          </a:prstGeom>
-          <a:noFill/>
-        </p:spPr>
-        <p:txBody>
-          <a:bodyPr wrap="square" anchor="t" lIns="0" rIns="0" tIns="0" bIns="0">
-            <a:spAutoFit/>
-          </a:bodyPr>
-          <a:lstStyle/>
-          <a:p>
-            <a:pPr algn="r">
-              <a:lnSpc>
-                <a:spcPct val="115000"/>
-              </a:lnSpc>
-            </a:pPr>
-            <a:r>
-              <a:rPr sz="1100" b="0">
+              <a:rPr sz="1100" b="0" i="0">
                 <a:solidFill>
                   <a:srgbClr val="B9C2D6"/>
                 </a:solidFill>
@@ -4716,8 +4645,8 @@
         </p:nvSpPr>
         <p:spPr>
           <a:xfrm>
-            <a:off x="812800" y="812800"/>
-            <a:ext cx="5715000" cy="190500"/>
+            <a:off x="822960" y="777240"/>
+            <a:ext cx="9692640" cy="5806440"/>
           </a:xfrm>
           <a:prstGeom prst="rect">
             <a:avLst/>
@@ -4725,57 +4654,40 @@
           <a:noFill/>
         </p:spPr>
         <p:txBody>
-          <a:bodyPr wrap="square" anchor="t" lIns="0" rIns="0" tIns="0" bIns="0">
+          <a:bodyPr wrap="square" lIns="0" rIns="0" tIns="0" bIns="0">
             <a:spAutoFit/>
           </a:bodyPr>
           <a:lstStyle/>
           <a:p>
-            <a:pPr algn="l">
+            <a:pPr>
+              <a:lnSpc>
+                <a:spcPct val="100000"/>
+              </a:lnSpc>
+              <a:spcAft>
+                <a:spcPts val="1000"/>
+              </a:spcAft>
+            </a:pPr>
+            <a:r>
+              <a:rPr sz="1200" b="1" spc="120">
+                <a:solidFill>
+                  <a:srgbClr val="7A5A1E"/>
+                </a:solidFill>
+                <a:latin typeface="IBM Plex Sans"/>
+              </a:rPr>
+              <a:t>CONTEXT</a:t>
+            </a:r>
+          </a:p>
+          <a:p>
+            <a:pPr>
               <a:lnSpc>
                 <a:spcPct val="115000"/>
               </a:lnSpc>
-            </a:pPr>
-            <a:r>
-              <a:rPr sz="1200" b="1" spc="120">
-                <a:solidFill>
-                  <a:srgbClr val="7A5A1E"/>
-                </a:solidFill>
-                <a:latin typeface="IBM Plex Sans"/>
-              </a:rPr>
-              <a:t>CONTEXT</a:t>
-            </a:r>
-          </a:p>
-        </p:txBody>
-      </p:sp>
-      <p:sp>
-        <p:nvSpPr>
-          <p:cNvPr id="3" name="TextBox 2"/>
-          <p:cNvSpPr txBox="1"/>
-          <p:nvPr/>
-        </p:nvSpPr>
-        <p:spPr>
-          <a:xfrm>
-            <a:off x="812800" y="1066800"/>
-            <a:ext cx="9525000" cy="635000"/>
-          </a:xfrm>
-          <a:prstGeom prst="rect">
-            <a:avLst/>
-          </a:prstGeom>
-          <a:noFill/>
-        </p:spPr>
-        <p:txBody>
-          <a:bodyPr wrap="square" anchor="t" lIns="0" rIns="0" tIns="0" bIns="0">
-            <a:spAutoFit/>
-          </a:bodyPr>
-          <a:lstStyle/>
-          <a:p>
-            <a:pPr algn="l">
-              <a:lnSpc>
-                <a:spcPct val="115000"/>
-              </a:lnSpc>
-            </a:pPr>
-            <a:r>
-              <a:rPr sz="3200" b="0">
+              <a:spcAft>
+                <a:spcPts val="1200"/>
+              </a:spcAft>
+            </a:pPr>
+            <a:r>
+              <a:rPr sz="3000" b="0">
                 <a:solidFill>
                   <a:srgbClr val="0E1F33"/>
                 </a:solidFill>
@@ -4788,18 +4700,18 @@
       </p:sp>
       <p:sp>
         <p:nvSpPr>
-          <p:cNvPr id="4" name="Rounded Rectangle 3"/>
+          <p:cNvPr id="3" name="Rounded Rectangle 2"/>
           <p:cNvSpPr/>
           <p:nvPr/>
         </p:nvSpPr>
         <p:spPr>
           <a:xfrm>
-            <a:off x="5644" y="22860"/>
-            <a:ext cx="23241" cy="14922"/>
+            <a:off x="822960" y="3246120"/>
+            <a:ext cx="2423160" cy="1508760"/>
           </a:xfrm>
           <a:prstGeom prst="roundRect">
             <a:avLst>
-              <a:gd name="adj" fmla="val 6000"/>
+              <a:gd name="adj" fmla="val 8000"/>
             </a:avLst>
           </a:prstGeom>
           <a:solidFill>
@@ -4836,18 +4748,96 @@
       </p:sp>
       <p:sp>
         <p:nvSpPr>
-          <p:cNvPr id="5" name="Rounded Rectangle 4"/>
+          <p:cNvPr id="4" name="TextBox 3"/>
+          <p:cNvSpPr txBox="1"/>
+          <p:nvPr/>
+        </p:nvSpPr>
+        <p:spPr>
+          <a:xfrm>
+            <a:off x="1024128" y="3429000"/>
+            <a:ext cx="2020824" cy="548640"/>
+          </a:xfrm>
+          <a:prstGeom prst="rect">
+            <a:avLst/>
+          </a:prstGeom>
+          <a:noFill/>
+        </p:spPr>
+        <p:txBody>
+          <a:bodyPr wrap="square" anchor="t" lIns="0" rIns="0" tIns="0" bIns="0">
+            <a:spAutoFit/>
+          </a:bodyPr>
+          <a:lstStyle/>
+          <a:p>
+            <a:pPr algn="l">
+              <a:lnSpc>
+                <a:spcPct val="115000"/>
+              </a:lnSpc>
+            </a:pPr>
+            <a:r>
+              <a:rPr sz="2600" b="1" i="0">
+                <a:solidFill>
+                  <a:srgbClr val="0E1F33"/>
+                </a:solidFill>
+                <a:latin typeface="Source Serif 4"/>
+              </a:rPr>
+              <a:t>4,000</a:t>
+            </a:r>
+          </a:p>
+        </p:txBody>
+      </p:sp>
+      <p:sp>
+        <p:nvSpPr>
+          <p:cNvPr id="5" name="TextBox 4"/>
+          <p:cNvSpPr txBox="1"/>
+          <p:nvPr/>
+        </p:nvSpPr>
+        <p:spPr>
+          <a:xfrm>
+            <a:off x="1024128" y="4023359"/>
+            <a:ext cx="2020824" cy="640080"/>
+          </a:xfrm>
+          <a:prstGeom prst="rect">
+            <a:avLst/>
+          </a:prstGeom>
+          <a:noFill/>
+        </p:spPr>
+        <p:txBody>
+          <a:bodyPr wrap="square" anchor="t" lIns="0" rIns="0" tIns="0" bIns="0">
+            <a:spAutoFit/>
+          </a:bodyPr>
+          <a:lstStyle/>
+          <a:p>
+            <a:pPr algn="l">
+              <a:lnSpc>
+                <a:spcPct val="130000"/>
+              </a:lnSpc>
+            </a:pPr>
+            <a:r>
+              <a:rPr sz="1200" b="0" i="0">
+                <a:solidFill>
+                  <a:srgbClr val="4A5568"/>
+                </a:solidFill>
+                <a:latin typeface="IBM Plex Sans"/>
+              </a:rPr>
+              <a:t>customers, 864,000 transactions tracked</a:t>
+            </a:r>
+          </a:p>
+        </p:txBody>
+      </p:sp>
+      <p:sp>
+        <p:nvSpPr>
+          <p:cNvPr id="6" name="Rounded Rectangle 5"/>
           <p:cNvSpPr/>
           <p:nvPr/>
         </p:nvSpPr>
         <p:spPr>
           <a:xfrm>
-            <a:off x="23327" y="22860"/>
-            <a:ext cx="23241" cy="14922"/>
+            <a:off x="3465575" y="3246120"/>
+            <a:ext cx="2423160" cy="1508760"/>
           </a:xfrm>
           <a:prstGeom prst="roundRect">
             <a:avLst>
-              <a:gd name="adj" fmla="val 6000"/>
+              <a:gd name="adj" fmla="val 8000"/>
             </a:avLst>
           </a:prstGeom>
           <a:solidFill>
@@ -4884,18 +4874,96 @@
       </p:sp>
       <p:sp>
         <p:nvSpPr>
-          <p:cNvPr id="6" name="Rounded Rectangle 5"/>
+          <p:cNvPr id="7" name="TextBox 6"/>
+          <p:cNvSpPr txBox="1"/>
+          <p:nvPr/>
+        </p:nvSpPr>
+        <p:spPr>
+          <a:xfrm>
+            <a:off x="3666744" y="3429000"/>
+            <a:ext cx="2020824" cy="548640"/>
+          </a:xfrm>
+          <a:prstGeom prst="rect">
+            <a:avLst/>
+          </a:prstGeom>
+          <a:noFill/>
+        </p:spPr>
+        <p:txBody>
+          <a:bodyPr wrap="square" anchor="t" lIns="0" rIns="0" tIns="0" bIns="0">
+            <a:spAutoFit/>
+          </a:bodyPr>
+          <a:lstStyle/>
+          <a:p>
+            <a:pPr algn="l">
+              <a:lnSpc>
+                <a:spcPct val="115000"/>
+              </a:lnSpc>
+            </a:pPr>
+            <a:r>
+              <a:rPr sz="2600" b="1" i="0">
+                <a:solidFill>
+                  <a:srgbClr val="0E1F33"/>
+                </a:solidFill>
+                <a:latin typeface="Source Serif 4"/>
+              </a:rPr>
+              <a:t>₹88.48M</a:t>
+            </a:r>
+          </a:p>
+        </p:txBody>
+      </p:sp>
+      <p:sp>
+        <p:nvSpPr>
+          <p:cNvPr id="8" name="TextBox 7"/>
+          <p:cNvSpPr txBox="1"/>
+          <p:nvPr/>
+        </p:nvSpPr>
+        <p:spPr>
+          <a:xfrm>
+            <a:off x="3666744" y="4023359"/>
+            <a:ext cx="2020824" cy="640080"/>
+          </a:xfrm>
+          <a:prstGeom prst="rect">
+            <a:avLst/>
+          </a:prstGeom>
+          <a:noFill/>
+        </p:spPr>
+        <p:txBody>
+          <a:bodyPr wrap="square" anchor="t" lIns="0" rIns="0" tIns="0" bIns="0">
+            <a:spAutoFit/>
+          </a:bodyPr>
+          <a:lstStyle/>
+          <a:p>
+            <a:pPr algn="l">
+              <a:lnSpc>
+                <a:spcPct val="130000"/>
+              </a:lnSpc>
+            </a:pPr>
+            <a:r>
+              <a:rPr sz="1200" b="0" i="0">
+                <a:solidFill>
+                  <a:srgbClr val="4A5568"/>
+                </a:solidFill>
+                <a:latin typeface="IBM Plex Sans"/>
+              </a:rPr>
+              <a:t>average monthly spend, portfolio-wide</a:t>
+            </a:r>
+          </a:p>
+        </p:txBody>
+      </p:sp>
+      <p:sp>
+        <p:nvSpPr>
+          <p:cNvPr id="9" name="Rounded Rectangle 8"/>
           <p:cNvSpPr/>
           <p:nvPr/>
         </p:nvSpPr>
         <p:spPr>
           <a:xfrm>
-            <a:off x="41010" y="22860"/>
-            <a:ext cx="23241" cy="14922"/>
+            <a:off x="6108192" y="3246120"/>
+            <a:ext cx="2423160" cy="1508760"/>
           </a:xfrm>
           <a:prstGeom prst="roundRect">
             <a:avLst>
-              <a:gd name="adj" fmla="val 6000"/>
+              <a:gd name="adj" fmla="val 8000"/>
             </a:avLst>
           </a:prstGeom>
           <a:solidFill>
@@ -4932,18 +5000,96 @@
       </p:sp>
       <p:sp>
         <p:nvSpPr>
-          <p:cNvPr id="7" name="Rounded Rectangle 6"/>
+          <p:cNvPr id="10" name="TextBox 9"/>
+          <p:cNvSpPr txBox="1"/>
+          <p:nvPr/>
+        </p:nvSpPr>
+        <p:spPr>
+          <a:xfrm>
+            <a:off x="6309359" y="3429000"/>
+            <a:ext cx="2020824" cy="548640"/>
+          </a:xfrm>
+          <a:prstGeom prst="rect">
+            <a:avLst/>
+          </a:prstGeom>
+          <a:noFill/>
+        </p:spPr>
+        <p:txBody>
+          <a:bodyPr wrap="square" anchor="t" lIns="0" rIns="0" tIns="0" bIns="0">
+            <a:spAutoFit/>
+          </a:bodyPr>
+          <a:lstStyle/>
+          <a:p>
+            <a:pPr algn="l">
+              <a:lnSpc>
+                <a:spcPct val="115000"/>
+              </a:lnSpc>
+            </a:pPr>
+            <a:r>
+              <a:rPr sz="2600" b="1" i="0">
+                <a:solidFill>
+                  <a:srgbClr val="0E1F33"/>
+                </a:solidFill>
+                <a:latin typeface="Source Serif 4"/>
+              </a:rPr>
+              <a:t>₹206.63M</a:t>
+            </a:r>
+          </a:p>
+        </p:txBody>
+      </p:sp>
+      <p:sp>
+        <p:nvSpPr>
+          <p:cNvPr id="11" name="TextBox 10"/>
+          <p:cNvSpPr txBox="1"/>
+          <p:nvPr/>
+        </p:nvSpPr>
+        <p:spPr>
+          <a:xfrm>
+            <a:off x="6309359" y="4023359"/>
+            <a:ext cx="2020824" cy="640080"/>
+          </a:xfrm>
+          <a:prstGeom prst="rect">
+            <a:avLst/>
+          </a:prstGeom>
+          <a:noFill/>
+        </p:spPr>
+        <p:txBody>
+          <a:bodyPr wrap="square" anchor="t" lIns="0" rIns="0" tIns="0" bIns="0">
+            <a:spAutoFit/>
+          </a:bodyPr>
+          <a:lstStyle/>
+          <a:p>
+            <a:pPr algn="l">
+              <a:lnSpc>
+                <a:spcPct val="130000"/>
+              </a:lnSpc>
+            </a:pPr>
+            <a:r>
+              <a:rPr sz="1200" b="0" i="0">
+                <a:solidFill>
+                  <a:srgbClr val="4A5568"/>
+                </a:solidFill>
+                <a:latin typeface="IBM Plex Sans"/>
+              </a:rPr>
+              <a:t>average monthly income, portfolio-wide</a:t>
+            </a:r>
+          </a:p>
+        </p:txBody>
+      </p:sp>
+      <p:sp>
+        <p:nvSpPr>
+          <p:cNvPr id="12" name="Rounded Rectangle 11"/>
           <p:cNvSpPr/>
           <p:nvPr/>
         </p:nvSpPr>
         <p:spPr>
           <a:xfrm>
-            <a:off x="58693" y="22860"/>
-            <a:ext cx="23241" cy="14922"/>
+            <a:off x="8750807" y="3246120"/>
+            <a:ext cx="2423160" cy="1508760"/>
           </a:xfrm>
           <a:prstGeom prst="roundRect">
             <a:avLst>
-              <a:gd name="adj" fmla="val 6000"/>
+              <a:gd name="adj" fmla="val 8000"/>
             </a:avLst>
           </a:prstGeom>
           <a:solidFill>
@@ -4978,14 +5124,14 @@
       </p:sp>
       <p:sp>
         <p:nvSpPr>
-          <p:cNvPr id="8" name="TextBox 7"/>
+          <p:cNvPr id="13" name="TextBox 12"/>
           <p:cNvSpPr txBox="1"/>
           <p:nvPr/>
         </p:nvSpPr>
         <p:spPr>
           <a:xfrm>
-            <a:off x="5644" y="24447"/>
-            <a:ext cx="21336" cy="5715"/>
+            <a:off x="8951976" y="3429000"/>
+            <a:ext cx="2020824" cy="548640"/>
           </a:xfrm>
           <a:prstGeom prst="rect">
             <a:avLst/>
@@ -5004,27 +5150,27 @@
               </a:lnSpc>
             </a:pPr>
             <a:r>
-              <a:rPr sz="3200" b="1">
-                <a:solidFill>
-                  <a:srgbClr val="0E1F33"/>
+              <a:rPr sz="2600" b="1" i="0">
+                <a:solidFill>
+                  <a:srgbClr val="D9A857"/>
                 </a:solidFill>
                 <a:latin typeface="Source Serif 4"/>
               </a:rPr>
-              <a:t>4,000</a:t>
-            </a:r>
-          </a:p>
-        </p:txBody>
-      </p:sp>
-      <p:sp>
-        <p:nvSpPr>
-          <p:cNvPr id="9" name="TextBox 8"/>
+              <a:t>42.82%</a:t>
+            </a:r>
+          </a:p>
+        </p:txBody>
+      </p:sp>
+      <p:sp>
+        <p:nvSpPr>
+          <p:cNvPr id="14" name="TextBox 13"/>
           <p:cNvSpPr txBox="1"/>
           <p:nvPr/>
         </p:nvSpPr>
         <p:spPr>
           <a:xfrm>
-            <a:off x="5644" y="30162"/>
-            <a:ext cx="21336" cy="5715"/>
+            <a:off x="8951976" y="4023359"/>
+            <a:ext cx="2020824" cy="640080"/>
           </a:xfrm>
           <a:prstGeom prst="rect">
             <a:avLst/>
@@ -5043,27 +5189,27 @@
               </a:lnSpc>
             </a:pPr>
             <a:r>
-              <a:rPr sz="1300" b="0">
-                <a:solidFill>
-                  <a:srgbClr val="4A5568"/>
+              <a:rPr sz="1200" b="0" i="0">
+                <a:solidFill>
+                  <a:srgbClr val="B9C2D6"/>
                 </a:solidFill>
                 <a:latin typeface="IBM Plex Sans"/>
               </a:rPr>
-              <a:t>customers, 864,000 transactions tracked</a:t>
-            </a:r>
-          </a:p>
-        </p:txBody>
-      </p:sp>
-      <p:sp>
-        <p:nvSpPr>
-          <p:cNvPr id="10" name="TextBox 9"/>
+              <a:t>of income the portfolio already spends monthly</a:t>
+            </a:r>
+          </a:p>
+        </p:txBody>
+      </p:sp>
+      <p:sp>
+        <p:nvSpPr>
+          <p:cNvPr id="15" name="TextBox 14"/>
           <p:cNvSpPr txBox="1"/>
           <p:nvPr/>
         </p:nvSpPr>
         <p:spPr>
           <a:xfrm>
-            <a:off x="23327" y="24447"/>
-            <a:ext cx="21336" cy="5715"/>
+            <a:off x="822960" y="5120640"/>
+            <a:ext cx="9144000" cy="822960"/>
           </a:xfrm>
           <a:prstGeom prst="rect">
             <a:avLst/>
@@ -5078,31 +5224,31 @@
           <a:p>
             <a:pPr algn="l">
               <a:lnSpc>
-                <a:spcPct val="115000"/>
-              </a:lnSpc>
-            </a:pPr>
-            <a:r>
-              <a:rPr sz="3200" b="1">
+                <a:spcPct val="130000"/>
+              </a:lnSpc>
+            </a:pPr>
+            <a:r>
+              <a:rPr sz="1800" b="1" i="0">
                 <a:solidFill>
                   <a:srgbClr val="0E1F33"/>
                 </a:solidFill>
-                <a:latin typeface="Source Serif 4"/>
-              </a:rPr>
-              <a:t>₹88.48M</a:t>
-            </a:r>
-          </a:p>
-        </p:txBody>
-      </p:sp>
-      <p:sp>
-        <p:nvSpPr>
-          <p:cNvPr id="11" name="TextBox 10"/>
+                <a:latin typeface="IBM Plex Sans"/>
+              </a:rPr>
+              <a:t>Retail banking growth starts with the credit line, and the data already shows where to point it.</a:t>
+            </a:r>
+          </a:p>
+        </p:txBody>
+      </p:sp>
+      <p:sp>
+        <p:nvSpPr>
+          <p:cNvPr id="16" name="TextBox 15"/>
           <p:cNvSpPr txBox="1"/>
           <p:nvPr/>
         </p:nvSpPr>
         <p:spPr>
           <a:xfrm>
-            <a:off x="23327" y="30162"/>
-            <a:ext cx="21336" cy="5715"/>
+            <a:off x="822960" y="6419088"/>
+            <a:ext cx="8686800" cy="274320"/>
           </a:xfrm>
           <a:prstGeom prst="rect">
             <a:avLst/>
@@ -5117,31 +5263,31 @@
           <a:p>
             <a:pPr algn="l">
               <a:lnSpc>
-                <a:spcPct val="130000"/>
-              </a:lnSpc>
-            </a:pPr>
-            <a:r>
-              <a:rPr sz="1300" b="0">
-                <a:solidFill>
-                  <a:srgbClr val="4A5568"/>
+                <a:spcPct val="115000"/>
+              </a:lnSpc>
+            </a:pPr>
+            <a:r>
+              <a:rPr sz="1100" b="0" i="0">
+                <a:solidFill>
+                  <a:srgbClr val="6A7179"/>
                 </a:solidFill>
                 <a:latin typeface="IBM Plex Sans"/>
               </a:rPr>
-              <a:t>average monthly spend, portfolio-wide</a:t>
-            </a:r>
-          </a:p>
-        </p:txBody>
-      </p:sp>
-      <p:sp>
-        <p:nvSpPr>
-          <p:cNvPr id="12" name="TextBox 11"/>
+              <a:t>Source: dim_customers.csv × fact_spends.csv — 6-month window (May–Oct)</a:t>
+            </a:r>
+          </a:p>
+        </p:txBody>
+      </p:sp>
+      <p:sp>
+        <p:nvSpPr>
+          <p:cNvPr id="17" name="TextBox 16"/>
           <p:cNvSpPr txBox="1"/>
           <p:nvPr/>
         </p:nvSpPr>
         <p:spPr>
           <a:xfrm>
-            <a:off x="41010" y="24447"/>
-            <a:ext cx="21336" cy="5715"/>
+            <a:off x="10454335" y="6419088"/>
+            <a:ext cx="914400" cy="274320"/>
           </a:xfrm>
           <a:prstGeom prst="rect">
             <a:avLst/>
@@ -5154,247 +5300,13 @@
           </a:bodyPr>
           <a:lstStyle/>
           <a:p>
-            <a:pPr algn="l">
+            <a:pPr algn="r">
               <a:lnSpc>
                 <a:spcPct val="115000"/>
               </a:lnSpc>
             </a:pPr>
             <a:r>
-              <a:rPr sz="3200" b="1">
-                <a:solidFill>
-                  <a:srgbClr val="0E1F33"/>
-                </a:solidFill>
-                <a:latin typeface="Source Serif 4"/>
-              </a:rPr>
-              <a:t>₹206.63M</a:t>
-            </a:r>
-          </a:p>
-        </p:txBody>
-      </p:sp>
-      <p:sp>
-        <p:nvSpPr>
-          <p:cNvPr id="13" name="TextBox 12"/>
-          <p:cNvSpPr txBox="1"/>
-          <p:nvPr/>
-        </p:nvSpPr>
-        <p:spPr>
-          <a:xfrm>
-            <a:off x="41010" y="30162"/>
-            <a:ext cx="21336" cy="5715"/>
-          </a:xfrm>
-          <a:prstGeom prst="rect">
-            <a:avLst/>
-          </a:prstGeom>
-          <a:noFill/>
-        </p:spPr>
-        <p:txBody>
-          <a:bodyPr wrap="square" anchor="t" lIns="0" rIns="0" tIns="0" bIns="0">
-            <a:spAutoFit/>
-          </a:bodyPr>
-          <a:lstStyle/>
-          <a:p>
-            <a:pPr algn="l">
-              <a:lnSpc>
-                <a:spcPct val="130000"/>
-              </a:lnSpc>
-            </a:pPr>
-            <a:r>
-              <a:rPr sz="1300" b="0">
-                <a:solidFill>
-                  <a:srgbClr val="4A5568"/>
-                </a:solidFill>
-                <a:latin typeface="IBM Plex Sans"/>
-              </a:rPr>
-              <a:t>average monthly income, portfolio-wide</a:t>
-            </a:r>
-          </a:p>
-        </p:txBody>
-      </p:sp>
-      <p:sp>
-        <p:nvSpPr>
-          <p:cNvPr id="14" name="TextBox 13"/>
-          <p:cNvSpPr txBox="1"/>
-          <p:nvPr/>
-        </p:nvSpPr>
-        <p:spPr>
-          <a:xfrm>
-            <a:off x="58693" y="24447"/>
-            <a:ext cx="21336" cy="5715"/>
-          </a:xfrm>
-          <a:prstGeom prst="rect">
-            <a:avLst/>
-          </a:prstGeom>
-          <a:noFill/>
-        </p:spPr>
-        <p:txBody>
-          <a:bodyPr wrap="square" anchor="t" lIns="0" rIns="0" tIns="0" bIns="0">
-            <a:spAutoFit/>
-          </a:bodyPr>
-          <a:lstStyle/>
-          <a:p>
-            <a:pPr algn="l">
-              <a:lnSpc>
-                <a:spcPct val="115000"/>
-              </a:lnSpc>
-            </a:pPr>
-            <a:r>
-              <a:rPr sz="3200" b="1">
-                <a:solidFill>
-                  <a:srgbClr val="D9A857"/>
-                </a:solidFill>
-                <a:latin typeface="Source Serif 4"/>
-              </a:rPr>
-              <a:t>42.82%</a:t>
-            </a:r>
-          </a:p>
-        </p:txBody>
-      </p:sp>
-      <p:sp>
-        <p:nvSpPr>
-          <p:cNvPr id="15" name="TextBox 14"/>
-          <p:cNvSpPr txBox="1"/>
-          <p:nvPr/>
-        </p:nvSpPr>
-        <p:spPr>
-          <a:xfrm>
-            <a:off x="58693" y="30162"/>
-            <a:ext cx="21336" cy="5715"/>
-          </a:xfrm>
-          <a:prstGeom prst="rect">
-            <a:avLst/>
-          </a:prstGeom>
-          <a:noFill/>
-        </p:spPr>
-        <p:txBody>
-          <a:bodyPr wrap="square" anchor="t" lIns="0" rIns="0" tIns="0" bIns="0">
-            <a:spAutoFit/>
-          </a:bodyPr>
-          <a:lstStyle/>
-          <a:p>
-            <a:pPr algn="l">
-              <a:lnSpc>
-                <a:spcPct val="130000"/>
-              </a:lnSpc>
-            </a:pPr>
-            <a:r>
-              <a:rPr sz="1300" b="0">
-                <a:solidFill>
-                  <a:srgbClr val="B9C2D6"/>
-                </a:solidFill>
-                <a:latin typeface="IBM Plex Sans"/>
-              </a:rPr>
-              <a:t>of income the portfolio already spends monthly</a:t>
-            </a:r>
-          </a:p>
-        </p:txBody>
-      </p:sp>
-      <p:sp>
-        <p:nvSpPr>
-          <p:cNvPr id="16" name="TextBox 15"/>
-          <p:cNvSpPr txBox="1"/>
-          <p:nvPr/>
-        </p:nvSpPr>
-        <p:spPr>
-          <a:xfrm>
-            <a:off x="812800" y="37465"/>
-            <a:ext cx="6159500" cy="571500"/>
-          </a:xfrm>
-          <a:prstGeom prst="rect">
-            <a:avLst/>
-          </a:prstGeom>
-          <a:noFill/>
-        </p:spPr>
-        <p:txBody>
-          <a:bodyPr wrap="square" anchor="t" lIns="0" rIns="0" tIns="0" bIns="0">
-            <a:spAutoFit/>
-          </a:bodyPr>
-          <a:lstStyle/>
-          <a:p>
-            <a:pPr algn="l">
-              <a:lnSpc>
-                <a:spcPct val="130000"/>
-              </a:lnSpc>
-            </a:pPr>
-            <a:r>
-              <a:rPr sz="1800" b="1">
-                <a:solidFill>
-                  <a:srgbClr val="0E1F33"/>
-                </a:solidFill>
-                <a:latin typeface="IBM Plex Sans"/>
-              </a:rPr>
-              <a:t>Retail banking growth starts with the credit line, and the data already shows where to point it.</a:t>
-            </a:r>
-          </a:p>
-        </p:txBody>
-      </p:sp>
-      <p:sp>
-        <p:nvSpPr>
-          <p:cNvPr id="17" name="TextBox 16"/>
-          <p:cNvSpPr txBox="1"/>
-          <p:nvPr/>
-        </p:nvSpPr>
-        <p:spPr>
-          <a:xfrm>
-            <a:off x="812800" y="6451600"/>
-            <a:ext cx="6350000" cy="190500"/>
-          </a:xfrm>
-          <a:prstGeom prst="rect">
-            <a:avLst/>
-          </a:prstGeom>
-          <a:noFill/>
-        </p:spPr>
-        <p:txBody>
-          <a:bodyPr wrap="square" anchor="t" lIns="0" rIns="0" tIns="0" bIns="0">
-            <a:spAutoFit/>
-          </a:bodyPr>
-          <a:lstStyle/>
-          <a:p>
-            <a:pPr algn="l">
-              <a:lnSpc>
-                <a:spcPct val="115000"/>
-              </a:lnSpc>
-            </a:pPr>
-            <a:r>
-              <a:rPr sz="1100" b="0">
-                <a:solidFill>
-                  <a:srgbClr val="6A7179"/>
-                </a:solidFill>
-                <a:latin typeface="IBM Plex Sans"/>
-              </a:rPr>
-              <a:t>Source: dim_customers.csv × fact_spends.csv — 6-month window (May–Oct)</a:t>
-            </a:r>
-          </a:p>
-        </p:txBody>
-      </p:sp>
-      <p:sp>
-        <p:nvSpPr>
-          <p:cNvPr id="18" name="TextBox 17"/>
-          <p:cNvSpPr txBox="1"/>
-          <p:nvPr/>
-        </p:nvSpPr>
-        <p:spPr>
-          <a:xfrm>
-            <a:off x="10541000" y="6451600"/>
-            <a:ext cx="838200" cy="190500"/>
-          </a:xfrm>
-          <a:prstGeom prst="rect">
-            <a:avLst/>
-          </a:prstGeom>
-          <a:noFill/>
-        </p:spPr>
-        <p:txBody>
-          <a:bodyPr wrap="square" anchor="t" lIns="0" rIns="0" tIns="0" bIns="0">
-            <a:spAutoFit/>
-          </a:bodyPr>
-          <a:lstStyle/>
-          <a:p>
-            <a:pPr algn="r">
-              <a:lnSpc>
-                <a:spcPct val="115000"/>
-              </a:lnSpc>
-            </a:pPr>
-            <a:r>
-              <a:rPr sz="1100" b="0">
+              <a:rPr sz="1100" b="0" i="0">
                 <a:solidFill>
                   <a:srgbClr val="6A7179"/>
                 </a:solidFill>
@@ -5439,8 +5351,88 @@
         </p:nvSpPr>
         <p:spPr>
           <a:xfrm>
-            <a:off x="812800" y="812800"/>
-            <a:ext cx="5715000" cy="190500"/>
+            <a:off x="822960" y="777240"/>
+            <a:ext cx="9692640" cy="5806440"/>
+          </a:xfrm>
+          <a:prstGeom prst="rect">
+            <a:avLst/>
+          </a:prstGeom>
+          <a:noFill/>
+        </p:spPr>
+        <p:txBody>
+          <a:bodyPr wrap="square" lIns="0" rIns="0" tIns="0" bIns="0">
+            <a:spAutoFit/>
+          </a:bodyPr>
+          <a:lstStyle/>
+          <a:p>
+            <a:pPr>
+              <a:lnSpc>
+                <a:spcPct val="100000"/>
+              </a:lnSpc>
+              <a:spcAft>
+                <a:spcPts val="1000"/>
+              </a:spcAft>
+            </a:pPr>
+            <a:r>
+              <a:rPr sz="1200" b="1" spc="120">
+                <a:solidFill>
+                  <a:srgbClr val="7A5A1E"/>
+                </a:solidFill>
+                <a:latin typeface="IBM Plex Sans"/>
+              </a:rPr>
+              <a:t>TENSION</a:t>
+            </a:r>
+          </a:p>
+          <a:p>
+            <a:pPr>
+              <a:lnSpc>
+                <a:spcPct val="115000"/>
+              </a:lnSpc>
+              <a:spcAft>
+                <a:spcPts val="1200"/>
+              </a:spcAft>
+            </a:pPr>
+            <a:r>
+              <a:rPr sz="3000" b="0">
+                <a:solidFill>
+                  <a:srgbClr val="0E1F33"/>
+                </a:solidFill>
+                <a:latin typeface="Source Serif 4"/>
+              </a:rPr>
+              <a:t>One card will not fit a portfolio this spread out</a:t>
+            </a:r>
+          </a:p>
+          <a:p>
+            <a:pPr>
+              <a:lnSpc>
+                <a:spcPct val="135000"/>
+              </a:lnSpc>
+              <a:spcAft>
+                <a:spcPts val="0"/>
+              </a:spcAft>
+            </a:pPr>
+            <a:r>
+              <a:rPr sz="1400" b="0">
+                <a:solidFill>
+                  <a:srgbClr val="4A5568"/>
+                </a:solidFill>
+                <a:latin typeface="IBM Plex Sans"/>
+              </a:rPr>
+              <a:t>Income utilization, the share of monthly income customers already spend, swings by more than 20 points across cities.</a:t>
+            </a:r>
+          </a:p>
+        </p:txBody>
+      </p:sp>
+      <p:sp>
+        <p:nvSpPr>
+          <p:cNvPr id="3" name="TextBox 2"/>
+          <p:cNvSpPr txBox="1"/>
+          <p:nvPr/>
+        </p:nvSpPr>
+        <p:spPr>
+          <a:xfrm>
+            <a:off x="822960" y="3218688"/>
+            <a:ext cx="1554480" cy="274320"/>
           </a:xfrm>
           <a:prstGeom prst="rect">
             <a:avLst/>
@@ -5459,129 +5451,12 @@
               </a:lnSpc>
             </a:pPr>
             <a:r>
-              <a:rPr sz="1200" b="1" spc="120">
-                <a:solidFill>
-                  <a:srgbClr val="7A5A1E"/>
+              <a:rPr sz="1300" b="0" i="0">
+                <a:solidFill>
+                  <a:srgbClr val="1A2233"/>
                 </a:solidFill>
                 <a:latin typeface="IBM Plex Sans"/>
               </a:rPr>
-              <a:t>TENSION</a:t>
-            </a:r>
-          </a:p>
-        </p:txBody>
-      </p:sp>
-      <p:sp>
-        <p:nvSpPr>
-          <p:cNvPr id="3" name="TextBox 2"/>
-          <p:cNvSpPr txBox="1"/>
-          <p:nvPr/>
-        </p:nvSpPr>
-        <p:spPr>
-          <a:xfrm>
-            <a:off x="812800" y="1066800"/>
-            <a:ext cx="9525000" cy="635000"/>
-          </a:xfrm>
-          <a:prstGeom prst="rect">
-            <a:avLst/>
-          </a:prstGeom>
-          <a:noFill/>
-        </p:spPr>
-        <p:txBody>
-          <a:bodyPr wrap="square" anchor="t" lIns="0" rIns="0" tIns="0" bIns="0">
-            <a:spAutoFit/>
-          </a:bodyPr>
-          <a:lstStyle/>
-          <a:p>
-            <a:pPr algn="l">
-              <a:lnSpc>
-                <a:spcPct val="115000"/>
-              </a:lnSpc>
-            </a:pPr>
-            <a:r>
-              <a:rPr sz="3200" b="0">
-                <a:solidFill>
-                  <a:srgbClr val="0E1F33"/>
-                </a:solidFill>
-                <a:latin typeface="Source Serif 4"/>
-              </a:rPr>
-              <a:t>One card will not fit a portfolio this spread out</a:t>
-            </a:r>
-          </a:p>
-        </p:txBody>
-      </p:sp>
-      <p:sp>
-        <p:nvSpPr>
-          <p:cNvPr id="4" name="TextBox 3"/>
-          <p:cNvSpPr txBox="1"/>
-          <p:nvPr/>
-        </p:nvSpPr>
-        <p:spPr>
-          <a:xfrm>
-            <a:off x="812800" y="1595120"/>
-            <a:ext cx="8572500" cy="444500"/>
-          </a:xfrm>
-          <a:prstGeom prst="rect">
-            <a:avLst/>
-          </a:prstGeom>
-          <a:noFill/>
-        </p:spPr>
-        <p:txBody>
-          <a:bodyPr wrap="square" anchor="t" lIns="0" rIns="0" tIns="0" bIns="0">
-            <a:spAutoFit/>
-          </a:bodyPr>
-          <a:lstStyle/>
-          <a:p>
-            <a:pPr algn="l">
-              <a:lnSpc>
-                <a:spcPct val="135000"/>
-              </a:lnSpc>
-            </a:pPr>
-            <a:r>
-              <a:rPr sz="1400" b="0">
-                <a:solidFill>
-                  <a:srgbClr val="4A5568"/>
-                </a:solidFill>
-                <a:latin typeface="IBM Plex Sans"/>
-              </a:rPr>
-              <a:t>Income utilization, the share of monthly income customers already spend, swings by more than 20 points across cities.</a:t>
-            </a:r>
-          </a:p>
-        </p:txBody>
-      </p:sp>
-      <p:sp>
-        <p:nvSpPr>
-          <p:cNvPr id="5" name="TextBox 4"/>
-          <p:cNvSpPr txBox="1"/>
-          <p:nvPr/>
-        </p:nvSpPr>
-        <p:spPr>
-          <a:xfrm>
-            <a:off x="5644" y="24638"/>
-            <a:ext cx="9842" cy="1905"/>
-          </a:xfrm>
-          <a:prstGeom prst="rect">
-            <a:avLst/>
-          </a:prstGeom>
-          <a:noFill/>
-        </p:spPr>
-        <p:txBody>
-          <a:bodyPr wrap="square" anchor="t" lIns="0" rIns="0" tIns="0" bIns="0">
-            <a:spAutoFit/>
-          </a:bodyPr>
-          <a:lstStyle/>
-          <a:p>
-            <a:pPr algn="l">
-              <a:lnSpc>
-                <a:spcPct val="115000"/>
-              </a:lnSpc>
-            </a:pPr>
-            <a:r>
-              <a:rPr sz="1300" b="0">
-                <a:solidFill>
-                  <a:srgbClr val="1A2233"/>
-                </a:solidFill>
-                <a:latin typeface="IBM Plex Sans"/>
-              </a:rPr>
               <a:t>Mumbai</a:t>
             </a:r>
           </a:p>
@@ -5589,14 +5464,14 @@
       </p:sp>
       <p:sp>
         <p:nvSpPr>
-          <p:cNvPr id="6" name="Rounded Rectangle 5"/>
+          <p:cNvPr id="4" name="Rounded Rectangle 3"/>
           <p:cNvSpPr/>
           <p:nvPr/>
         </p:nvSpPr>
         <p:spPr>
           <a:xfrm>
-            <a:off x="16439" y="24765"/>
-            <a:ext cx="27305" cy="1397"/>
+            <a:off x="2514600" y="3246120"/>
+            <a:ext cx="3703320" cy="201168"/>
           </a:xfrm>
           <a:prstGeom prst="roundRect">
             <a:avLst>
@@ -5637,14 +5512,14 @@
       </p:sp>
       <p:sp>
         <p:nvSpPr>
-          <p:cNvPr id="7" name="Rounded Rectangle 6"/>
+          <p:cNvPr id="5" name="Rounded Rectangle 4"/>
           <p:cNvSpPr/>
           <p:nvPr/>
         </p:nvSpPr>
         <p:spPr>
           <a:xfrm>
-            <a:off x="16439" y="24765"/>
-            <a:ext cx="25393" cy="1397"/>
+            <a:off x="2514600" y="3246120"/>
+            <a:ext cx="3444087" cy="201168"/>
           </a:xfrm>
           <a:prstGeom prst="roundRect">
             <a:avLst>
@@ -5683,14 +5558,14 @@
       </p:sp>
       <p:sp>
         <p:nvSpPr>
-          <p:cNvPr id="8" name="TextBox 7"/>
+          <p:cNvPr id="6" name="TextBox 5"/>
           <p:cNvSpPr txBox="1"/>
           <p:nvPr/>
         </p:nvSpPr>
         <p:spPr>
           <a:xfrm>
-            <a:off x="44696" y="24638"/>
-            <a:ext cx="4762" cy="1905"/>
+            <a:off x="6355080" y="3218688"/>
+            <a:ext cx="777240" cy="274320"/>
           </a:xfrm>
           <a:prstGeom prst="rect">
             <a:avLst/>
@@ -5709,7 +5584,7 @@
               </a:lnSpc>
             </a:pPr>
             <a:r>
-              <a:rPr sz="1300" b="0">
+              <a:rPr sz="1300" b="0" i="0">
                 <a:solidFill>
                   <a:srgbClr val="1A2233"/>
                 </a:solidFill>
@@ -5722,14 +5597,14 @@
       </p:sp>
       <p:sp>
         <p:nvSpPr>
-          <p:cNvPr id="9" name="TextBox 8"/>
+          <p:cNvPr id="7" name="TextBox 6"/>
           <p:cNvSpPr txBox="1"/>
           <p:nvPr/>
         </p:nvSpPr>
         <p:spPr>
           <a:xfrm>
-            <a:off x="5644" y="27813"/>
-            <a:ext cx="9842" cy="1905"/>
+            <a:off x="822960" y="3639312"/>
+            <a:ext cx="1554480" cy="274320"/>
           </a:xfrm>
           <a:prstGeom prst="rect">
             <a:avLst/>
@@ -5748,7 +5623,7 @@
               </a:lnSpc>
             </a:pPr>
             <a:r>
-              <a:rPr sz="1300" b="0">
+              <a:rPr sz="1300" b="0" i="0">
                 <a:solidFill>
                   <a:srgbClr val="1A2233"/>
                 </a:solidFill>
@@ -5761,14 +5636,14 @@
       </p:sp>
       <p:sp>
         <p:nvSpPr>
-          <p:cNvPr id="10" name="Rounded Rectangle 9"/>
+          <p:cNvPr id="8" name="Rounded Rectangle 7"/>
           <p:cNvSpPr/>
           <p:nvPr/>
         </p:nvSpPr>
         <p:spPr>
           <a:xfrm>
-            <a:off x="16439" y="27940"/>
-            <a:ext cx="27305" cy="1397"/>
+            <a:off x="2514600" y="3666744"/>
+            <a:ext cx="3703320" cy="201168"/>
           </a:xfrm>
           <a:prstGeom prst="roundRect">
             <a:avLst>
@@ -5809,14 +5684,14 @@
       </p:sp>
       <p:sp>
         <p:nvSpPr>
-          <p:cNvPr id="11" name="Rounded Rectangle 10"/>
+          <p:cNvPr id="9" name="Rounded Rectangle 8"/>
           <p:cNvSpPr/>
           <p:nvPr/>
         </p:nvSpPr>
         <p:spPr>
           <a:xfrm>
-            <a:off x="16439" y="27940"/>
-            <a:ext cx="23755" cy="1397"/>
+            <a:off x="2514600" y="3666744"/>
+            <a:ext cx="3221888" cy="201168"/>
           </a:xfrm>
           <a:prstGeom prst="roundRect">
             <a:avLst>
@@ -5855,14 +5730,14 @@
       </p:sp>
       <p:sp>
         <p:nvSpPr>
-          <p:cNvPr id="12" name="TextBox 11"/>
+          <p:cNvPr id="10" name="TextBox 9"/>
           <p:cNvSpPr txBox="1"/>
           <p:nvPr/>
         </p:nvSpPr>
         <p:spPr>
           <a:xfrm>
-            <a:off x="44696" y="27813"/>
-            <a:ext cx="4762" cy="1905"/>
+            <a:off x="6355080" y="3639312"/>
+            <a:ext cx="777240" cy="274320"/>
           </a:xfrm>
           <a:prstGeom prst="rect">
             <a:avLst/>
@@ -5881,7 +5756,7 @@
               </a:lnSpc>
             </a:pPr>
             <a:r>
-              <a:rPr sz="1300" b="0">
+              <a:rPr sz="1300" b="0" i="0">
                 <a:solidFill>
                   <a:srgbClr val="1A2233"/>
                 </a:solidFill>
@@ -5894,14 +5769,14 @@
       </p:sp>
       <p:sp>
         <p:nvSpPr>
-          <p:cNvPr id="13" name="TextBox 12"/>
+          <p:cNvPr id="11" name="TextBox 10"/>
           <p:cNvSpPr txBox="1"/>
           <p:nvPr/>
         </p:nvSpPr>
         <p:spPr>
           <a:xfrm>
-            <a:off x="5644" y="30988"/>
-            <a:ext cx="9842" cy="1905"/>
+            <a:off x="822960" y="4059935"/>
+            <a:ext cx="1554480" cy="274320"/>
           </a:xfrm>
           <a:prstGeom prst="rect">
             <a:avLst/>
@@ -5920,7 +5795,7 @@
               </a:lnSpc>
             </a:pPr>
             <a:r>
-              <a:rPr sz="1300" b="0">
+              <a:rPr sz="1300" b="0" i="0">
                 <a:solidFill>
                   <a:srgbClr val="1A2233"/>
                 </a:solidFill>
@@ -5933,14 +5808,14 @@
       </p:sp>
       <p:sp>
         <p:nvSpPr>
-          <p:cNvPr id="14" name="Rounded Rectangle 13"/>
+          <p:cNvPr id="12" name="Rounded Rectangle 11"/>
           <p:cNvSpPr/>
           <p:nvPr/>
         </p:nvSpPr>
         <p:spPr>
           <a:xfrm>
-            <a:off x="16439" y="31115"/>
-            <a:ext cx="27305" cy="1397"/>
+            <a:off x="2514600" y="4087368"/>
+            <a:ext cx="3703320" cy="201168"/>
           </a:xfrm>
           <a:prstGeom prst="roundRect">
             <a:avLst>
@@ -5981,14 +5856,14 @@
       </p:sp>
       <p:sp>
         <p:nvSpPr>
-          <p:cNvPr id="15" name="Rounded Rectangle 14"/>
+          <p:cNvPr id="13" name="Rounded Rectangle 12"/>
           <p:cNvSpPr/>
           <p:nvPr/>
         </p:nvSpPr>
         <p:spPr>
           <a:xfrm>
-            <a:off x="16439" y="31115"/>
-            <a:ext cx="21570" cy="1397"/>
+            <a:off x="2514600" y="4087368"/>
+            <a:ext cx="2925622" cy="201168"/>
           </a:xfrm>
           <a:prstGeom prst="roundRect">
             <a:avLst>
@@ -6027,14 +5902,14 @@
       </p:sp>
       <p:sp>
         <p:nvSpPr>
-          <p:cNvPr id="16" name="TextBox 15"/>
+          <p:cNvPr id="14" name="TextBox 13"/>
           <p:cNvSpPr txBox="1"/>
           <p:nvPr/>
         </p:nvSpPr>
         <p:spPr>
           <a:xfrm>
-            <a:off x="44696" y="30988"/>
-            <a:ext cx="4762" cy="1905"/>
+            <a:off x="6355080" y="4059935"/>
+            <a:ext cx="777240" cy="274320"/>
           </a:xfrm>
           <a:prstGeom prst="rect">
             <a:avLst/>
@@ -6053,7 +5928,7 @@
               </a:lnSpc>
             </a:pPr>
             <a:r>
-              <a:rPr sz="1300" b="0">
+              <a:rPr sz="1300" b="0" i="0">
                 <a:solidFill>
                   <a:srgbClr val="1A2233"/>
                 </a:solidFill>
@@ -6066,14 +5941,14 @@
       </p:sp>
       <p:sp>
         <p:nvSpPr>
-          <p:cNvPr id="17" name="TextBox 16"/>
+          <p:cNvPr id="15" name="TextBox 14"/>
           <p:cNvSpPr txBox="1"/>
           <p:nvPr/>
         </p:nvSpPr>
         <p:spPr>
           <a:xfrm>
-            <a:off x="5644" y="34163"/>
-            <a:ext cx="9842" cy="1905"/>
+            <a:off x="822960" y="4480559"/>
+            <a:ext cx="1554480" cy="274320"/>
           </a:xfrm>
           <a:prstGeom prst="rect">
             <a:avLst/>
@@ -6092,7 +5967,7 @@
               </a:lnSpc>
             </a:pPr>
             <a:r>
-              <a:rPr sz="1300" b="0">
+              <a:rPr sz="1300" b="0" i="0">
                 <a:solidFill>
                   <a:srgbClr val="1A2233"/>
                 </a:solidFill>
@@ -6105,14 +5980,14 @@
       </p:sp>
       <p:sp>
         <p:nvSpPr>
-          <p:cNvPr id="18" name="Rounded Rectangle 17"/>
+          <p:cNvPr id="16" name="Rounded Rectangle 15"/>
           <p:cNvSpPr/>
           <p:nvPr/>
         </p:nvSpPr>
         <p:spPr>
           <a:xfrm>
-            <a:off x="16439" y="34290"/>
-            <a:ext cx="27305" cy="1397"/>
+            <a:off x="2514600" y="4507992"/>
+            <a:ext cx="3703320" cy="201168"/>
           </a:xfrm>
           <a:prstGeom prst="roundRect">
             <a:avLst>
@@ -6153,14 +6028,14 @@
       </p:sp>
       <p:sp>
         <p:nvSpPr>
-          <p:cNvPr id="19" name="Rounded Rectangle 18"/>
+          <p:cNvPr id="17" name="Rounded Rectangle 16"/>
           <p:cNvSpPr/>
           <p:nvPr/>
         </p:nvSpPr>
         <p:spPr>
           <a:xfrm>
-            <a:off x="16439" y="34290"/>
-            <a:ext cx="18021" cy="1397"/>
+            <a:off x="2514600" y="4507992"/>
+            <a:ext cx="2444191" cy="201168"/>
           </a:xfrm>
           <a:prstGeom prst="roundRect">
             <a:avLst>
@@ -6199,14 +6074,14 @@
       </p:sp>
       <p:sp>
         <p:nvSpPr>
-          <p:cNvPr id="20" name="TextBox 19"/>
+          <p:cNvPr id="18" name="TextBox 17"/>
           <p:cNvSpPr txBox="1"/>
           <p:nvPr/>
         </p:nvSpPr>
         <p:spPr>
           <a:xfrm>
-            <a:off x="44696" y="34163"/>
-            <a:ext cx="4762" cy="1905"/>
+            <a:off x="6355080" y="4480559"/>
+            <a:ext cx="777240" cy="274320"/>
           </a:xfrm>
           <a:prstGeom prst="rect">
             <a:avLst/>
@@ -6225,7 +6100,7 @@
               </a:lnSpc>
             </a:pPr>
             <a:r>
-              <a:rPr sz="1300" b="0">
+              <a:rPr sz="1300" b="0" i="0">
                 <a:solidFill>
                   <a:srgbClr val="1A2233"/>
                 </a:solidFill>
@@ -6238,14 +6113,14 @@
       </p:sp>
       <p:sp>
         <p:nvSpPr>
-          <p:cNvPr id="21" name="TextBox 20"/>
+          <p:cNvPr id="19" name="TextBox 18"/>
           <p:cNvSpPr txBox="1"/>
           <p:nvPr/>
         </p:nvSpPr>
         <p:spPr>
           <a:xfrm>
-            <a:off x="5644" y="37338"/>
-            <a:ext cx="9842" cy="1905"/>
+            <a:off x="822960" y="4901183"/>
+            <a:ext cx="1554480" cy="274320"/>
           </a:xfrm>
           <a:prstGeom prst="rect">
             <a:avLst/>
@@ -6264,7 +6139,7 @@
               </a:lnSpc>
             </a:pPr>
             <a:r>
-              <a:rPr sz="1300" b="0">
+              <a:rPr sz="1300" b="0" i="0">
                 <a:solidFill>
                   <a:srgbClr val="1A2233"/>
                 </a:solidFill>
@@ -6277,14 +6152,14 @@
       </p:sp>
       <p:sp>
         <p:nvSpPr>
-          <p:cNvPr id="22" name="Rounded Rectangle 21"/>
+          <p:cNvPr id="20" name="Rounded Rectangle 19"/>
           <p:cNvSpPr/>
           <p:nvPr/>
         </p:nvSpPr>
         <p:spPr>
           <a:xfrm>
-            <a:off x="16439" y="37465"/>
-            <a:ext cx="27305" cy="1397"/>
+            <a:off x="2514600" y="4928616"/>
+            <a:ext cx="3703320" cy="201168"/>
           </a:xfrm>
           <a:prstGeom prst="roundRect">
             <a:avLst>
@@ -6325,14 +6200,14 @@
       </p:sp>
       <p:sp>
         <p:nvSpPr>
-          <p:cNvPr id="23" name="Rounded Rectangle 22"/>
+          <p:cNvPr id="21" name="Rounded Rectangle 20"/>
           <p:cNvSpPr/>
           <p:nvPr/>
         </p:nvSpPr>
         <p:spPr>
           <a:xfrm>
-            <a:off x="16439" y="37465"/>
-            <a:ext cx="15563" cy="1397"/>
+            <a:off x="2514600" y="4928616"/>
+            <a:ext cx="2110892" cy="201168"/>
           </a:xfrm>
           <a:prstGeom prst="roundRect">
             <a:avLst>
@@ -6371,14 +6246,14 @@
       </p:sp>
       <p:sp>
         <p:nvSpPr>
-          <p:cNvPr id="24" name="TextBox 23"/>
+          <p:cNvPr id="22" name="TextBox 21"/>
           <p:cNvSpPr txBox="1"/>
           <p:nvPr/>
         </p:nvSpPr>
         <p:spPr>
           <a:xfrm>
-            <a:off x="44696" y="37338"/>
-            <a:ext cx="4762" cy="1905"/>
+            <a:off x="6355080" y="4901183"/>
+            <a:ext cx="777240" cy="274320"/>
           </a:xfrm>
           <a:prstGeom prst="rect">
             <a:avLst/>
@@ -6397,7 +6272,7 @@
               </a:lnSpc>
             </a:pPr>
             <a:r>
-              <a:rPr sz="1300" b="0">
+              <a:rPr sz="1300" b="0" i="0">
                 <a:solidFill>
                   <a:srgbClr val="1A2233"/>
                 </a:solidFill>
@@ -6410,14 +6285,14 @@
       </p:sp>
       <p:sp>
         <p:nvSpPr>
-          <p:cNvPr id="25" name="Rounded Rectangle 24"/>
+          <p:cNvPr id="23" name="Rounded Rectangle 22"/>
           <p:cNvSpPr/>
           <p:nvPr/>
         </p:nvSpPr>
         <p:spPr>
           <a:xfrm>
-            <a:off x="49212" y="23812"/>
-            <a:ext cx="29209" cy="16510"/>
+            <a:off x="7360920" y="3246120"/>
+            <a:ext cx="4007815" cy="2148840"/>
           </a:xfrm>
           <a:prstGeom prst="roundRect">
             <a:avLst>
@@ -6456,14 +6331,94 @@
       </p:sp>
       <p:sp>
         <p:nvSpPr>
-          <p:cNvPr id="26" name="TextBox 25"/>
+          <p:cNvPr id="24" name="TextBox 23"/>
           <p:cNvSpPr txBox="1"/>
           <p:nvPr/>
         </p:nvSpPr>
         <p:spPr>
           <a:xfrm>
-            <a:off x="51117" y="25273"/>
-            <a:ext cx="25400" cy="190500"/>
+            <a:off x="7653528" y="3520439"/>
+            <a:ext cx="3422599" cy="3063240"/>
+          </a:xfrm>
+          <a:prstGeom prst="rect">
+            <a:avLst/>
+          </a:prstGeom>
+          <a:noFill/>
+        </p:spPr>
+        <p:txBody>
+          <a:bodyPr wrap="square" lIns="0" rIns="0" tIns="0" bIns="0">
+            <a:spAutoFit/>
+          </a:bodyPr>
+          <a:lstStyle/>
+          <a:p>
+            <a:pPr>
+              <a:lnSpc>
+                <a:spcPct val="100000"/>
+              </a:lnSpc>
+              <a:spcAft>
+                <a:spcPts val="1000"/>
+              </a:spcAft>
+            </a:pPr>
+            <a:r>
+              <a:rPr sz="1100" b="1" spc="110">
+                <a:solidFill>
+                  <a:srgbClr val="D9A857"/>
+                </a:solidFill>
+                <a:latin typeface="IBM Plex Sans"/>
+              </a:rPr>
+              <a:t>LOWEST OF ANY SEGMENT</a:t>
+            </a:r>
+          </a:p>
+          <a:p>
+            <a:pPr>
+              <a:lnSpc>
+                <a:spcPct val="100000"/>
+              </a:lnSpc>
+              <a:spcAft>
+                <a:spcPts val="1000"/>
+              </a:spcAft>
+            </a:pPr>
+            <a:r>
+              <a:rPr sz="4000" b="1">
+                <a:solidFill>
+                  <a:srgbClr val="F8F6F1"/>
+                </a:solidFill>
+                <a:latin typeface="Source Serif 4"/>
+              </a:rPr>
+              <a:t>29.63%</a:t>
+            </a:r>
+          </a:p>
+          <a:p>
+            <a:pPr>
+              <a:lnSpc>
+                <a:spcPct val="135000"/>
+              </a:lnSpc>
+              <a:spcAft>
+                <a:spcPts val="0"/>
+              </a:spcAft>
+            </a:pPr>
+            <a:r>
+              <a:rPr sz="1300" b="0">
+                <a:solidFill>
+                  <a:srgbClr val="B9C2D6"/>
+                </a:solidFill>
+                <a:latin typeface="IBM Plex Sans"/>
+              </a:rPr>
+              <a:t>Upper Class customers, avg income ≥ ₹80,000, utilize even less than Chennai, 13 points below the portfolio average.</a:t>
+            </a:r>
+          </a:p>
+        </p:txBody>
+      </p:sp>
+      <p:sp>
+        <p:nvSpPr>
+          <p:cNvPr id="25" name="TextBox 24"/>
+          <p:cNvSpPr txBox="1"/>
+          <p:nvPr/>
+        </p:nvSpPr>
+        <p:spPr>
+          <a:xfrm>
+            <a:off x="822960" y="6419088"/>
+            <a:ext cx="8686800" cy="274320"/>
           </a:xfrm>
           <a:prstGeom prst="rect">
             <a:avLst/>
@@ -6482,27 +6437,27 @@
               </a:lnSpc>
             </a:pPr>
             <a:r>
-              <a:rPr sz="1100" b="1" spc="120">
-                <a:solidFill>
-                  <a:srgbClr val="D9A857"/>
+              <a:rPr sz="1100" b="0" i="0">
+                <a:solidFill>
+                  <a:srgbClr val="6A7179"/>
                 </a:solidFill>
                 <a:latin typeface="IBM Plex Sans"/>
               </a:rPr>
-              <a:t>LOWEST OF ANY SEGMENT</a:t>
-            </a:r>
-          </a:p>
-        </p:txBody>
-      </p:sp>
-      <p:sp>
-        <p:nvSpPr>
-          <p:cNvPr id="27" name="TextBox 26"/>
+              <a:t>Source: City-level utilization, fact_spends.csv × dim_customers.csv</a:t>
+            </a:r>
+          </a:p>
+        </p:txBody>
+      </p:sp>
+      <p:sp>
+        <p:nvSpPr>
+          <p:cNvPr id="26" name="TextBox 25"/>
           <p:cNvSpPr txBox="1"/>
           <p:nvPr/>
         </p:nvSpPr>
         <p:spPr>
           <a:xfrm>
-            <a:off x="51117" y="27304"/>
-            <a:ext cx="25400" cy="571500"/>
+            <a:off x="10454335" y="6419088"/>
+            <a:ext cx="914400" cy="274320"/>
           </a:xfrm>
           <a:prstGeom prst="rect">
             <a:avLst/>
@@ -6515,130 +6470,13 @@
           </a:bodyPr>
           <a:lstStyle/>
           <a:p>
-            <a:pPr algn="l">
+            <a:pPr algn="r">
               <a:lnSpc>
                 <a:spcPct val="115000"/>
               </a:lnSpc>
             </a:pPr>
             <a:r>
-              <a:rPr sz="4400" b="1">
-                <a:solidFill>
-                  <a:srgbClr val="F8F6F1"/>
-                </a:solidFill>
-                <a:latin typeface="Source Serif 4"/>
-              </a:rPr>
-              <a:t>29.63%</a:t>
-            </a:r>
-          </a:p>
-        </p:txBody>
-      </p:sp>
-      <p:sp>
-        <p:nvSpPr>
-          <p:cNvPr id="28" name="TextBox 27"/>
-          <p:cNvSpPr txBox="1"/>
-          <p:nvPr/>
-        </p:nvSpPr>
-        <p:spPr>
-          <a:xfrm>
-            <a:off x="51117" y="32385"/>
-            <a:ext cx="25400" cy="6985"/>
-          </a:xfrm>
-          <a:prstGeom prst="rect">
-            <a:avLst/>
-          </a:prstGeom>
-          <a:noFill/>
-        </p:spPr>
-        <p:txBody>
-          <a:bodyPr wrap="square" anchor="t" lIns="0" rIns="0" tIns="0" bIns="0">
-            <a:spAutoFit/>
-          </a:bodyPr>
-          <a:lstStyle/>
-          <a:p>
-            <a:pPr algn="l">
-              <a:lnSpc>
-                <a:spcPct val="135000"/>
-              </a:lnSpc>
-            </a:pPr>
-            <a:r>
-              <a:rPr sz="1300" b="0">
-                <a:solidFill>
-                  <a:srgbClr val="B9C2D6"/>
-                </a:solidFill>
-                <a:latin typeface="IBM Plex Sans"/>
-              </a:rPr>
-              <a:t>Upper Class customers, avg income ≥ ₹80,000, utilize even less than Chennai, 13 points below the portfolio average.</a:t>
-            </a:r>
-          </a:p>
-        </p:txBody>
-      </p:sp>
-      <p:sp>
-        <p:nvSpPr>
-          <p:cNvPr id="29" name="TextBox 28"/>
-          <p:cNvSpPr txBox="1"/>
-          <p:nvPr/>
-        </p:nvSpPr>
-        <p:spPr>
-          <a:xfrm>
-            <a:off x="812800" y="6451600"/>
-            <a:ext cx="6350000" cy="190500"/>
-          </a:xfrm>
-          <a:prstGeom prst="rect">
-            <a:avLst/>
-          </a:prstGeom>
-          <a:noFill/>
-        </p:spPr>
-        <p:txBody>
-          <a:bodyPr wrap="square" anchor="t" lIns="0" rIns="0" tIns="0" bIns="0">
-            <a:spAutoFit/>
-          </a:bodyPr>
-          <a:lstStyle/>
-          <a:p>
-            <a:pPr algn="l">
-              <a:lnSpc>
-                <a:spcPct val="115000"/>
-              </a:lnSpc>
-            </a:pPr>
-            <a:r>
-              <a:rPr sz="1100" b="0">
-                <a:solidFill>
-                  <a:srgbClr val="6A7179"/>
-                </a:solidFill>
-                <a:latin typeface="IBM Plex Sans"/>
-              </a:rPr>
-              <a:t>Source: City-level utilization, fact_spends.csv × dim_customers.csv</a:t>
-            </a:r>
-          </a:p>
-        </p:txBody>
-      </p:sp>
-      <p:sp>
-        <p:nvSpPr>
-          <p:cNvPr id="30" name="TextBox 29"/>
-          <p:cNvSpPr txBox="1"/>
-          <p:nvPr/>
-        </p:nvSpPr>
-        <p:spPr>
-          <a:xfrm>
-            <a:off x="10541000" y="6451600"/>
-            <a:ext cx="838200" cy="190500"/>
-          </a:xfrm>
-          <a:prstGeom prst="rect">
-            <a:avLst/>
-          </a:prstGeom>
-          <a:noFill/>
-        </p:spPr>
-        <p:txBody>
-          <a:bodyPr wrap="square" anchor="t" lIns="0" rIns="0" tIns="0" bIns="0">
-            <a:spAutoFit/>
-          </a:bodyPr>
-          <a:lstStyle/>
-          <a:p>
-            <a:pPr algn="r">
-              <a:lnSpc>
-                <a:spcPct val="115000"/>
-              </a:lnSpc>
-            </a:pPr>
-            <a:r>
-              <a:rPr sz="1100" b="0">
+              <a:rPr sz="1100" b="0" i="0">
                 <a:solidFill>
                   <a:srgbClr val="6A7179"/>
                 </a:solidFill>
@@ -6683,8 +6521,8 @@
         </p:nvSpPr>
         <p:spPr>
           <a:xfrm>
-            <a:off x="812800" y="812800"/>
-            <a:ext cx="5715000" cy="190500"/>
+            <a:off x="822960" y="777240"/>
+            <a:ext cx="9692640" cy="5806440"/>
           </a:xfrm>
           <a:prstGeom prst="rect">
             <a:avLst/>
@@ -6692,101 +6530,64 @@
           <a:noFill/>
         </p:spPr>
         <p:txBody>
-          <a:bodyPr wrap="square" anchor="t" lIns="0" rIns="0" tIns="0" bIns="0">
+          <a:bodyPr wrap="square" lIns="0" rIns="0" tIns="0" bIns="0">
             <a:spAutoFit/>
           </a:bodyPr>
           <a:lstStyle/>
           <a:p>
-            <a:pPr algn="l">
+            <a:pPr>
+              <a:lnSpc>
+                <a:spcPct val="100000"/>
+              </a:lnSpc>
+              <a:spcAft>
+                <a:spcPts val="1000"/>
+              </a:spcAft>
+            </a:pPr>
+            <a:r>
+              <a:rPr sz="1200" b="1" spc="120">
+                <a:solidFill>
+                  <a:srgbClr val="7A5A1E"/>
+                </a:solidFill>
+                <a:latin typeface="IBM Plex Sans"/>
+              </a:rPr>
+              <a:t>INSIGHT 01</a:t>
+            </a:r>
+          </a:p>
+          <a:p>
+            <a:pPr>
               <a:lnSpc>
                 <a:spcPct val="115000"/>
               </a:lnSpc>
-            </a:pPr>
-            <a:r>
-              <a:rPr sz="1200" b="1" spc="120">
-                <a:solidFill>
-                  <a:srgbClr val="7A5A1E"/>
+              <a:spcAft>
+                <a:spcPts val="1200"/>
+              </a:spcAft>
+            </a:pPr>
+            <a:r>
+              <a:rPr sz="3000" b="0">
+                <a:solidFill>
+                  <a:srgbClr val="0E1F33"/>
+                </a:solidFill>
+                <a:latin typeface="Source Serif 4"/>
+              </a:rPr>
+              <a:t>Metro IT professionals are already living on credit</a:t>
+            </a:r>
+          </a:p>
+          <a:p>
+            <a:pPr>
+              <a:lnSpc>
+                <a:spcPct val="135000"/>
+              </a:lnSpc>
+              <a:spcAft>
+                <a:spcPts val="0"/>
+              </a:spcAft>
+            </a:pPr>
+            <a:r>
+              <a:rPr sz="1400" b="0">
+                <a:solidFill>
+                  <a:srgbClr val="4A5568"/>
                 </a:solidFill>
                 <a:latin typeface="IBM Plex Sans"/>
               </a:rPr>
-              <a:t>INSIGHT 01</a:t>
-            </a:r>
-          </a:p>
-        </p:txBody>
-      </p:sp>
-      <p:sp>
-        <p:nvSpPr>
-          <p:cNvPr id="3" name="TextBox 2"/>
-          <p:cNvSpPr txBox="1"/>
-          <p:nvPr/>
-        </p:nvSpPr>
-        <p:spPr>
-          <a:xfrm>
-            <a:off x="812800" y="1066800"/>
-            <a:ext cx="9525000" cy="635000"/>
-          </a:xfrm>
-          <a:prstGeom prst="rect">
-            <a:avLst/>
-          </a:prstGeom>
-          <a:noFill/>
-        </p:spPr>
-        <p:txBody>
-          <a:bodyPr wrap="square" anchor="t" lIns="0" rIns="0" tIns="0" bIns="0">
-            <a:spAutoFit/>
-          </a:bodyPr>
-          <a:lstStyle/>
-          <a:p>
-            <a:pPr algn="l">
-              <a:lnSpc>
-                <a:spcPct val="115000"/>
-              </a:lnSpc>
-            </a:pPr>
-            <a:r>
-              <a:rPr sz="3200" b="0">
-                <a:solidFill>
-                  <a:srgbClr val="0E1F33"/>
-                </a:solidFill>
-                <a:latin typeface="Source Serif 4"/>
-              </a:rPr>
-              <a:t>Metro IT professionals are already living on credit</a:t>
-            </a:r>
-          </a:p>
-        </p:txBody>
-      </p:sp>
-      <p:sp>
-        <p:nvSpPr>
-          <p:cNvPr id="4" name="TextBox 3"/>
-          <p:cNvSpPr txBox="1"/>
-          <p:nvPr/>
-        </p:nvSpPr>
-        <p:spPr>
-          <a:xfrm>
-            <a:off x="812800" y="1595120"/>
-            <a:ext cx="8572500" cy="444500"/>
-          </a:xfrm>
-          <a:prstGeom prst="rect">
-            <a:avLst/>
-          </a:prstGeom>
-          <a:noFill/>
-        </p:spPr>
-        <p:txBody>
-          <a:bodyPr wrap="square" anchor="t" lIns="0" rIns="0" tIns="0" bIns="0">
-            <a:spAutoFit/>
-          </a:bodyPr>
-          <a:lstStyle/>
-          <a:p>
-            <a:pPr algn="l">
-              <a:lnSpc>
-                <a:spcPct val="135000"/>
-              </a:lnSpc>
-            </a:pPr>
-            <a:r>
-              <a:rPr sz="1400" b="0">
-                <a:solidFill>
-                  <a:srgbClr val="4A5568"/>
-                </a:solidFill>
-                <a:latin typeface="IBM Plex Sans"/>
-              </a:rPr>
               <a:t>Salaried IT employees post the highest income utilization of any occupation, and Mumbai leads every city.</a:t>
             </a:r>
           </a:p>
@@ -6794,14 +6595,14 @@
       </p:sp>
       <p:sp>
         <p:nvSpPr>
-          <p:cNvPr id="5" name="Rounded Rectangle 4"/>
+          <p:cNvPr id="3" name="Rounded Rectangle 2"/>
           <p:cNvSpPr/>
           <p:nvPr/>
         </p:nvSpPr>
         <p:spPr>
           <a:xfrm>
-            <a:off x="5644" y="23812"/>
-            <a:ext cx="29209" cy="17462"/>
+            <a:off x="822960" y="3246120"/>
+            <a:ext cx="4206240" cy="2286000"/>
           </a:xfrm>
           <a:prstGeom prst="roundRect">
             <a:avLst>
@@ -6840,14 +6641,75 @@
       </p:sp>
       <p:sp>
         <p:nvSpPr>
-          <p:cNvPr id="6" name="TextBox 5"/>
+          <p:cNvPr id="4" name="TextBox 3"/>
           <p:cNvSpPr txBox="1"/>
           <p:nvPr/>
         </p:nvSpPr>
         <p:spPr>
           <a:xfrm>
-            <a:off x="7549" y="26352"/>
-            <a:ext cx="25400" cy="571500"/>
+            <a:off x="1115568" y="3520439"/>
+            <a:ext cx="3621023" cy="3063240"/>
+          </a:xfrm>
+          <a:prstGeom prst="rect">
+            <a:avLst/>
+          </a:prstGeom>
+          <a:noFill/>
+        </p:spPr>
+        <p:txBody>
+          <a:bodyPr wrap="square" lIns="0" rIns="0" tIns="0" bIns="0">
+            <a:spAutoFit/>
+          </a:bodyPr>
+          <a:lstStyle/>
+          <a:p>
+            <a:pPr>
+              <a:lnSpc>
+                <a:spcPct val="100000"/>
+              </a:lnSpc>
+              <a:spcAft>
+                <a:spcPts val="1200"/>
+              </a:spcAft>
+            </a:pPr>
+            <a:r>
+              <a:rPr sz="4400" b="1">
+                <a:solidFill>
+                  <a:srgbClr val="D9A857"/>
+                </a:solidFill>
+                <a:latin typeface="Source Serif 4"/>
+              </a:rPr>
+              <a:t>51.04%</a:t>
+            </a:r>
+          </a:p>
+          <a:p>
+            <a:pPr>
+              <a:lnSpc>
+                <a:spcPct val="135000"/>
+              </a:lnSpc>
+              <a:spcAft>
+                <a:spcPts val="0"/>
+              </a:spcAft>
+            </a:pPr>
+            <a:r>
+              <a:rPr sz="1300" b="0">
+                <a:solidFill>
+                  <a:srgbClr val="B9C2D6"/>
+                </a:solidFill>
+                <a:latin typeface="IBM Plex Sans"/>
+              </a:rPr>
+              <a:t>Salaried IT employees, the highest utilization of any occupation, ₹40.62M monthly spend across 1,294 customers.</a:t>
+            </a:r>
+          </a:p>
+        </p:txBody>
+      </p:sp>
+      <p:sp>
+        <p:nvSpPr>
+          <p:cNvPr id="5" name="TextBox 4"/>
+          <p:cNvSpPr txBox="1"/>
+          <p:nvPr/>
+        </p:nvSpPr>
+        <p:spPr>
+          <a:xfrm>
+            <a:off x="5440680" y="3355848"/>
+            <a:ext cx="1600200" cy="274320"/>
           </a:xfrm>
           <a:prstGeom prst="rect">
             <a:avLst/>
@@ -6866,90 +6728,12 @@
               </a:lnSpc>
             </a:pPr>
             <a:r>
-              <a:rPr sz="5600" b="1">
-                <a:solidFill>
-                  <a:srgbClr val="D9A857"/>
-                </a:solidFill>
-                <a:latin typeface="Source Serif 4"/>
-              </a:rPr>
-              <a:t>51.04%</a:t>
-            </a:r>
-          </a:p>
-        </p:txBody>
-      </p:sp>
-      <p:sp>
-        <p:nvSpPr>
-          <p:cNvPr id="7" name="TextBox 6"/>
-          <p:cNvSpPr txBox="1"/>
-          <p:nvPr/>
-        </p:nvSpPr>
-        <p:spPr>
-          <a:xfrm>
-            <a:off x="7549" y="31432"/>
-            <a:ext cx="25400" cy="8255"/>
-          </a:xfrm>
-          <a:prstGeom prst="rect">
-            <a:avLst/>
-          </a:prstGeom>
-          <a:noFill/>
-        </p:spPr>
-        <p:txBody>
-          <a:bodyPr wrap="square" anchor="t" lIns="0" rIns="0" tIns="0" bIns="0">
-            <a:spAutoFit/>
-          </a:bodyPr>
-          <a:lstStyle/>
-          <a:p>
-            <a:pPr algn="l">
-              <a:lnSpc>
-                <a:spcPct val="135000"/>
-              </a:lnSpc>
-            </a:pPr>
-            <a:r>
-              <a:rPr sz="1300" b="0">
-                <a:solidFill>
-                  <a:srgbClr val="B9C2D6"/>
+              <a:rPr sz="1200" b="0" i="0">
+                <a:solidFill>
+                  <a:srgbClr val="1A2233"/>
                 </a:solidFill>
                 <a:latin typeface="IBM Plex Sans"/>
               </a:rPr>
-              <a:t>Salaried IT employees, the highest utilization of any occupation, ₹40.62M monthly spend across 1,294 customers.</a:t>
-            </a:r>
-          </a:p>
-        </p:txBody>
-      </p:sp>
-      <p:sp>
-        <p:nvSpPr>
-          <p:cNvPr id="8" name="TextBox 7"/>
-          <p:cNvSpPr txBox="1"/>
-          <p:nvPr/>
-        </p:nvSpPr>
-        <p:spPr>
-          <a:xfrm>
-            <a:off x="35242" y="24638"/>
-            <a:ext cx="12065" cy="1905"/>
-          </a:xfrm>
-          <a:prstGeom prst="rect">
-            <a:avLst/>
-          </a:prstGeom>
-          <a:noFill/>
-        </p:spPr>
-        <p:txBody>
-          <a:bodyPr wrap="square" anchor="t" lIns="0" rIns="0" tIns="0" bIns="0">
-            <a:spAutoFit/>
-          </a:bodyPr>
-          <a:lstStyle/>
-          <a:p>
-            <a:pPr algn="l">
-              <a:lnSpc>
-                <a:spcPct val="115000"/>
-              </a:lnSpc>
-            </a:pPr>
-            <a:r>
-              <a:rPr sz="1300" b="0">
-                <a:solidFill>
-                  <a:srgbClr val="1A2233"/>
-                </a:solidFill>
-                <a:latin typeface="IBM Plex Sans"/>
-              </a:rPr>
               <a:t>Salaried IT</a:t>
             </a:r>
           </a:p>
@@ -6957,14 +6741,14 @@
       </p:sp>
       <p:sp>
         <p:nvSpPr>
-          <p:cNvPr id="9" name="Rounded Rectangle 8"/>
+          <p:cNvPr id="6" name="Rounded Rectangle 5"/>
           <p:cNvSpPr/>
           <p:nvPr/>
         </p:nvSpPr>
         <p:spPr>
           <a:xfrm>
-            <a:off x="48260" y="24765"/>
-            <a:ext cx="24764" cy="1397"/>
+            <a:off x="7178040" y="3383279"/>
+            <a:ext cx="3367735" cy="201168"/>
           </a:xfrm>
           <a:prstGeom prst="roundRect">
             <a:avLst>
@@ -7005,14 +6789,14 @@
       </p:sp>
       <p:sp>
         <p:nvSpPr>
-          <p:cNvPr id="10" name="Rounded Rectangle 9"/>
+          <p:cNvPr id="7" name="Rounded Rectangle 6"/>
           <p:cNvSpPr/>
           <p:nvPr/>
         </p:nvSpPr>
         <p:spPr>
           <a:xfrm>
-            <a:off x="48260" y="24765"/>
-            <a:ext cx="23031" cy="1397"/>
+            <a:off x="7178040" y="3383279"/>
+            <a:ext cx="3131993" cy="201168"/>
           </a:xfrm>
           <a:prstGeom prst="roundRect">
             <a:avLst>
@@ -7051,14 +6835,14 @@
       </p:sp>
       <p:sp>
         <p:nvSpPr>
-          <p:cNvPr id="11" name="TextBox 10"/>
+          <p:cNvPr id="8" name="TextBox 7"/>
           <p:cNvSpPr txBox="1"/>
           <p:nvPr/>
         </p:nvSpPr>
         <p:spPr>
           <a:xfrm>
-            <a:off x="73977" y="24638"/>
-            <a:ext cx="4762" cy="1905"/>
+            <a:off x="10682935" y="3355848"/>
+            <a:ext cx="685800" cy="274320"/>
           </a:xfrm>
           <a:prstGeom prst="rect">
             <a:avLst/>
@@ -7077,7 +6861,7 @@
               </a:lnSpc>
             </a:pPr>
             <a:r>
-              <a:rPr sz="1300" b="0">
+              <a:rPr sz="1200" b="0" i="0">
                 <a:solidFill>
                   <a:srgbClr val="1A2233"/>
                 </a:solidFill>
@@ -7090,14 +6874,14 @@
       </p:sp>
       <p:sp>
         <p:nvSpPr>
-          <p:cNvPr id="12" name="TextBox 11"/>
+          <p:cNvPr id="9" name="TextBox 8"/>
           <p:cNvSpPr txBox="1"/>
           <p:nvPr/>
         </p:nvSpPr>
         <p:spPr>
           <a:xfrm>
-            <a:off x="35242" y="27813"/>
-            <a:ext cx="12065" cy="1905"/>
+            <a:off x="5440680" y="3739896"/>
+            <a:ext cx="1600200" cy="274320"/>
           </a:xfrm>
           <a:prstGeom prst="rect">
             <a:avLst/>
@@ -7116,7 +6900,7 @@
               </a:lnSpc>
             </a:pPr>
             <a:r>
-              <a:rPr sz="1300" b="0">
+              <a:rPr sz="1200" b="0" i="0">
                 <a:solidFill>
                   <a:srgbClr val="1A2233"/>
                 </a:solidFill>
@@ -7129,14 +6913,14 @@
       </p:sp>
       <p:sp>
         <p:nvSpPr>
-          <p:cNvPr id="13" name="Rounded Rectangle 12"/>
+          <p:cNvPr id="10" name="Rounded Rectangle 9"/>
           <p:cNvSpPr/>
           <p:nvPr/>
         </p:nvSpPr>
         <p:spPr>
           <a:xfrm>
-            <a:off x="48260" y="27940"/>
-            <a:ext cx="24764" cy="1397"/>
+            <a:off x="7178040" y="3767328"/>
+            <a:ext cx="3367735" cy="201168"/>
           </a:xfrm>
           <a:prstGeom prst="roundRect">
             <a:avLst>
@@ -7177,14 +6961,14 @@
       </p:sp>
       <p:sp>
         <p:nvSpPr>
-          <p:cNvPr id="14" name="Rounded Rectangle 13"/>
+          <p:cNvPr id="11" name="Rounded Rectangle 10"/>
           <p:cNvSpPr/>
           <p:nvPr/>
         </p:nvSpPr>
         <p:spPr>
           <a:xfrm>
-            <a:off x="48260" y="27940"/>
-            <a:ext cx="20554" cy="1397"/>
+            <a:off x="7178040" y="3767328"/>
+            <a:ext cx="2795220" cy="201168"/>
           </a:xfrm>
           <a:prstGeom prst="roundRect">
             <a:avLst>
@@ -7223,14 +7007,14 @@
       </p:sp>
       <p:sp>
         <p:nvSpPr>
-          <p:cNvPr id="15" name="TextBox 14"/>
+          <p:cNvPr id="12" name="TextBox 11"/>
           <p:cNvSpPr txBox="1"/>
           <p:nvPr/>
         </p:nvSpPr>
         <p:spPr>
           <a:xfrm>
-            <a:off x="73977" y="27813"/>
-            <a:ext cx="4762" cy="1905"/>
+            <a:off x="10682935" y="3739896"/>
+            <a:ext cx="685800" cy="274320"/>
           </a:xfrm>
           <a:prstGeom prst="rect">
             <a:avLst/>
@@ -7249,7 +7033,7 @@
               </a:lnSpc>
             </a:pPr>
             <a:r>
-              <a:rPr sz="1300" b="0">
+              <a:rPr sz="1200" b="0" i="0">
                 <a:solidFill>
                   <a:srgbClr val="1A2233"/>
                 </a:solidFill>
@@ -7262,14 +7046,14 @@
       </p:sp>
       <p:sp>
         <p:nvSpPr>
-          <p:cNvPr id="16" name="TextBox 15"/>
+          <p:cNvPr id="13" name="TextBox 12"/>
           <p:cNvSpPr txBox="1"/>
           <p:nvPr/>
         </p:nvSpPr>
         <p:spPr>
           <a:xfrm>
-            <a:off x="35242" y="30988"/>
-            <a:ext cx="12065" cy="1905"/>
+            <a:off x="5440680" y="4123944"/>
+            <a:ext cx="1600200" cy="274320"/>
           </a:xfrm>
           <a:prstGeom prst="rect">
             <a:avLst/>
@@ -7288,7 +7072,7 @@
               </a:lnSpc>
             </a:pPr>
             <a:r>
-              <a:rPr sz="1300" b="0">
+              <a:rPr sz="1200" b="0" i="0">
                 <a:solidFill>
                   <a:srgbClr val="1A2233"/>
                 </a:solidFill>
@@ -7301,14 +7085,14 @@
       </p:sp>
       <p:sp>
         <p:nvSpPr>
-          <p:cNvPr id="17" name="Rounded Rectangle 16"/>
+          <p:cNvPr id="14" name="Rounded Rectangle 13"/>
           <p:cNvSpPr/>
           <p:nvPr/>
         </p:nvSpPr>
         <p:spPr>
           <a:xfrm>
-            <a:off x="48260" y="31115"/>
-            <a:ext cx="24764" cy="1397"/>
+            <a:off x="7178040" y="4151376"/>
+            <a:ext cx="3367735" cy="201168"/>
           </a:xfrm>
           <a:prstGeom prst="roundRect">
             <a:avLst>
@@ -7349,14 +7133,14 @@
       </p:sp>
       <p:sp>
         <p:nvSpPr>
-          <p:cNvPr id="18" name="Rounded Rectangle 17"/>
+          <p:cNvPr id="15" name="Rounded Rectangle 14"/>
           <p:cNvSpPr/>
           <p:nvPr/>
         </p:nvSpPr>
         <p:spPr>
           <a:xfrm>
-            <a:off x="48260" y="31115"/>
-            <a:ext cx="19069" cy="1397"/>
+            <a:off x="7178040" y="4151376"/>
+            <a:ext cx="2593156" cy="201168"/>
           </a:xfrm>
           <a:prstGeom prst="roundRect">
             <a:avLst>
@@ -7395,14 +7179,14 @@
       </p:sp>
       <p:sp>
         <p:nvSpPr>
-          <p:cNvPr id="19" name="TextBox 18"/>
+          <p:cNvPr id="16" name="TextBox 15"/>
           <p:cNvSpPr txBox="1"/>
           <p:nvPr/>
         </p:nvSpPr>
         <p:spPr>
           <a:xfrm>
-            <a:off x="73977" y="30988"/>
-            <a:ext cx="4762" cy="1905"/>
+            <a:off x="10682935" y="4123944"/>
+            <a:ext cx="685800" cy="274320"/>
           </a:xfrm>
           <a:prstGeom prst="rect">
             <a:avLst/>
@@ -7421,7 +7205,7 @@
               </a:lnSpc>
             </a:pPr>
             <a:r>
-              <a:rPr sz="1300" b="0">
+              <a:rPr sz="1200" b="0" i="0">
                 <a:solidFill>
                   <a:srgbClr val="1A2233"/>
                 </a:solidFill>
@@ -7434,14 +7218,14 @@
       </p:sp>
       <p:sp>
         <p:nvSpPr>
-          <p:cNvPr id="20" name="TextBox 19"/>
+          <p:cNvPr id="17" name="TextBox 16"/>
           <p:cNvSpPr txBox="1"/>
           <p:nvPr/>
         </p:nvSpPr>
         <p:spPr>
           <a:xfrm>
-            <a:off x="35242" y="34163"/>
-            <a:ext cx="12065" cy="1905"/>
+            <a:off x="5440680" y="4507992"/>
+            <a:ext cx="1600200" cy="274320"/>
           </a:xfrm>
           <a:prstGeom prst="rect">
             <a:avLst/>
@@ -7460,7 +7244,7 @@
               </a:lnSpc>
             </a:pPr>
             <a:r>
-              <a:rPr sz="1300" b="0">
+              <a:rPr sz="1200" b="0" i="0">
                 <a:solidFill>
                   <a:srgbClr val="1A2233"/>
                 </a:solidFill>
@@ -7473,14 +7257,14 @@
       </p:sp>
       <p:sp>
         <p:nvSpPr>
-          <p:cNvPr id="21" name="Rounded Rectangle 20"/>
+          <p:cNvPr id="18" name="Rounded Rectangle 17"/>
           <p:cNvSpPr/>
           <p:nvPr/>
         </p:nvSpPr>
         <p:spPr>
           <a:xfrm>
-            <a:off x="48260" y="34290"/>
-            <a:ext cx="24764" cy="1397"/>
+            <a:off x="7178040" y="4535424"/>
+            <a:ext cx="3367735" cy="201168"/>
           </a:xfrm>
           <a:prstGeom prst="roundRect">
             <a:avLst>
@@ -7521,14 +7305,14 @@
       </p:sp>
       <p:sp>
         <p:nvSpPr>
-          <p:cNvPr id="22" name="Rounded Rectangle 21"/>
+          <p:cNvPr id="19" name="Rounded Rectangle 18"/>
           <p:cNvSpPr/>
           <p:nvPr/>
         </p:nvSpPr>
         <p:spPr>
           <a:xfrm>
-            <a:off x="48260" y="34290"/>
-            <a:ext cx="14858" cy="1397"/>
+            <a:off x="7178040" y="4535424"/>
+            <a:ext cx="2020641" cy="201168"/>
           </a:xfrm>
           <a:prstGeom prst="roundRect">
             <a:avLst>
@@ -7567,14 +7351,14 @@
       </p:sp>
       <p:sp>
         <p:nvSpPr>
-          <p:cNvPr id="23" name="TextBox 22"/>
+          <p:cNvPr id="20" name="TextBox 19"/>
           <p:cNvSpPr txBox="1"/>
           <p:nvPr/>
         </p:nvSpPr>
         <p:spPr>
           <a:xfrm>
-            <a:off x="73977" y="34163"/>
-            <a:ext cx="4762" cy="1905"/>
+            <a:off x="10682935" y="4507992"/>
+            <a:ext cx="685800" cy="274320"/>
           </a:xfrm>
           <a:prstGeom prst="rect">
             <a:avLst/>
@@ -7593,7 +7377,7 @@
               </a:lnSpc>
             </a:pPr>
             <a:r>
-              <a:rPr sz="1300" b="0">
+              <a:rPr sz="1200" b="0" i="0">
                 <a:solidFill>
                   <a:srgbClr val="1A2233"/>
                 </a:solidFill>
@@ -7606,14 +7390,14 @@
       </p:sp>
       <p:sp>
         <p:nvSpPr>
-          <p:cNvPr id="24" name="TextBox 23"/>
+          <p:cNvPr id="21" name="TextBox 20"/>
           <p:cNvSpPr txBox="1"/>
           <p:nvPr/>
         </p:nvSpPr>
         <p:spPr>
           <a:xfrm>
-            <a:off x="35242" y="37338"/>
-            <a:ext cx="12065" cy="1905"/>
+            <a:off x="5440680" y="4892040"/>
+            <a:ext cx="1600200" cy="274320"/>
           </a:xfrm>
           <a:prstGeom prst="rect">
             <a:avLst/>
@@ -7632,7 +7416,7 @@
               </a:lnSpc>
             </a:pPr>
             <a:r>
-              <a:rPr sz="1300" b="0">
+              <a:rPr sz="1200" b="0" i="0">
                 <a:solidFill>
                   <a:srgbClr val="1A2233"/>
                 </a:solidFill>
@@ -7645,14 +7429,14 @@
       </p:sp>
       <p:sp>
         <p:nvSpPr>
-          <p:cNvPr id="25" name="Rounded Rectangle 24"/>
+          <p:cNvPr id="22" name="Rounded Rectangle 21"/>
           <p:cNvSpPr/>
           <p:nvPr/>
         </p:nvSpPr>
         <p:spPr>
           <a:xfrm>
-            <a:off x="48260" y="37465"/>
-            <a:ext cx="24764" cy="1397"/>
+            <a:off x="7178040" y="4919472"/>
+            <a:ext cx="3367735" cy="201168"/>
           </a:xfrm>
           <a:prstGeom prst="roundRect">
             <a:avLst>
@@ -7693,14 +7477,14 @@
       </p:sp>
       <p:sp>
         <p:nvSpPr>
-          <p:cNvPr id="26" name="Rounded Rectangle 25"/>
+          <p:cNvPr id="23" name="Rounded Rectangle 22"/>
           <p:cNvSpPr/>
           <p:nvPr/>
         </p:nvSpPr>
         <p:spPr>
           <a:xfrm>
-            <a:off x="48260" y="37465"/>
-            <a:ext cx="13125" cy="1397"/>
+            <a:off x="7178040" y="4919472"/>
+            <a:ext cx="1784899" cy="201168"/>
           </a:xfrm>
           <a:prstGeom prst="roundRect">
             <a:avLst>
@@ -7739,14 +7523,14 @@
       </p:sp>
       <p:sp>
         <p:nvSpPr>
-          <p:cNvPr id="27" name="TextBox 26"/>
+          <p:cNvPr id="24" name="TextBox 23"/>
           <p:cNvSpPr txBox="1"/>
           <p:nvPr/>
         </p:nvSpPr>
         <p:spPr>
           <a:xfrm>
-            <a:off x="73977" y="37338"/>
-            <a:ext cx="4762" cy="1905"/>
+            <a:off x="10682935" y="4892040"/>
+            <a:ext cx="685800" cy="274320"/>
           </a:xfrm>
           <a:prstGeom prst="rect">
             <a:avLst/>
@@ -7765,7 +7549,7 @@
               </a:lnSpc>
             </a:pPr>
             <a:r>
-              <a:rPr sz="1300" b="0">
+              <a:rPr sz="1200" b="0" i="0">
                 <a:solidFill>
                   <a:srgbClr val="1A2233"/>
                 </a:solidFill>
@@ -7778,14 +7562,14 @@
       </p:sp>
       <p:sp>
         <p:nvSpPr>
-          <p:cNvPr id="28" name="TextBox 27"/>
+          <p:cNvPr id="25" name="TextBox 24"/>
           <p:cNvSpPr txBox="1"/>
           <p:nvPr/>
         </p:nvSpPr>
         <p:spPr>
           <a:xfrm>
-            <a:off x="812800" y="6451600"/>
-            <a:ext cx="6350000" cy="190500"/>
+            <a:off x="822960" y="6419088"/>
+            <a:ext cx="8686800" cy="274320"/>
           </a:xfrm>
           <a:prstGeom prst="rect">
             <a:avLst/>
@@ -7804,7 +7588,7 @@
               </a:lnSpc>
             </a:pPr>
             <a:r>
-              <a:rPr sz="1100" b="0">
+              <a:rPr sz="1100" b="0" i="0">
                 <a:solidFill>
                   <a:srgbClr val="6A7179"/>
                 </a:solidFill>
@@ -7817,14 +7601,14 @@
       </p:sp>
       <p:sp>
         <p:nvSpPr>
-          <p:cNvPr id="29" name="TextBox 28"/>
+          <p:cNvPr id="26" name="TextBox 25"/>
           <p:cNvSpPr txBox="1"/>
           <p:nvPr/>
         </p:nvSpPr>
         <p:spPr>
           <a:xfrm>
-            <a:off x="10541000" y="6451600"/>
-            <a:ext cx="838200" cy="190500"/>
+            <a:off x="10454335" y="6419088"/>
+            <a:ext cx="914400" cy="274320"/>
           </a:xfrm>
           <a:prstGeom prst="rect">
             <a:avLst/>
@@ -7843,7 +7627,7 @@
               </a:lnSpc>
             </a:pPr>
             <a:r>
-              <a:rPr sz="1100" b="0">
+              <a:rPr sz="1100" b="0" i="0">
                 <a:solidFill>
                   <a:srgbClr val="6A7179"/>
                 </a:solidFill>
@@ -7888,8 +7672,8 @@
         </p:nvSpPr>
         <p:spPr>
           <a:xfrm>
-            <a:off x="812800" y="812800"/>
-            <a:ext cx="5715000" cy="190500"/>
+            <a:off x="822960" y="777240"/>
+            <a:ext cx="9692640" cy="5806440"/>
           </a:xfrm>
           <a:prstGeom prst="rect">
             <a:avLst/>
@@ -7897,101 +7681,64 @@
           <a:noFill/>
         </p:spPr>
         <p:txBody>
-          <a:bodyPr wrap="square" anchor="t" lIns="0" rIns="0" tIns="0" bIns="0">
+          <a:bodyPr wrap="square" lIns="0" rIns="0" tIns="0" bIns="0">
             <a:spAutoFit/>
           </a:bodyPr>
           <a:lstStyle/>
           <a:p>
-            <a:pPr algn="l">
+            <a:pPr>
+              <a:lnSpc>
+                <a:spcPct val="100000"/>
+              </a:lnSpc>
+              <a:spcAft>
+                <a:spcPts val="1000"/>
+              </a:spcAft>
+            </a:pPr>
+            <a:r>
+              <a:rPr sz="1200" b="1" spc="120">
+                <a:solidFill>
+                  <a:srgbClr val="7A5A1E"/>
+                </a:solidFill>
+                <a:latin typeface="IBM Plex Sans"/>
+              </a:rPr>
+              <a:t>INSIGHT 02</a:t>
+            </a:r>
+          </a:p>
+          <a:p>
+            <a:pPr>
               <a:lnSpc>
                 <a:spcPct val="115000"/>
               </a:lnSpc>
-            </a:pPr>
-            <a:r>
-              <a:rPr sz="1200" b="1" spc="120">
-                <a:solidFill>
-                  <a:srgbClr val="7A5A1E"/>
+              <a:spcAft>
+                <a:spcPts val="1200"/>
+              </a:spcAft>
+            </a:pPr>
+            <a:r>
+              <a:rPr sz="3000" b="0">
+                <a:solidFill>
+                  <a:srgbClr val="0E1F33"/>
+                </a:solidFill>
+                <a:latin typeface="Source Serif 4"/>
+              </a:rPr>
+              <a:t>Spending peaks mid-career, not at the start</a:t>
+            </a:r>
+          </a:p>
+          <a:p>
+            <a:pPr>
+              <a:lnSpc>
+                <a:spcPct val="135000"/>
+              </a:lnSpc>
+              <a:spcAft>
+                <a:spcPts val="0"/>
+              </a:spcAft>
+            </a:pPr>
+            <a:r>
+              <a:rPr sz="1400" b="0">
+                <a:solidFill>
+                  <a:srgbClr val="4A5568"/>
                 </a:solidFill>
                 <a:latin typeface="IBM Plex Sans"/>
               </a:rPr>
-              <a:t>INSIGHT 02</a:t>
-            </a:r>
-          </a:p>
-        </p:txBody>
-      </p:sp>
-      <p:sp>
-        <p:nvSpPr>
-          <p:cNvPr id="3" name="TextBox 2"/>
-          <p:cNvSpPr txBox="1"/>
-          <p:nvPr/>
-        </p:nvSpPr>
-        <p:spPr>
-          <a:xfrm>
-            <a:off x="812800" y="1066800"/>
-            <a:ext cx="9525000" cy="635000"/>
-          </a:xfrm>
-          <a:prstGeom prst="rect">
-            <a:avLst/>
-          </a:prstGeom>
-          <a:noFill/>
-        </p:spPr>
-        <p:txBody>
-          <a:bodyPr wrap="square" anchor="t" lIns="0" rIns="0" tIns="0" bIns="0">
-            <a:spAutoFit/>
-          </a:bodyPr>
-          <a:lstStyle/>
-          <a:p>
-            <a:pPr algn="l">
-              <a:lnSpc>
-                <a:spcPct val="115000"/>
-              </a:lnSpc>
-            </a:pPr>
-            <a:r>
-              <a:rPr sz="3200" b="0">
-                <a:solidFill>
-                  <a:srgbClr val="0E1F33"/>
-                </a:solidFill>
-                <a:latin typeface="Source Serif 4"/>
-              </a:rPr>
-              <a:t>Spending peaks mid-career, not at the start</a:t>
-            </a:r>
-          </a:p>
-        </p:txBody>
-      </p:sp>
-      <p:sp>
-        <p:nvSpPr>
-          <p:cNvPr id="4" name="TextBox 3"/>
-          <p:cNvSpPr txBox="1"/>
-          <p:nvPr/>
-        </p:nvSpPr>
-        <p:spPr>
-          <a:xfrm>
-            <a:off x="812800" y="1595120"/>
-            <a:ext cx="8572500" cy="444500"/>
-          </a:xfrm>
-          <a:prstGeom prst="rect">
-            <a:avLst/>
-          </a:prstGeom>
-          <a:noFill/>
-        </p:spPr>
-        <p:txBody>
-          <a:bodyPr wrap="square" anchor="t" lIns="0" rIns="0" tIns="0" bIns="0">
-            <a:spAutoFit/>
-          </a:bodyPr>
-          <a:lstStyle/>
-          <a:p>
-            <a:pPr algn="l">
-              <a:lnSpc>
-                <a:spcPct val="135000"/>
-              </a:lnSpc>
-            </a:pPr>
-            <a:r>
-              <a:rPr sz="1400" b="0">
-                <a:solidFill>
-                  <a:srgbClr val="4A5568"/>
-                </a:solidFill>
-                <a:latin typeface="IBM Plex Sans"/>
-              </a:rPr>
               <a:t>Utilization climbs through the 30s and 40s, then eases as customers shift toward a savings mindset.</a:t>
             </a:r>
           </a:p>
@@ -7999,18 +7746,18 @@
       </p:sp>
       <p:sp>
         <p:nvSpPr>
-          <p:cNvPr id="5" name="Rounded Rectangle 4"/>
+          <p:cNvPr id="3" name="Rounded Rectangle 2"/>
           <p:cNvSpPr/>
           <p:nvPr/>
         </p:nvSpPr>
         <p:spPr>
           <a:xfrm>
-            <a:off x="10160" y="30314"/>
-            <a:ext cx="9842" cy="10325"/>
+            <a:off x="1958187" y="4542647"/>
+            <a:ext cx="1691640" cy="1263792"/>
           </a:xfrm>
           <a:prstGeom prst="roundRect">
             <a:avLst>
-              <a:gd name="adj" fmla="val 8000"/>
+              <a:gd name="adj" fmla="val 10000"/>
             </a:avLst>
           </a:prstGeom>
           <a:solidFill>
@@ -8045,14 +7792,14 @@
       </p:sp>
       <p:sp>
         <p:nvSpPr>
-          <p:cNvPr id="6" name="TextBox 5"/>
+          <p:cNvPr id="4" name="TextBox 3"/>
           <p:cNvSpPr txBox="1"/>
           <p:nvPr/>
         </p:nvSpPr>
         <p:spPr>
           <a:xfrm>
-            <a:off x="8890" y="27647"/>
-            <a:ext cx="12382" cy="2222"/>
+            <a:off x="1821027" y="4176887"/>
+            <a:ext cx="1965960" cy="320040"/>
           </a:xfrm>
           <a:prstGeom prst="rect">
             <a:avLst/>
@@ -8071,7 +7818,7 @@
               </a:lnSpc>
             </a:pPr>
             <a:r>
-              <a:rPr sz="1500" b="1">
+              <a:rPr sz="1500" b="1" i="0">
                 <a:solidFill>
                   <a:srgbClr val="0E1F33"/>
                 </a:solidFill>
@@ -8084,14 +7831,14 @@
       </p:sp>
       <p:sp>
         <p:nvSpPr>
-          <p:cNvPr id="7" name="TextBox 6"/>
+          <p:cNvPr id="5" name="TextBox 4"/>
           <p:cNvSpPr txBox="1"/>
           <p:nvPr/>
         </p:nvSpPr>
         <p:spPr>
           <a:xfrm>
-            <a:off x="8890" y="41148"/>
-            <a:ext cx="12382" cy="2540"/>
+            <a:off x="1821027" y="5897879"/>
+            <a:ext cx="1965960" cy="365760"/>
           </a:xfrm>
           <a:prstGeom prst="rect">
             <a:avLst/>
@@ -8110,7 +7857,7 @@
               </a:lnSpc>
             </a:pPr>
             <a:r>
-              <a:rPr sz="1300" b="0">
+              <a:rPr sz="1200" b="0" i="0">
                 <a:solidFill>
                   <a:srgbClr val="4A5568"/>
                 </a:solidFill>
@@ -8123,18 +7870,18 @@
       </p:sp>
       <p:sp>
         <p:nvSpPr>
-          <p:cNvPr id="8" name="Rounded Rectangle 7"/>
+          <p:cNvPr id="6" name="Rounded Rectangle 5"/>
           <p:cNvSpPr/>
           <p:nvPr/>
         </p:nvSpPr>
         <p:spPr>
           <a:xfrm>
-            <a:off x="23495" y="29540"/>
-            <a:ext cx="9842" cy="11099"/>
+            <a:off x="4152747" y="4447824"/>
+            <a:ext cx="1691640" cy="1358615"/>
           </a:xfrm>
           <a:prstGeom prst="roundRect">
             <a:avLst>
-              <a:gd name="adj" fmla="val 8000"/>
+              <a:gd name="adj" fmla="val 10000"/>
             </a:avLst>
           </a:prstGeom>
           <a:solidFill>
@@ -8169,14 +7916,14 @@
       </p:sp>
       <p:sp>
         <p:nvSpPr>
-          <p:cNvPr id="9" name="TextBox 8"/>
+          <p:cNvPr id="7" name="TextBox 6"/>
           <p:cNvSpPr txBox="1"/>
           <p:nvPr/>
         </p:nvSpPr>
         <p:spPr>
           <a:xfrm>
-            <a:off x="22225" y="26873"/>
-            <a:ext cx="12382" cy="2222"/>
+            <a:off x="4015587" y="4082064"/>
+            <a:ext cx="1965960" cy="320040"/>
           </a:xfrm>
           <a:prstGeom prst="rect">
             <a:avLst/>
@@ -8195,7 +7942,7 @@
               </a:lnSpc>
             </a:pPr>
             <a:r>
-              <a:rPr sz="1500" b="1">
+              <a:rPr sz="1500" b="1" i="0">
                 <a:solidFill>
                   <a:srgbClr val="0E1F33"/>
                 </a:solidFill>
@@ -8208,14 +7955,14 @@
       </p:sp>
       <p:sp>
         <p:nvSpPr>
-          <p:cNvPr id="10" name="TextBox 9"/>
+          <p:cNvPr id="8" name="TextBox 7"/>
           <p:cNvSpPr txBox="1"/>
           <p:nvPr/>
         </p:nvSpPr>
         <p:spPr>
           <a:xfrm>
-            <a:off x="22225" y="41148"/>
-            <a:ext cx="12382" cy="2540"/>
+            <a:off x="4015587" y="5897879"/>
+            <a:ext cx="1965960" cy="365760"/>
           </a:xfrm>
           <a:prstGeom prst="rect">
             <a:avLst/>
@@ -8234,7 +7981,7 @@
               </a:lnSpc>
             </a:pPr>
             <a:r>
-              <a:rPr sz="1300" b="0">
+              <a:rPr sz="1200" b="0" i="0">
                 <a:solidFill>
                   <a:srgbClr val="4A5568"/>
                 </a:solidFill>
@@ -8247,18 +7994,18 @@
       </p:sp>
       <p:sp>
         <p:nvSpPr>
-          <p:cNvPr id="11" name="Rounded Rectangle 10"/>
+          <p:cNvPr id="9" name="Rounded Rectangle 8"/>
           <p:cNvSpPr/>
           <p:nvPr/>
         </p:nvSpPr>
         <p:spPr>
           <a:xfrm>
-            <a:off x="36830" y="28778"/>
-            <a:ext cx="9842" cy="11861"/>
+            <a:off x="6347307" y="4354555"/>
+            <a:ext cx="1691640" cy="1451884"/>
           </a:xfrm>
           <a:prstGeom prst="roundRect">
             <a:avLst>
-              <a:gd name="adj" fmla="val 8000"/>
+              <a:gd name="adj" fmla="val 10000"/>
             </a:avLst>
           </a:prstGeom>
           <a:solidFill>
@@ -8293,14 +8040,14 @@
       </p:sp>
       <p:sp>
         <p:nvSpPr>
-          <p:cNvPr id="12" name="TextBox 11"/>
+          <p:cNvPr id="10" name="TextBox 9"/>
           <p:cNvSpPr txBox="1"/>
           <p:nvPr/>
         </p:nvSpPr>
         <p:spPr>
           <a:xfrm>
-            <a:off x="35560" y="26111"/>
-            <a:ext cx="12382" cy="2222"/>
+            <a:off x="6210147" y="3988795"/>
+            <a:ext cx="1965960" cy="320040"/>
           </a:xfrm>
           <a:prstGeom prst="rect">
             <a:avLst/>
@@ -8319,7 +8066,7 @@
               </a:lnSpc>
             </a:pPr>
             <a:r>
-              <a:rPr sz="1800" b="1">
+              <a:rPr sz="1900" b="1" i="0">
                 <a:solidFill>
                   <a:srgbClr val="7A5A1E"/>
                 </a:solidFill>
@@ -8332,14 +8079,14 @@
       </p:sp>
       <p:sp>
         <p:nvSpPr>
-          <p:cNvPr id="13" name="TextBox 12"/>
+          <p:cNvPr id="11" name="TextBox 10"/>
           <p:cNvSpPr txBox="1"/>
           <p:nvPr/>
         </p:nvSpPr>
         <p:spPr>
           <a:xfrm>
-            <a:off x="35560" y="41148"/>
-            <a:ext cx="12382" cy="2540"/>
+            <a:off x="6210147" y="5897879"/>
+            <a:ext cx="1965960" cy="365760"/>
           </a:xfrm>
           <a:prstGeom prst="rect">
             <a:avLst/>
@@ -8358,7 +8105,7 @@
               </a:lnSpc>
             </a:pPr>
             <a:r>
-              <a:rPr sz="1300" b="1">
+              <a:rPr sz="1200" b="1" i="0">
                 <a:solidFill>
                   <a:srgbClr val="0E1F33"/>
                 </a:solidFill>
@@ -8371,18 +8118,18 @@
       </p:sp>
       <p:sp>
         <p:nvSpPr>
-          <p:cNvPr id="14" name="Rounded Rectangle 13"/>
+          <p:cNvPr id="12" name="Rounded Rectangle 11"/>
           <p:cNvSpPr/>
           <p:nvPr/>
         </p:nvSpPr>
         <p:spPr>
           <a:xfrm>
-            <a:off x="50165" y="31826"/>
-            <a:ext cx="9842" cy="8813"/>
+            <a:off x="8541867" y="4727630"/>
+            <a:ext cx="1691640" cy="1078809"/>
           </a:xfrm>
           <a:prstGeom prst="roundRect">
             <a:avLst>
-              <a:gd name="adj" fmla="val 8000"/>
+              <a:gd name="adj" fmla="val 10000"/>
             </a:avLst>
           </a:prstGeom>
           <a:solidFill>
@@ -8417,14 +8164,14 @@
       </p:sp>
       <p:sp>
         <p:nvSpPr>
-          <p:cNvPr id="15" name="TextBox 14"/>
+          <p:cNvPr id="13" name="TextBox 12"/>
           <p:cNvSpPr txBox="1"/>
           <p:nvPr/>
         </p:nvSpPr>
         <p:spPr>
           <a:xfrm>
-            <a:off x="48895" y="29159"/>
-            <a:ext cx="12382" cy="2222"/>
+            <a:off x="8404707" y="4361870"/>
+            <a:ext cx="1965960" cy="320040"/>
           </a:xfrm>
           <a:prstGeom prst="rect">
             <a:avLst/>
@@ -8443,7 +8190,7 @@
               </a:lnSpc>
             </a:pPr>
             <a:r>
-              <a:rPr sz="1500" b="1">
+              <a:rPr sz="1500" b="1" i="0">
                 <a:solidFill>
                   <a:srgbClr val="0E1F33"/>
                 </a:solidFill>
@@ -8456,14 +8203,14 @@
       </p:sp>
       <p:sp>
         <p:nvSpPr>
-          <p:cNvPr id="16" name="TextBox 15"/>
+          <p:cNvPr id="14" name="TextBox 13"/>
           <p:cNvSpPr txBox="1"/>
           <p:nvPr/>
         </p:nvSpPr>
         <p:spPr>
           <a:xfrm>
-            <a:off x="48895" y="41148"/>
-            <a:ext cx="12382" cy="2540"/>
+            <a:off x="8404707" y="5897879"/>
+            <a:ext cx="1965960" cy="365760"/>
           </a:xfrm>
           <a:prstGeom prst="rect">
             <a:avLst/>
@@ -8482,7 +8229,7 @@
               </a:lnSpc>
             </a:pPr>
             <a:r>
-              <a:rPr sz="1300" b="0">
+              <a:rPr sz="1200" b="0" i="0">
                 <a:solidFill>
                   <a:srgbClr val="4A5568"/>
                 </a:solidFill>
@@ -8495,14 +8242,14 @@
       </p:sp>
       <p:sp>
         <p:nvSpPr>
-          <p:cNvPr id="17" name="TextBox 16"/>
+          <p:cNvPr id="15" name="TextBox 14"/>
           <p:cNvSpPr txBox="1"/>
           <p:nvPr/>
         </p:nvSpPr>
         <p:spPr>
           <a:xfrm>
-            <a:off x="812800" y="6451600"/>
-            <a:ext cx="6350000" cy="190500"/>
+            <a:off x="822960" y="6419088"/>
+            <a:ext cx="8686800" cy="274320"/>
           </a:xfrm>
           <a:prstGeom prst="rect">
             <a:avLst/>
@@ -8521,7 +8268,7 @@
               </a:lnSpc>
             </a:pPr>
             <a:r>
-              <a:rPr sz="1100" b="0">
+              <a:rPr sz="1100" b="0" i="0">
                 <a:solidFill>
                   <a:srgbClr val="6A7179"/>
                 </a:solidFill>
@@ -8534,14 +8281,14 @@
       </p:sp>
       <p:sp>
         <p:nvSpPr>
-          <p:cNvPr id="18" name="TextBox 17"/>
+          <p:cNvPr id="16" name="TextBox 15"/>
           <p:cNvSpPr txBox="1"/>
           <p:nvPr/>
         </p:nvSpPr>
         <p:spPr>
           <a:xfrm>
-            <a:off x="10541000" y="6451600"/>
-            <a:ext cx="838200" cy="190500"/>
+            <a:off x="10454335" y="6419088"/>
+            <a:ext cx="914400" cy="274320"/>
           </a:xfrm>
           <a:prstGeom prst="rect">
             <a:avLst/>
@@ -8560,7 +8307,7 @@
               </a:lnSpc>
             </a:pPr>
             <a:r>
-              <a:rPr sz="1100" b="0">
+              <a:rPr sz="1100" b="0" i="0">
                 <a:solidFill>
                   <a:srgbClr val="6A7179"/>
                 </a:solidFill>
@@ -8605,8 +8352,8 @@
         </p:nvSpPr>
         <p:spPr>
           <a:xfrm>
-            <a:off x="0" y="6985"/>
-            <a:ext cx="84664" cy="2540"/>
+            <a:off x="0" y="960120"/>
+            <a:ext cx="12191695" cy="365760"/>
           </a:xfrm>
           <a:prstGeom prst="rect">
             <a:avLst/>
@@ -8625,7 +8372,7 @@
               </a:lnSpc>
             </a:pPr>
             <a:r>
-              <a:rPr sz="1200" b="1" spc="120">
+              <a:rPr sz="1200" b="1" i="0" spc="120">
                 <a:solidFill>
                   <a:srgbClr val="0E1F33"/>
                 </a:solidFill>
@@ -8644,8 +8391,8 @@
         </p:nvSpPr>
         <p:spPr>
           <a:xfrm>
-            <a:off x="0" y="11112"/>
-            <a:ext cx="84664" cy="12700"/>
+            <a:off x="0" y="1508760"/>
+            <a:ext cx="12191695" cy="1737360"/>
           </a:xfrm>
           <a:prstGeom prst="rect">
             <a:avLst/>
@@ -8664,7 +8411,7 @@
               </a:lnSpc>
             </a:pPr>
             <a:r>
-              <a:rPr sz="11000" b="1">
+              <a:rPr sz="10000" b="1" i="0">
                 <a:solidFill>
                   <a:srgbClr val="0E1F33"/>
                 </a:solidFill>
@@ -8683,8 +8430,8 @@
         </p:nvSpPr>
         <p:spPr>
           <a:xfrm>
-            <a:off x="15240" y="26352"/>
-            <a:ext cx="53975" cy="8890"/>
+            <a:off x="1981047" y="3611880"/>
+            <a:ext cx="8229600" cy="1188720"/>
           </a:xfrm>
           <a:prstGeom prst="rect">
             <a:avLst/>
@@ -8703,7 +8450,7 @@
               </a:lnSpc>
             </a:pPr>
             <a:r>
-              <a:rPr sz="1700" b="0">
+              <a:rPr sz="1700" b="0" i="0">
                 <a:solidFill>
                   <a:srgbClr val="0E1F33"/>
                 </a:solidFill>
@@ -8722,8 +8469,8 @@
         </p:nvSpPr>
         <p:spPr>
           <a:xfrm>
-            <a:off x="812800" y="6451600"/>
-            <a:ext cx="6350000" cy="190500"/>
+            <a:off x="822960" y="6419088"/>
+            <a:ext cx="8686800" cy="274320"/>
           </a:xfrm>
           <a:prstGeom prst="rect">
             <a:avLst/>
@@ -8742,7 +8489,7 @@
               </a:lnSpc>
             </a:pPr>
             <a:r>
-              <a:rPr sz="1100" b="0">
+              <a:rPr sz="1100" b="0" i="0">
                 <a:solidFill>
                   <a:srgbClr val="0E1F33"/>
                 </a:solidFill>
@@ -8761,8 +8508,8 @@
         </p:nvSpPr>
         <p:spPr>
           <a:xfrm>
-            <a:off x="10541000" y="6451600"/>
-            <a:ext cx="838200" cy="190500"/>
+            <a:off x="10454335" y="6419088"/>
+            <a:ext cx="914400" cy="274320"/>
           </a:xfrm>
           <a:prstGeom prst="rect">
             <a:avLst/>
@@ -8781,7 +8528,7 @@
               </a:lnSpc>
             </a:pPr>
             <a:r>
-              <a:rPr sz="1100" b="0">
+              <a:rPr sz="1100" b="0" i="0">
                 <a:solidFill>
                   <a:srgbClr val="0E1F33"/>
                 </a:solidFill>
@@ -8826,8 +8573,8 @@
         </p:nvSpPr>
         <p:spPr>
           <a:xfrm>
-            <a:off x="812800" y="812800"/>
-            <a:ext cx="5715000" cy="190500"/>
+            <a:off x="822960" y="777240"/>
+            <a:ext cx="9692640" cy="5806440"/>
           </a:xfrm>
           <a:prstGeom prst="rect">
             <a:avLst/>
@@ -8835,57 +8582,40 @@
           <a:noFill/>
         </p:spPr>
         <p:txBody>
-          <a:bodyPr wrap="square" anchor="t" lIns="0" rIns="0" tIns="0" bIns="0">
+          <a:bodyPr wrap="square" lIns="0" rIns="0" tIns="0" bIns="0">
             <a:spAutoFit/>
           </a:bodyPr>
           <a:lstStyle/>
           <a:p>
-            <a:pPr algn="l">
+            <a:pPr>
+              <a:lnSpc>
+                <a:spcPct val="100000"/>
+              </a:lnSpc>
+              <a:spcAft>
+                <a:spcPts val="1000"/>
+              </a:spcAft>
+            </a:pPr>
+            <a:r>
+              <a:rPr sz="1200" b="1" spc="120">
+                <a:solidFill>
+                  <a:srgbClr val="7A5A1E"/>
+                </a:solidFill>
+                <a:latin typeface="IBM Plex Sans"/>
+              </a:rPr>
+              <a:t>IMPLICATION</a:t>
+            </a:r>
+          </a:p>
+          <a:p>
+            <a:pPr>
               <a:lnSpc>
                 <a:spcPct val="115000"/>
               </a:lnSpc>
-            </a:pPr>
-            <a:r>
-              <a:rPr sz="1200" b="1" spc="120">
-                <a:solidFill>
-                  <a:srgbClr val="7A5A1E"/>
-                </a:solidFill>
-                <a:latin typeface="IBM Plex Sans"/>
-              </a:rPr>
-              <a:t>IMPLICATION</a:t>
-            </a:r>
-          </a:p>
-        </p:txBody>
-      </p:sp>
-      <p:sp>
-        <p:nvSpPr>
-          <p:cNvPr id="3" name="TextBox 2"/>
-          <p:cNvSpPr txBox="1"/>
-          <p:nvPr/>
-        </p:nvSpPr>
-        <p:spPr>
-          <a:xfrm>
-            <a:off x="812800" y="1066800"/>
-            <a:ext cx="9525000" cy="635000"/>
-          </a:xfrm>
-          <a:prstGeom prst="rect">
-            <a:avLst/>
-          </a:prstGeom>
-          <a:noFill/>
-        </p:spPr>
-        <p:txBody>
-          <a:bodyPr wrap="square" anchor="t" lIns="0" rIns="0" tIns="0" bIns="0">
-            <a:spAutoFit/>
-          </a:bodyPr>
-          <a:lstStyle/>
-          <a:p>
-            <a:pPr algn="l">
-              <a:lnSpc>
-                <a:spcPct val="115000"/>
-              </a:lnSpc>
-            </a:pPr>
-            <a:r>
-              <a:rPr sz="3200" b="0">
+              <a:spcAft>
+                <a:spcPts val="1200"/>
+              </a:spcAft>
+            </a:pPr>
+            <a:r>
+              <a:rPr sz="3000" b="0">
                 <a:solidFill>
                   <a:srgbClr val="0E1F33"/>
                 </a:solidFill>
@@ -8894,34 +8624,14 @@
               <a:t>Three behaviors call for three card propositions</a:t>
             </a:r>
           </a:p>
-        </p:txBody>
-      </p:sp>
-      <p:sp>
-        <p:nvSpPr>
-          <p:cNvPr id="4" name="TextBox 3"/>
-          <p:cNvSpPr txBox="1"/>
-          <p:nvPr/>
-        </p:nvSpPr>
-        <p:spPr>
-          <a:xfrm>
-            <a:off x="812800" y="1595120"/>
-            <a:ext cx="8572500" cy="444500"/>
-          </a:xfrm>
-          <a:prstGeom prst="rect">
-            <a:avLst/>
-          </a:prstGeom>
-          <a:noFill/>
-        </p:spPr>
-        <p:txBody>
-          <a:bodyPr wrap="square" anchor="t" lIns="0" rIns="0" tIns="0" bIns="0">
-            <a:spAutoFit/>
-          </a:bodyPr>
-          <a:lstStyle/>
-          <a:p>
-            <a:pPr algn="l">
+          <a:p>
+            <a:pPr>
               <a:lnSpc>
                 <a:spcPct val="135000"/>
               </a:lnSpc>
+              <a:spcAft>
+                <a:spcPts val="0"/>
+              </a:spcAft>
             </a:pPr>
             <a:r>
               <a:rPr sz="1400" b="0">
@@ -8937,15 +8647,15 @@
       </p:sp>
       <p:graphicFrame>
         <p:nvGraphicFramePr>
-          <p:cNvPr id="5" name="Table 4"/>
+          <p:cNvPr id="3" name="Table 2"/>
           <p:cNvGraphicFramePr>
             <a:graphicFrameLocks noGrp="1"/>
           </p:cNvGraphicFramePr>
           <p:nvPr/>
         </p:nvGraphicFramePr>
         <p:xfrm>
-          <a:off x="5644" y="24447"/>
-          <a:ext cx="74611" cy="2743200"/>
+          <a:off x="822960" y="3246120"/>
+          <a:ext cx="10545774" cy="3108960"/>
         </p:xfrm>
         <a:graphic>
           <a:graphicData uri="http://schemas.openxmlformats.org/drawingml/2006/table">
@@ -8954,11 +8664,11 @@
                 <a:tableStyleId>{5C22544A-7EE6-4342-B048-85BDC9FD1C3A}</a:tableStyleId>
               </a:tblPr>
               <a:tblGrid>
-                <a:gridCol w="19399"/>
-                <a:gridCol w="25368"/>
-                <a:gridCol w="29844"/>
+                <a:gridCol w="2741901"/>
+                <a:gridCol w="3585563"/>
+                <a:gridCol w="4218310"/>
               </a:tblGrid>
-              <a:tr h="685800">
+              <a:tr h="777240">
                 <a:tc>
                   <a:txBody>
                     <a:bodyPr wrap="square"/>
@@ -8975,7 +8685,7 @@
                       </a:r>
                     </a:p>
                   </a:txBody>
-                  <a:tcPr marL="152400" marR="152400" marT="88900" marB="88900" anchor="ctr">
+                  <a:tcPr marL="146304" marR="146304" marT="91440" marB="91440" anchor="ctr">
                     <a:solidFill>
                       <a:srgbClr val="0E1F33"/>
                     </a:solidFill>
@@ -8997,7 +8707,7 @@
                       </a:r>
                     </a:p>
                   </a:txBody>
-                  <a:tcPr marL="152400" marR="152400" marT="88900" marB="88900" anchor="ctr">
+                  <a:tcPr marL="146304" marR="146304" marT="91440" marB="91440" anchor="ctr">
                     <a:solidFill>
                       <a:srgbClr val="0E1F33"/>
                     </a:solidFill>
@@ -9019,14 +8729,14 @@
                       </a:r>
                     </a:p>
                   </a:txBody>
-                  <a:tcPr marL="152400" marR="152400" marT="88900" marB="88900" anchor="ctr">
+                  <a:tcPr marL="146304" marR="146304" marT="91440" marB="91440" anchor="ctr">
                     <a:solidFill>
                       <a:srgbClr val="0E1F33"/>
                     </a:solidFill>
                   </a:tcPr>
                 </a:tc>
               </a:tr>
-              <a:tr h="685800">
+              <a:tr h="777240">
                 <a:tc>
                   <a:txBody>
                     <a:bodyPr wrap="square"/>
@@ -9043,7 +8753,7 @@
                       </a:r>
                     </a:p>
                   </a:txBody>
-                  <a:tcPr marL="152400" marR="152400" marT="76200" marB="76200" anchor="ctr">
+                  <a:tcPr marL="146304" marR="146304" marT="73152" marB="73152" anchor="ctr">
                     <a:solidFill>
                       <a:srgbClr val="FFFFFF"/>
                     </a:solidFill>
@@ -9065,7 +8775,7 @@
                       </a:r>
                     </a:p>
                   </a:txBody>
-                  <a:tcPr marL="152400" marR="152400" marT="76200" marB="76200" anchor="ctr">
+                  <a:tcPr marL="146304" marR="146304" marT="73152" marB="73152" anchor="ctr">
                     <a:solidFill>
                       <a:srgbClr val="FFFFFF"/>
                     </a:solidFill>
@@ -9087,14 +8797,14 @@
                       </a:r>
                     </a:p>
                   </a:txBody>
-                  <a:tcPr marL="152400" marR="152400" marT="76200" marB="76200" anchor="ctr">
+                  <a:tcPr marL="146304" marR="146304" marT="73152" marB="73152" anchor="ctr">
                     <a:solidFill>
                       <a:srgbClr val="FFFFFF"/>
                     </a:solidFill>
                   </a:tcPr>
                 </a:tc>
               </a:tr>
-              <a:tr h="685800">
+              <a:tr h="777240">
                 <a:tc>
                   <a:txBody>
                     <a:bodyPr wrap="square"/>
@@ -9111,7 +8821,7 @@
                       </a:r>
                     </a:p>
                   </a:txBody>
-                  <a:tcPr marL="152400" marR="152400" marT="76200" marB="76200" anchor="ctr">
+                  <a:tcPr marL="146304" marR="146304" marT="73152" marB="73152" anchor="ctr">
                     <a:solidFill>
                       <a:srgbClr val="F1EEE4"/>
                     </a:solidFill>
@@ -9133,7 +8843,7 @@
                       </a:r>
                     </a:p>
                   </a:txBody>
-                  <a:tcPr marL="152400" marR="152400" marT="76200" marB="76200" anchor="ctr">
+                  <a:tcPr marL="146304" marR="146304" marT="73152" marB="73152" anchor="ctr">
                     <a:solidFill>
                       <a:srgbClr val="F1EEE4"/>
                     </a:solidFill>
@@ -9155,14 +8865,14 @@
                       </a:r>
                     </a:p>
                   </a:txBody>
-                  <a:tcPr marL="152400" marR="152400" marT="76200" marB="76200" anchor="ctr">
+                  <a:tcPr marL="146304" marR="146304" marT="73152" marB="73152" anchor="ctr">
                     <a:solidFill>
                       <a:srgbClr val="F1EEE4"/>
                     </a:solidFill>
                   </a:tcPr>
                 </a:tc>
               </a:tr>
-              <a:tr h="685800">
+              <a:tr h="777240">
                 <a:tc>
                   <a:txBody>
                     <a:bodyPr wrap="square"/>
@@ -9179,7 +8889,7 @@
                       </a:r>
                     </a:p>
                   </a:txBody>
-                  <a:tcPr marL="152400" marR="152400" marT="76200" marB="76200" anchor="ctr">
+                  <a:tcPr marL="146304" marR="146304" marT="73152" marB="73152" anchor="ctr">
                     <a:solidFill>
                       <a:srgbClr val="FFFFFF"/>
                     </a:solidFill>
@@ -9201,7 +8911,7 @@
                       </a:r>
                     </a:p>
                   </a:txBody>
-                  <a:tcPr marL="152400" marR="152400" marT="76200" marB="76200" anchor="ctr">
+                  <a:tcPr marL="146304" marR="146304" marT="73152" marB="73152" anchor="ctr">
                     <a:solidFill>
                       <a:srgbClr val="FFFFFF"/>
                     </a:solidFill>
@@ -9223,7 +8933,7 @@
                       </a:r>
                     </a:p>
                   </a:txBody>
-                  <a:tcPr marL="152400" marR="152400" marT="76200" marB="76200" anchor="ctr">
+                  <a:tcPr marL="146304" marR="146304" marT="73152" marB="73152" anchor="ctr">
                     <a:solidFill>
                       <a:srgbClr val="FFFFFF"/>
                     </a:solidFill>
@@ -9236,14 +8946,14 @@
       </p:graphicFrame>
       <p:sp>
         <p:nvSpPr>
-          <p:cNvPr id="6" name="TextBox 5"/>
+          <p:cNvPr id="4" name="TextBox 3"/>
           <p:cNvSpPr txBox="1"/>
           <p:nvPr/>
         </p:nvSpPr>
         <p:spPr>
           <a:xfrm>
-            <a:off x="812800" y="6451600"/>
-            <a:ext cx="6350000" cy="190500"/>
+            <a:off x="822960" y="6419088"/>
+            <a:ext cx="8686800" cy="274320"/>
           </a:xfrm>
           <a:prstGeom prst="rect">
             <a:avLst/>
@@ -9262,7 +8972,7 @@
               </a:lnSpc>
             </a:pPr>
             <a:r>
-              <a:rPr sz="1100" b="0">
+              <a:rPr sz="1100" b="0" i="0">
                 <a:solidFill>
                   <a:srgbClr val="6A7179"/>
                 </a:solidFill>
@@ -9275,14 +8985,14 @@
       </p:sp>
       <p:sp>
         <p:nvSpPr>
-          <p:cNvPr id="7" name="TextBox 6"/>
+          <p:cNvPr id="5" name="TextBox 4"/>
           <p:cNvSpPr txBox="1"/>
           <p:nvPr/>
         </p:nvSpPr>
         <p:spPr>
           <a:xfrm>
-            <a:off x="10541000" y="6451600"/>
-            <a:ext cx="838200" cy="190500"/>
+            <a:off x="10454335" y="6419088"/>
+            <a:ext cx="914400" cy="274320"/>
           </a:xfrm>
           <a:prstGeom prst="rect">
             <a:avLst/>
@@ -9301,7 +9011,7 @@
               </a:lnSpc>
             </a:pPr>
             <a:r>
-              <a:rPr sz="1100" b="0">
+              <a:rPr sz="1100" b="0" i="0">
                 <a:solidFill>
                   <a:srgbClr val="6A7179"/>
                 </a:solidFill>
@@ -9346,8 +9056,8 @@
         </p:nvSpPr>
         <p:spPr>
           <a:xfrm>
-            <a:off x="812800" y="812800"/>
-            <a:ext cx="5715000" cy="190500"/>
+            <a:off x="822960" y="777240"/>
+            <a:ext cx="9692640" cy="5806440"/>
           </a:xfrm>
           <a:prstGeom prst="rect">
             <a:avLst/>
@@ -9355,101 +9065,64 @@
           <a:noFill/>
         </p:spPr>
         <p:txBody>
-          <a:bodyPr wrap="square" anchor="t" lIns="0" rIns="0" tIns="0" bIns="0">
+          <a:bodyPr wrap="square" lIns="0" rIns="0" tIns="0" bIns="0">
             <a:spAutoFit/>
           </a:bodyPr>
           <a:lstStyle/>
           <a:p>
-            <a:pPr algn="l">
+            <a:pPr>
+              <a:lnSpc>
+                <a:spcPct val="100000"/>
+              </a:lnSpc>
+              <a:spcAft>
+                <a:spcPts val="1000"/>
+              </a:spcAft>
+            </a:pPr>
+            <a:r>
+              <a:rPr sz="1200" b="1" spc="120">
+                <a:solidFill>
+                  <a:srgbClr val="7A5A1E"/>
+                </a:solidFill>
+                <a:latin typeface="IBM Plex Sans"/>
+              </a:rPr>
+              <a:t>DECISION</a:t>
+            </a:r>
+          </a:p>
+          <a:p>
+            <a:pPr>
               <a:lnSpc>
                 <a:spcPct val="115000"/>
               </a:lnSpc>
-            </a:pPr>
-            <a:r>
-              <a:rPr sz="1200" b="1" spc="120">
-                <a:solidFill>
-                  <a:srgbClr val="7A5A1E"/>
+              <a:spcAft>
+                <a:spcPts val="1200"/>
+              </a:spcAft>
+            </a:pPr>
+            <a:r>
+              <a:rPr sz="3000" b="0">
+                <a:solidFill>
+                  <a:srgbClr val="0E1F33"/>
+                </a:solidFill>
+                <a:latin typeface="Source Serif 4"/>
+              </a:rPr>
+              <a:t>The three-card portfolio</a:t>
+            </a:r>
+          </a:p>
+          <a:p>
+            <a:pPr>
+              <a:lnSpc>
+                <a:spcPct val="135000"/>
+              </a:lnSpc>
+              <a:spcAft>
+                <a:spcPts val="0"/>
+              </a:spcAft>
+            </a:pPr>
+            <a:r>
+              <a:rPr sz="1400" b="0">
+                <a:solidFill>
+                  <a:srgbClr val="4A5568"/>
                 </a:solidFill>
                 <a:latin typeface="IBM Plex Sans"/>
               </a:rPr>
-              <a:t>DECISION</a:t>
-            </a:r>
-          </a:p>
-        </p:txBody>
-      </p:sp>
-      <p:sp>
-        <p:nvSpPr>
-          <p:cNvPr id="3" name="TextBox 2"/>
-          <p:cNvSpPr txBox="1"/>
-          <p:nvPr/>
-        </p:nvSpPr>
-        <p:spPr>
-          <a:xfrm>
-            <a:off x="812800" y="1066800"/>
-            <a:ext cx="9525000" cy="635000"/>
-          </a:xfrm>
-          <a:prstGeom prst="rect">
-            <a:avLst/>
-          </a:prstGeom>
-          <a:noFill/>
-        </p:spPr>
-        <p:txBody>
-          <a:bodyPr wrap="square" anchor="t" lIns="0" rIns="0" tIns="0" bIns="0">
-            <a:spAutoFit/>
-          </a:bodyPr>
-          <a:lstStyle/>
-          <a:p>
-            <a:pPr algn="l">
-              <a:lnSpc>
-                <a:spcPct val="115000"/>
-              </a:lnSpc>
-            </a:pPr>
-            <a:r>
-              <a:rPr sz="3200" b="0">
-                <a:solidFill>
-                  <a:srgbClr val="0E1F33"/>
-                </a:solidFill>
-                <a:latin typeface="Source Serif 4"/>
-              </a:rPr>
-              <a:t>The three-card portfolio</a:t>
-            </a:r>
-          </a:p>
-        </p:txBody>
-      </p:sp>
-      <p:sp>
-        <p:nvSpPr>
-          <p:cNvPr id="4" name="TextBox 3"/>
-          <p:cNvSpPr txBox="1"/>
-          <p:nvPr/>
-        </p:nvSpPr>
-        <p:spPr>
-          <a:xfrm>
-            <a:off x="812800" y="1595120"/>
-            <a:ext cx="8572500" cy="444500"/>
-          </a:xfrm>
-          <a:prstGeom prst="rect">
-            <a:avLst/>
-          </a:prstGeom>
-          <a:noFill/>
-        </p:spPr>
-        <p:txBody>
-          <a:bodyPr wrap="square" anchor="t" lIns="0" rIns="0" tIns="0" bIns="0">
-            <a:spAutoFit/>
-          </a:bodyPr>
-          <a:lstStyle/>
-          <a:p>
-            <a:pPr algn="l">
-              <a:lnSpc>
-                <a:spcPct val="135000"/>
-              </a:lnSpc>
-            </a:pPr>
-            <a:r>
-              <a:rPr sz="1400" b="0">
-                <a:solidFill>
-                  <a:srgbClr val="4A5568"/>
-                </a:solidFill>
-                <a:latin typeface="IBM Plex Sans"/>
-              </a:rPr>
               <a:t>Each card is built around the spending behavior of the segment it targets.</a:t>
             </a:r>
           </a:p>
@@ -9457,14 +9130,14 @@
       </p:sp>
       <p:sp>
         <p:nvSpPr>
-          <p:cNvPr id="5" name="Rounded Rectangle 4"/>
+          <p:cNvPr id="3" name="Rounded Rectangle 2"/>
           <p:cNvSpPr/>
           <p:nvPr/>
         </p:nvSpPr>
         <p:spPr>
           <a:xfrm>
-            <a:off x="5644" y="24447"/>
-            <a:ext cx="24511" cy="18097"/>
+            <a:off x="822960" y="3246120"/>
+            <a:ext cx="3332378" cy="2743200"/>
           </a:xfrm>
           <a:prstGeom prst="roundRect">
             <a:avLst>
@@ -9505,14 +9178,14 @@
       </p:sp>
       <p:sp>
         <p:nvSpPr>
-          <p:cNvPr id="6" name="TextBox 5"/>
+          <p:cNvPr id="4" name="TextBox 3"/>
           <p:cNvSpPr txBox="1"/>
           <p:nvPr/>
         </p:nvSpPr>
         <p:spPr>
           <a:xfrm>
-            <a:off x="7676" y="26352"/>
-            <a:ext cx="20701" cy="1905"/>
+            <a:off x="1097280" y="3502152"/>
+            <a:ext cx="2783738" cy="3081528"/>
           </a:xfrm>
           <a:prstGeom prst="rect">
             <a:avLst/>
@@ -9520,199 +9193,98 @@
           <a:noFill/>
         </p:spPr>
         <p:txBody>
-          <a:bodyPr wrap="square" anchor="t" lIns="0" rIns="0" tIns="0" bIns="0">
+          <a:bodyPr wrap="square" lIns="0" rIns="0" tIns="0" bIns="0">
             <a:spAutoFit/>
           </a:bodyPr>
           <a:lstStyle/>
           <a:p>
-            <a:pPr algn="l">
+            <a:pPr>
+              <a:lnSpc>
+                <a:spcPct val="100000"/>
+              </a:lnSpc>
+              <a:spcAft>
+                <a:spcPts val="1000"/>
+              </a:spcAft>
+            </a:pPr>
+            <a:r>
+              <a:rPr sz="1100" b="1" spc="100">
+                <a:solidFill>
+                  <a:srgbClr val="7A5A1E"/>
+                </a:solidFill>
+                <a:latin typeface="IBM Plex Sans"/>
+              </a:rPr>
+              <a:t>01 — MASS MARKET</a:t>
+            </a:r>
+          </a:p>
+          <a:p>
+            <a:pPr>
               <a:lnSpc>
                 <a:spcPct val="115000"/>
               </a:lnSpc>
-            </a:pPr>
-            <a:r>
-              <a:rPr sz="1100" b="1" spc="110">
+              <a:spcAft>
+                <a:spcPts val="800"/>
+              </a:spcAft>
+            </a:pPr>
+            <a:r>
+              <a:rPr sz="1700" b="1">
+                <a:solidFill>
+                  <a:srgbClr val="0E1F33"/>
+                </a:solidFill>
+                <a:latin typeface="Source Serif 4"/>
+              </a:rPr>
+              <a:t>Mitron Tech &amp; Bills Elevate</a:t>
+            </a:r>
+          </a:p>
+          <a:p>
+            <a:pPr>
+              <a:lnSpc>
+                <a:spcPct val="120000"/>
+              </a:lnSpc>
+              <a:spcAft>
+                <a:spcPts val="1600"/>
+              </a:spcAft>
+            </a:pPr>
+            <a:r>
+              <a:rPr sz="1300" b="1">
                 <a:solidFill>
                   <a:srgbClr val="7A5A1E"/>
                 </a:solidFill>
                 <a:latin typeface="IBM Plex Sans"/>
               </a:rPr>
-              <a:t>01 — MASS MARKET</a:t>
-            </a:r>
-          </a:p>
-        </p:txBody>
-      </p:sp>
-      <p:sp>
-        <p:nvSpPr>
-          <p:cNvPr id="7" name="TextBox 6"/>
-          <p:cNvSpPr txBox="1"/>
-          <p:nvPr/>
-        </p:nvSpPr>
-        <p:spPr>
-          <a:xfrm>
-            <a:off x="7676" y="28765"/>
-            <a:ext cx="20701" cy="4445"/>
-          </a:xfrm>
-          <a:prstGeom prst="rect">
-            <a:avLst/>
-          </a:prstGeom>
-          <a:noFill/>
-        </p:spPr>
-        <p:txBody>
-          <a:bodyPr wrap="square" anchor="t" lIns="0" rIns="0" tIns="0" bIns="0">
-            <a:spAutoFit/>
-          </a:bodyPr>
-          <a:lstStyle/>
-          <a:p>
-            <a:pPr algn="l">
-              <a:lnSpc>
-                <a:spcPct val="115000"/>
-              </a:lnSpc>
-            </a:pPr>
-            <a:r>
-              <a:rPr sz="1900" b="1">
-                <a:solidFill>
-                  <a:srgbClr val="0E1F33"/>
-                </a:solidFill>
-                <a:latin typeface="Source Serif 4"/>
-              </a:rPr>
-              <a:t>Mitron Tech &amp; Bills Elevate</a:t>
-            </a:r>
-          </a:p>
-        </p:txBody>
-      </p:sp>
-      <p:sp>
-        <p:nvSpPr>
-          <p:cNvPr id="8" name="TextBox 7"/>
-          <p:cNvSpPr txBox="1"/>
-          <p:nvPr/>
-        </p:nvSpPr>
-        <p:spPr>
-          <a:xfrm>
-            <a:off x="7676" y="33020"/>
-            <a:ext cx="20701" cy="2222"/>
-          </a:xfrm>
-          <a:prstGeom prst="rect">
-            <a:avLst/>
-          </a:prstGeom>
-          <a:noFill/>
-        </p:spPr>
-        <p:txBody>
-          <a:bodyPr wrap="square" anchor="t" lIns="0" rIns="0" tIns="0" bIns="0">
-            <a:spAutoFit/>
-          </a:bodyPr>
-          <a:lstStyle/>
-          <a:p>
-            <a:pPr algn="l">
-              <a:lnSpc>
-                <a:spcPct val="115000"/>
-              </a:lnSpc>
-            </a:pPr>
-            <a:r>
-              <a:rPr sz="1300" b="1">
-                <a:solidFill>
-                  <a:srgbClr val="7A5A1E"/>
+              <a:t>Salaried IT &amp; metro professionals</a:t>
+            </a:r>
+          </a:p>
+          <a:p>
+            <a:pPr>
+              <a:lnSpc>
+                <a:spcPct val="140000"/>
+              </a:lnSpc>
+              <a:spcAft>
+                <a:spcPts val="0"/>
+              </a:spcAft>
+            </a:pPr>
+            <a:r>
+              <a:rPr sz="1300" b="0">
+                <a:solidFill>
+                  <a:srgbClr val="4A5568"/>
                 </a:solidFill>
                 <a:latin typeface="IBM Plex Sans"/>
               </a:rPr>
-              <a:t>Salaried IT &amp; metro professionals</a:t>
-            </a:r>
-          </a:p>
-        </p:txBody>
-      </p:sp>
-      <p:sp>
-        <p:nvSpPr>
-          <p:cNvPr id="9" name="Rectangle 8"/>
+              <a:t>5% cashback on bills &amp; subscriptions, 3% on electronics, zero annual fee with ₹1.5L spend waiver.</a:t>
+            </a:r>
+          </a:p>
+        </p:txBody>
+      </p:sp>
+      <p:sp>
+        <p:nvSpPr>
+          <p:cNvPr id="5" name="Rounded Rectangle 4"/>
           <p:cNvSpPr/>
           <p:nvPr/>
         </p:nvSpPr>
         <p:spPr>
           <a:xfrm>
-            <a:off x="7676" y="35560"/>
-            <a:ext cx="20447" cy="88"/>
-          </a:xfrm>
-          <a:prstGeom prst="rect">
-            <a:avLst/>
-          </a:prstGeom>
-          <a:solidFill>
-            <a:srgbClr val="E3DFD4"/>
-          </a:solidFill>
-          <a:ln>
-            <a:noFill/>
-          </a:ln>
-          <a:effectLst/>
-        </p:spPr>
-        <p:style>
-          <a:lnRef idx="1">
-            <a:schemeClr val="accent1"/>
-          </a:lnRef>
-          <a:fillRef idx="3">
-            <a:schemeClr val="accent1"/>
-          </a:fillRef>
-          <a:effectRef idx="2">
-            <a:schemeClr val="accent1"/>
-          </a:effectRef>
-          <a:fontRef idx="minor">
-            <a:schemeClr val="lt1"/>
-          </a:fontRef>
-        </p:style>
-        <p:txBody>
-          <a:bodyPr rtlCol="0" anchor="ctr"/>
-          <a:lstStyle/>
-          <a:p>
-            <a:pPr algn="ctr"/>
-          </a:p>
-        </p:txBody>
-      </p:sp>
-      <p:sp>
-        <p:nvSpPr>
-          <p:cNvPr id="10" name="TextBox 9"/>
-          <p:cNvSpPr txBox="1"/>
-          <p:nvPr/>
-        </p:nvSpPr>
-        <p:spPr>
-          <a:xfrm>
-            <a:off x="7676" y="36512"/>
-            <a:ext cx="20701" cy="5715"/>
-          </a:xfrm>
-          <a:prstGeom prst="rect">
-            <a:avLst/>
-          </a:prstGeom>
-          <a:noFill/>
-        </p:spPr>
-        <p:txBody>
-          <a:bodyPr wrap="square" anchor="t" lIns="0" rIns="0" tIns="0" bIns="0">
-            <a:spAutoFit/>
-          </a:bodyPr>
-          <a:lstStyle/>
-          <a:p>
-            <a:pPr algn="l">
-              <a:lnSpc>
-                <a:spcPct val="140000"/>
-              </a:lnSpc>
-            </a:pPr>
-            <a:r>
-              <a:rPr sz="1300" b="0">
-                <a:solidFill>
-                  <a:srgbClr val="4A5568"/>
-                </a:solidFill>
-                <a:latin typeface="IBM Plex Sans"/>
-              </a:rPr>
-              <a:t>5% cashback on bills &amp; subscriptions, 3% on electronics, zero annual fee with ₹1.5L spend waiver.</a:t>
-            </a:r>
-          </a:p>
-        </p:txBody>
-      </p:sp>
-      <p:sp>
-        <p:nvSpPr>
-          <p:cNvPr id="11" name="Rounded Rectangle 10"/>
-          <p:cNvSpPr/>
-          <p:nvPr/>
-        </p:nvSpPr>
-        <p:spPr>
-          <a:xfrm>
-            <a:off x="31933" y="24447"/>
-            <a:ext cx="24511" cy="18097"/>
+            <a:off x="4429658" y="3246120"/>
+            <a:ext cx="3332378" cy="2743200"/>
           </a:xfrm>
           <a:prstGeom prst="roundRect">
             <a:avLst>
@@ -9753,14 +9325,14 @@
       </p:sp>
       <p:sp>
         <p:nvSpPr>
-          <p:cNvPr id="12" name="TextBox 11"/>
+          <p:cNvPr id="6" name="TextBox 5"/>
           <p:cNvSpPr txBox="1"/>
           <p:nvPr/>
         </p:nvSpPr>
         <p:spPr>
           <a:xfrm>
-            <a:off x="33965" y="26352"/>
-            <a:ext cx="20701" cy="1905"/>
+            <a:off x="4703978" y="3502152"/>
+            <a:ext cx="2783738" cy="3081528"/>
           </a:xfrm>
           <a:prstGeom prst="rect">
             <a:avLst/>
@@ -9768,199 +9340,98 @@
           <a:noFill/>
         </p:spPr>
         <p:txBody>
-          <a:bodyPr wrap="square" anchor="t" lIns="0" rIns="0" tIns="0" bIns="0">
+          <a:bodyPr wrap="square" lIns="0" rIns="0" tIns="0" bIns="0">
             <a:spAutoFit/>
           </a:bodyPr>
           <a:lstStyle/>
           <a:p>
-            <a:pPr algn="l">
+            <a:pPr>
+              <a:lnSpc>
+                <a:spcPct val="100000"/>
+              </a:lnSpc>
+              <a:spcAft>
+                <a:spcPts val="1000"/>
+              </a:spcAft>
+            </a:pPr>
+            <a:r>
+              <a:rPr sz="1100" b="1" spc="100">
+                <a:solidFill>
+                  <a:srgbClr val="7A5A1E"/>
+                </a:solidFill>
+                <a:latin typeface="IBM Plex Sans"/>
+              </a:rPr>
+              <a:t>02 — MID-TIER VOLUME</a:t>
+            </a:r>
+          </a:p>
+          <a:p>
+            <a:pPr>
               <a:lnSpc>
                 <a:spcPct val="115000"/>
               </a:lnSpc>
-            </a:pPr>
-            <a:r>
-              <a:rPr sz="1100" b="1" spc="110">
+              <a:spcAft>
+                <a:spcPts val="800"/>
+              </a:spcAft>
+            </a:pPr>
+            <a:r>
+              <a:rPr sz="1700" b="1">
+                <a:solidFill>
+                  <a:srgbClr val="0E1F33"/>
+                </a:solidFill>
+                <a:latin typeface="Source Serif 4"/>
+              </a:rPr>
+              <a:t>Mitron Family &amp; Lifestyle Rewards</a:t>
+            </a:r>
+          </a:p>
+          <a:p>
+            <a:pPr>
+              <a:lnSpc>
+                <a:spcPct val="120000"/>
+              </a:lnSpc>
+              <a:spcAft>
+                <a:spcPts val="1600"/>
+              </a:spcAft>
+            </a:pPr>
+            <a:r>
+              <a:rPr sz="1300" b="1">
                 <a:solidFill>
                   <a:srgbClr val="7A5A1E"/>
                 </a:solidFill>
                 <a:latin typeface="IBM Plex Sans"/>
               </a:rPr>
-              <a:t>02 — MID-TIER VOLUME</a:t>
-            </a:r>
-          </a:p>
-        </p:txBody>
-      </p:sp>
-      <p:sp>
-        <p:nvSpPr>
-          <p:cNvPr id="13" name="TextBox 12"/>
-          <p:cNvSpPr txBox="1"/>
-          <p:nvPr/>
-        </p:nvSpPr>
-        <p:spPr>
-          <a:xfrm>
-            <a:off x="33965" y="28765"/>
-            <a:ext cx="20701" cy="4445"/>
-          </a:xfrm>
-          <a:prstGeom prst="rect">
-            <a:avLst/>
-          </a:prstGeom>
-          <a:noFill/>
-        </p:spPr>
-        <p:txBody>
-          <a:bodyPr wrap="square" anchor="t" lIns="0" rIns="0" tIns="0" bIns="0">
-            <a:spAutoFit/>
-          </a:bodyPr>
-          <a:lstStyle/>
-          <a:p>
-            <a:pPr algn="l">
-              <a:lnSpc>
-                <a:spcPct val="115000"/>
-              </a:lnSpc>
-            </a:pPr>
-            <a:r>
-              <a:rPr sz="1900" b="1">
-                <a:solidFill>
-                  <a:srgbClr val="0E1F33"/>
-                </a:solidFill>
-                <a:latin typeface="Source Serif 4"/>
-              </a:rPr>
-              <a:t>Mitron Family &amp; Lifestyle Rewards</a:t>
-            </a:r>
-          </a:p>
-        </p:txBody>
-      </p:sp>
-      <p:sp>
-        <p:nvSpPr>
-          <p:cNvPr id="14" name="TextBox 13"/>
-          <p:cNvSpPr txBox="1"/>
-          <p:nvPr/>
-        </p:nvSpPr>
-        <p:spPr>
-          <a:xfrm>
-            <a:off x="33965" y="33020"/>
-            <a:ext cx="20701" cy="2222"/>
-          </a:xfrm>
-          <a:prstGeom prst="rect">
-            <a:avLst/>
-          </a:prstGeom>
-          <a:noFill/>
-        </p:spPr>
-        <p:txBody>
-          <a:bodyPr wrap="square" anchor="t" lIns="0" rIns="0" tIns="0" bIns="0">
-            <a:spAutoFit/>
-          </a:bodyPr>
-          <a:lstStyle/>
-          <a:p>
-            <a:pPr algn="l">
-              <a:lnSpc>
-                <a:spcPct val="115000"/>
-              </a:lnSpc>
-            </a:pPr>
-            <a:r>
-              <a:rPr sz="1300" b="1">
-                <a:solidFill>
-                  <a:srgbClr val="7A5A1E"/>
+              <a:t>Age 35–45, Middle Class households</a:t>
+            </a:r>
+          </a:p>
+          <a:p>
+            <a:pPr>
+              <a:lnSpc>
+                <a:spcPct val="140000"/>
+              </a:lnSpc>
+              <a:spcAft>
+                <a:spcPts val="0"/>
+              </a:spcAft>
+            </a:pPr>
+            <a:r>
+              <a:rPr sz="1300" b="0">
+                <a:solidFill>
+                  <a:srgbClr val="4A5568"/>
                 </a:solidFill>
                 <a:latin typeface="IBM Plex Sans"/>
               </a:rPr>
-              <a:t>Age 35–45, Middle Class households</a:t>
-            </a:r>
-          </a:p>
-        </p:txBody>
-      </p:sp>
-      <p:sp>
-        <p:nvSpPr>
-          <p:cNvPr id="15" name="Rectangle 14"/>
+              <a:t>4% on groceries, 2 lounge visits per quarter, fuel surcharge waiver nationwide.</a:t>
+            </a:r>
+          </a:p>
+        </p:txBody>
+      </p:sp>
+      <p:sp>
+        <p:nvSpPr>
+          <p:cNvPr id="7" name="Rounded Rectangle 6"/>
           <p:cNvSpPr/>
           <p:nvPr/>
         </p:nvSpPr>
         <p:spPr>
           <a:xfrm>
-            <a:off x="33965" y="35560"/>
-            <a:ext cx="20447" cy="88"/>
-          </a:xfrm>
-          <a:prstGeom prst="rect">
-            <a:avLst/>
-          </a:prstGeom>
-          <a:solidFill>
-            <a:srgbClr val="E3DFD4"/>
-          </a:solidFill>
-          <a:ln>
-            <a:noFill/>
-          </a:ln>
-          <a:effectLst/>
-        </p:spPr>
-        <p:style>
-          <a:lnRef idx="1">
-            <a:schemeClr val="accent1"/>
-          </a:lnRef>
-          <a:fillRef idx="3">
-            <a:schemeClr val="accent1"/>
-          </a:fillRef>
-          <a:effectRef idx="2">
-            <a:schemeClr val="accent1"/>
-          </a:effectRef>
-          <a:fontRef idx="minor">
-            <a:schemeClr val="lt1"/>
-          </a:fontRef>
-        </p:style>
-        <p:txBody>
-          <a:bodyPr rtlCol="0" anchor="ctr"/>
-          <a:lstStyle/>
-          <a:p>
-            <a:pPr algn="ctr"/>
-          </a:p>
-        </p:txBody>
-      </p:sp>
-      <p:sp>
-        <p:nvSpPr>
-          <p:cNvPr id="16" name="TextBox 15"/>
-          <p:cNvSpPr txBox="1"/>
-          <p:nvPr/>
-        </p:nvSpPr>
-        <p:spPr>
-          <a:xfrm>
-            <a:off x="33965" y="36512"/>
-            <a:ext cx="20701" cy="5715"/>
-          </a:xfrm>
-          <a:prstGeom prst="rect">
-            <a:avLst/>
-          </a:prstGeom>
-          <a:noFill/>
-        </p:spPr>
-        <p:txBody>
-          <a:bodyPr wrap="square" anchor="t" lIns="0" rIns="0" tIns="0" bIns="0">
-            <a:spAutoFit/>
-          </a:bodyPr>
-          <a:lstStyle/>
-          <a:p>
-            <a:pPr algn="l">
-              <a:lnSpc>
-                <a:spcPct val="140000"/>
-              </a:lnSpc>
-            </a:pPr>
-            <a:r>
-              <a:rPr sz="1300" b="0">
-                <a:solidFill>
-                  <a:srgbClr val="4A5568"/>
-                </a:solidFill>
-                <a:latin typeface="IBM Plex Sans"/>
-              </a:rPr>
-              <a:t>4% on groceries, 2 lounge visits per quarter, fuel surcharge waiver nationwide.</a:t>
-            </a:r>
-          </a:p>
-        </p:txBody>
-      </p:sp>
-      <p:sp>
-        <p:nvSpPr>
-          <p:cNvPr id="17" name="Rounded Rectangle 16"/>
-          <p:cNvSpPr/>
-          <p:nvPr/>
-        </p:nvSpPr>
-        <p:spPr>
-          <a:xfrm>
-            <a:off x="58222" y="24447"/>
-            <a:ext cx="24511" cy="18097"/>
+            <a:off x="8036356" y="3246120"/>
+            <a:ext cx="3332378" cy="2743200"/>
           </a:xfrm>
           <a:prstGeom prst="roundRect">
             <a:avLst>
@@ -9999,14 +9470,113 @@
       </p:sp>
       <p:sp>
         <p:nvSpPr>
-          <p:cNvPr id="18" name="TextBox 17"/>
+          <p:cNvPr id="8" name="TextBox 7"/>
           <p:cNvSpPr txBox="1"/>
           <p:nvPr/>
         </p:nvSpPr>
         <p:spPr>
           <a:xfrm>
-            <a:off x="60254" y="26352"/>
-            <a:ext cx="20701" cy="1905"/>
+            <a:off x="8310676" y="3502152"/>
+            <a:ext cx="2783738" cy="3081528"/>
+          </a:xfrm>
+          <a:prstGeom prst="rect">
+            <a:avLst/>
+          </a:prstGeom>
+          <a:noFill/>
+        </p:spPr>
+        <p:txBody>
+          <a:bodyPr wrap="square" lIns="0" rIns="0" tIns="0" bIns="0">
+            <a:spAutoFit/>
+          </a:bodyPr>
+          <a:lstStyle/>
+          <a:p>
+            <a:pPr>
+              <a:lnSpc>
+                <a:spcPct val="100000"/>
+              </a:lnSpc>
+              <a:spcAft>
+                <a:spcPts val="1000"/>
+              </a:spcAft>
+            </a:pPr>
+            <a:r>
+              <a:rPr sz="1100" b="1" spc="100">
+                <a:solidFill>
+                  <a:srgbClr val="D9A857"/>
+                </a:solidFill>
+                <a:latin typeface="IBM Plex Sans"/>
+              </a:rPr>
+              <a:t>03 — HIGH-MARGIN PREMIUM</a:t>
+            </a:r>
+          </a:p>
+          <a:p>
+            <a:pPr>
+              <a:lnSpc>
+                <a:spcPct val="115000"/>
+              </a:lnSpc>
+              <a:spcAft>
+                <a:spcPts val="800"/>
+              </a:spcAft>
+            </a:pPr>
+            <a:r>
+              <a:rPr sz="1700" b="1">
+                <a:solidFill>
+                  <a:srgbClr val="F8F6F1"/>
+                </a:solidFill>
+                <a:latin typeface="Source Serif 4"/>
+              </a:rPr>
+              <a:t>Mitron Privé Elite</a:t>
+            </a:r>
+          </a:p>
+          <a:p>
+            <a:pPr>
+              <a:lnSpc>
+                <a:spcPct val="120000"/>
+              </a:lnSpc>
+              <a:spcAft>
+                <a:spcPts val="1600"/>
+              </a:spcAft>
+            </a:pPr>
+            <a:r>
+              <a:rPr sz="1300" b="1">
+                <a:solidFill>
+                  <a:srgbClr val="D9A857"/>
+                </a:solidFill>
+                <a:latin typeface="IBM Plex Sans"/>
+              </a:rPr>
+              <a:t>Upper Class &amp; business owners</a:t>
+            </a:r>
+          </a:p>
+          <a:p>
+            <a:pPr>
+              <a:lnSpc>
+                <a:spcPct val="140000"/>
+              </a:lnSpc>
+              <a:spcAft>
+                <a:spcPts val="0"/>
+              </a:spcAft>
+            </a:pPr>
+            <a:r>
+              <a:rPr sz="1300" b="0">
+                <a:solidFill>
+                  <a:srgbClr val="B9C2D6"/>
+                </a:solidFill>
+                <a:latin typeface="IBM Plex Sans"/>
+              </a:rPr>
+              <a:t>2x points on travel, dining &amp; wellness, 1.5% forex markup, concierge &amp; golf access.</a:t>
+            </a:r>
+          </a:p>
+        </p:txBody>
+      </p:sp>
+      <p:sp>
+        <p:nvSpPr>
+          <p:cNvPr id="9" name="TextBox 8"/>
+          <p:cNvSpPr txBox="1"/>
+          <p:nvPr/>
+        </p:nvSpPr>
+        <p:spPr>
+          <a:xfrm>
+            <a:off x="822960" y="6419088"/>
+            <a:ext cx="8686800" cy="274320"/>
           </a:xfrm>
           <a:prstGeom prst="rect">
             <a:avLst/>
@@ -10025,27 +9595,27 @@
               </a:lnSpc>
             </a:pPr>
             <a:r>
-              <a:rPr sz="1100" b="1" spc="110">
-                <a:solidFill>
-                  <a:srgbClr val="D9A857"/>
+              <a:rPr sz="1100" b="0" i="0">
+                <a:solidFill>
+                  <a:srgbClr val="6A7179"/>
                 </a:solidFill>
                 <a:latin typeface="IBM Plex Sans"/>
               </a:rPr>
-              <a:t>03 — HIGH-MARGIN PREMIUM</a:t>
-            </a:r>
-          </a:p>
-        </p:txBody>
-      </p:sp>
-      <p:sp>
-        <p:nvSpPr>
-          <p:cNvPr id="19" name="TextBox 18"/>
+              <a:t>Source: Product Feature Recommendations, PROJECT_REPORT.md §3</a:t>
+            </a:r>
+          </a:p>
+        </p:txBody>
+      </p:sp>
+      <p:sp>
+        <p:nvSpPr>
+          <p:cNvPr id="10" name="TextBox 9"/>
           <p:cNvSpPr txBox="1"/>
           <p:nvPr/>
         </p:nvSpPr>
         <p:spPr>
           <a:xfrm>
-            <a:off x="60254" y="28765"/>
-            <a:ext cx="20701" cy="4445"/>
+            <a:off x="10454335" y="6419088"/>
+            <a:ext cx="914400" cy="274320"/>
           </a:xfrm>
           <a:prstGeom prst="rect">
             <a:avLst/>
@@ -10058,213 +9628,13 @@
           </a:bodyPr>
           <a:lstStyle/>
           <a:p>
-            <a:pPr algn="l">
+            <a:pPr algn="r">
               <a:lnSpc>
                 <a:spcPct val="115000"/>
               </a:lnSpc>
             </a:pPr>
             <a:r>
-              <a:rPr sz="1900" b="1">
-                <a:solidFill>
-                  <a:srgbClr val="F8F6F1"/>
-                </a:solidFill>
-                <a:latin typeface="Source Serif 4"/>
-              </a:rPr>
-              <a:t>Mitron Privé Elite</a:t>
-            </a:r>
-          </a:p>
-        </p:txBody>
-      </p:sp>
-      <p:sp>
-        <p:nvSpPr>
-          <p:cNvPr id="20" name="TextBox 19"/>
-          <p:cNvSpPr txBox="1"/>
-          <p:nvPr/>
-        </p:nvSpPr>
-        <p:spPr>
-          <a:xfrm>
-            <a:off x="60254" y="33020"/>
-            <a:ext cx="20701" cy="2222"/>
-          </a:xfrm>
-          <a:prstGeom prst="rect">
-            <a:avLst/>
-          </a:prstGeom>
-          <a:noFill/>
-        </p:spPr>
-        <p:txBody>
-          <a:bodyPr wrap="square" anchor="t" lIns="0" rIns="0" tIns="0" bIns="0">
-            <a:spAutoFit/>
-          </a:bodyPr>
-          <a:lstStyle/>
-          <a:p>
-            <a:pPr algn="l">
-              <a:lnSpc>
-                <a:spcPct val="115000"/>
-              </a:lnSpc>
-            </a:pPr>
-            <a:r>
-              <a:rPr sz="1300" b="1">
-                <a:solidFill>
-                  <a:srgbClr val="D9A857"/>
-                </a:solidFill>
-                <a:latin typeface="IBM Plex Sans"/>
-              </a:rPr>
-              <a:t>Upper Class &amp; business owners</a:t>
-            </a:r>
-          </a:p>
-        </p:txBody>
-      </p:sp>
-      <p:sp>
-        <p:nvSpPr>
-          <p:cNvPr id="21" name="Rectangle 20"/>
-          <p:cNvSpPr/>
-          <p:nvPr/>
-        </p:nvSpPr>
-        <p:spPr>
-          <a:xfrm>
-            <a:off x="60254" y="35560"/>
-            <a:ext cx="20447" cy="88"/>
-          </a:xfrm>
-          <a:prstGeom prst="rect">
-            <a:avLst/>
-          </a:prstGeom>
-          <a:solidFill>
-            <a:srgbClr val="2A3F58"/>
-          </a:solidFill>
-          <a:ln>
-            <a:noFill/>
-          </a:ln>
-          <a:effectLst/>
-        </p:spPr>
-        <p:style>
-          <a:lnRef idx="1">
-            <a:schemeClr val="accent1"/>
-          </a:lnRef>
-          <a:fillRef idx="3">
-            <a:schemeClr val="accent1"/>
-          </a:fillRef>
-          <a:effectRef idx="2">
-            <a:schemeClr val="accent1"/>
-          </a:effectRef>
-          <a:fontRef idx="minor">
-            <a:schemeClr val="lt1"/>
-          </a:fontRef>
-        </p:style>
-        <p:txBody>
-          <a:bodyPr rtlCol="0" anchor="ctr"/>
-          <a:lstStyle/>
-          <a:p>
-            <a:pPr algn="ctr"/>
-          </a:p>
-        </p:txBody>
-      </p:sp>
-      <p:sp>
-        <p:nvSpPr>
-          <p:cNvPr id="22" name="TextBox 21"/>
-          <p:cNvSpPr txBox="1"/>
-          <p:nvPr/>
-        </p:nvSpPr>
-        <p:spPr>
-          <a:xfrm>
-            <a:off x="60254" y="36512"/>
-            <a:ext cx="20701" cy="5715"/>
-          </a:xfrm>
-          <a:prstGeom prst="rect">
-            <a:avLst/>
-          </a:prstGeom>
-          <a:noFill/>
-        </p:spPr>
-        <p:txBody>
-          <a:bodyPr wrap="square" anchor="t" lIns="0" rIns="0" tIns="0" bIns="0">
-            <a:spAutoFit/>
-          </a:bodyPr>
-          <a:lstStyle/>
-          <a:p>
-            <a:pPr algn="l">
-              <a:lnSpc>
-                <a:spcPct val="140000"/>
-              </a:lnSpc>
-            </a:pPr>
-            <a:r>
-              <a:rPr sz="1300" b="0">
-                <a:solidFill>
-                  <a:srgbClr val="B9C2D6"/>
-                </a:solidFill>
-                <a:latin typeface="IBM Plex Sans"/>
-              </a:rPr>
-              <a:t>2x points on travel, dining &amp; wellness, 1.5% forex markup, concierge &amp; golf access.</a:t>
-            </a:r>
-          </a:p>
-        </p:txBody>
-      </p:sp>
-      <p:sp>
-        <p:nvSpPr>
-          <p:cNvPr id="23" name="TextBox 22"/>
-          <p:cNvSpPr txBox="1"/>
-          <p:nvPr/>
-        </p:nvSpPr>
-        <p:spPr>
-          <a:xfrm>
-            <a:off x="812800" y="6451600"/>
-            <a:ext cx="6350000" cy="190500"/>
-          </a:xfrm>
-          <a:prstGeom prst="rect">
-            <a:avLst/>
-          </a:prstGeom>
-          <a:noFill/>
-        </p:spPr>
-        <p:txBody>
-          <a:bodyPr wrap="square" anchor="t" lIns="0" rIns="0" tIns="0" bIns="0">
-            <a:spAutoFit/>
-          </a:bodyPr>
-          <a:lstStyle/>
-          <a:p>
-            <a:pPr algn="l">
-              <a:lnSpc>
-                <a:spcPct val="115000"/>
-              </a:lnSpc>
-            </a:pPr>
-            <a:r>
-              <a:rPr sz="1100" b="0">
-                <a:solidFill>
-                  <a:srgbClr val="6A7179"/>
-                </a:solidFill>
-                <a:latin typeface="IBM Plex Sans"/>
-              </a:rPr>
-              <a:t>Source: Product Feature Recommendations, PROJECT_REPORT.md §3</a:t>
-            </a:r>
-          </a:p>
-        </p:txBody>
-      </p:sp>
-      <p:sp>
-        <p:nvSpPr>
-          <p:cNvPr id="24" name="TextBox 23"/>
-          <p:cNvSpPr txBox="1"/>
-          <p:nvPr/>
-        </p:nvSpPr>
-        <p:spPr>
-          <a:xfrm>
-            <a:off x="10541000" y="6451600"/>
-            <a:ext cx="838200" cy="190500"/>
-          </a:xfrm>
-          <a:prstGeom prst="rect">
-            <a:avLst/>
-          </a:prstGeom>
-          <a:noFill/>
-        </p:spPr>
-        <p:txBody>
-          <a:bodyPr wrap="square" anchor="t" lIns="0" rIns="0" tIns="0" bIns="0">
-            <a:spAutoFit/>
-          </a:bodyPr>
-          <a:lstStyle/>
-          <a:p>
-            <a:pPr algn="r">
-              <a:lnSpc>
-                <a:spcPct val="115000"/>
-              </a:lnSpc>
-            </a:pPr>
-            <a:r>
-              <a:rPr sz="1100" b="0">
+              <a:rPr sz="1100" b="0" i="0">
                 <a:solidFill>
                   <a:srgbClr val="6A7179"/>
                 </a:solidFill>
@@ -10309,8 +9679,8 @@
         </p:nvSpPr>
         <p:spPr>
           <a:xfrm>
-            <a:off x="812800" y="812800"/>
-            <a:ext cx="5715000" cy="190500"/>
+            <a:off x="822960" y="777240"/>
+            <a:ext cx="9692640" cy="5806440"/>
           </a:xfrm>
           <a:prstGeom prst="rect">
             <a:avLst/>
@@ -10318,57 +9688,40 @@
           <a:noFill/>
         </p:spPr>
         <p:txBody>
-          <a:bodyPr wrap="square" anchor="t" lIns="0" rIns="0" tIns="0" bIns="0">
+          <a:bodyPr wrap="square" lIns="0" rIns="0" tIns="0" bIns="0">
             <a:spAutoFit/>
           </a:bodyPr>
           <a:lstStyle/>
           <a:p>
-            <a:pPr algn="l">
+            <a:pPr>
+              <a:lnSpc>
+                <a:spcPct val="100000"/>
+              </a:lnSpc>
+              <a:spcAft>
+                <a:spcPts val="1000"/>
+              </a:spcAft>
+            </a:pPr>
+            <a:r>
+              <a:rPr sz="1200" b="1" spc="120">
+                <a:solidFill>
+                  <a:srgbClr val="7A5A1E"/>
+                </a:solidFill>
+                <a:latin typeface="IBM Plex Sans"/>
+              </a:rPr>
+              <a:t>AT A GLANCE</a:t>
+            </a:r>
+          </a:p>
+          <a:p>
+            <a:pPr>
               <a:lnSpc>
                 <a:spcPct val="115000"/>
               </a:lnSpc>
-            </a:pPr>
-            <a:r>
-              <a:rPr sz="1200" b="1" spc="120">
-                <a:solidFill>
-                  <a:srgbClr val="7A5A1E"/>
-                </a:solidFill>
-                <a:latin typeface="IBM Plex Sans"/>
-              </a:rPr>
-              <a:t>AT A GLANCE</a:t>
-            </a:r>
-          </a:p>
-        </p:txBody>
-      </p:sp>
-      <p:sp>
-        <p:nvSpPr>
-          <p:cNvPr id="3" name="TextBox 2"/>
-          <p:cNvSpPr txBox="1"/>
-          <p:nvPr/>
-        </p:nvSpPr>
-        <p:spPr>
-          <a:xfrm>
-            <a:off x="812800" y="1066800"/>
-            <a:ext cx="9525000" cy="635000"/>
-          </a:xfrm>
-          <a:prstGeom prst="rect">
-            <a:avLst/>
-          </a:prstGeom>
-          <a:noFill/>
-        </p:spPr>
-        <p:txBody>
-          <a:bodyPr wrap="square" anchor="t" lIns="0" rIns="0" tIns="0" bIns="0">
-            <a:spAutoFit/>
-          </a:bodyPr>
-          <a:lstStyle/>
-          <a:p>
-            <a:pPr algn="l">
-              <a:lnSpc>
-                <a:spcPct val="115000"/>
-              </a:lnSpc>
-            </a:pPr>
-            <a:r>
-              <a:rPr sz="3200" b="0">
+              <a:spcAft>
+                <a:spcPts val="1200"/>
+              </a:spcAft>
+            </a:pPr>
+            <a:r>
+              <a:rPr sz="3000" b="0">
                 <a:solidFill>
                   <a:srgbClr val="0E1F33"/>
                 </a:solidFill>
@@ -10381,15 +9734,15 @@
       </p:sp>
       <p:graphicFrame>
         <p:nvGraphicFramePr>
-          <p:cNvPr id="4" name="Table 3"/>
+          <p:cNvPr id="3" name="Table 2"/>
           <p:cNvGraphicFramePr>
             <a:graphicFrameLocks noGrp="1"/>
           </p:cNvGraphicFramePr>
           <p:nvPr/>
         </p:nvGraphicFramePr>
         <p:xfrm>
-          <a:off x="5644" y="22225"/>
-          <a:ext cx="74611" cy="3017520"/>
+          <a:off x="822960" y="3246120"/>
+          <a:ext cx="10545774" cy="3291839"/>
         </p:xfrm>
         <a:graphic>
           <a:graphicData uri="http://schemas.openxmlformats.org/drawingml/2006/table">
@@ -10398,12 +9751,12 @@
                 <a:tableStyleId>{5C22544A-7EE6-4342-B048-85BDC9FD1C3A}</a:tableStyleId>
               </a:tblPr>
               <a:tblGrid>
-                <a:gridCol w="14176"/>
-                <a:gridCol w="20145"/>
-                <a:gridCol w="20145"/>
-                <a:gridCol w="20145"/>
+                <a:gridCol w="2003697"/>
+                <a:gridCol w="2847359"/>
+                <a:gridCol w="2847359"/>
+                <a:gridCol w="2847359"/>
               </a:tblGrid>
-              <a:tr h="603504">
+              <a:tr h="658367">
                 <a:tc>
                   <a:txBody>
                     <a:bodyPr wrap="square"/>
@@ -10420,7 +9773,7 @@
                       </a:r>
                     </a:p>
                   </a:txBody>
-                  <a:tcPr marL="152400" marR="152400" marT="88900" marB="88900" anchor="ctr">
+                  <a:tcPr marL="146304" marR="146304" marT="91440" marB="91440" anchor="ctr">
                     <a:solidFill>
                       <a:srgbClr val="0E1F33"/>
                     </a:solidFill>
@@ -10442,7 +9795,7 @@
                       </a:r>
                     </a:p>
                   </a:txBody>
-                  <a:tcPr marL="152400" marR="152400" marT="88900" marB="88900" anchor="ctr">
+                  <a:tcPr marL="146304" marR="146304" marT="91440" marB="91440" anchor="ctr">
                     <a:solidFill>
                       <a:srgbClr val="0E1F33"/>
                     </a:solidFill>
@@ -10464,7 +9817,7 @@
                       </a:r>
                     </a:p>
                   </a:txBody>
-                  <a:tcPr marL="152400" marR="152400" marT="88900" marB="88900" anchor="ctr">
+                  <a:tcPr marL="146304" marR="146304" marT="91440" marB="91440" anchor="ctr">
                     <a:solidFill>
                       <a:srgbClr val="0E1F33"/>
                     </a:solidFill>
@@ -10486,14 +9839,14 @@
                       </a:r>
                     </a:p>
                   </a:txBody>
-                  <a:tcPr marL="152400" marR="152400" marT="88900" marB="88900" anchor="ctr">
+                  <a:tcPr marL="146304" marR="146304" marT="91440" marB="91440" anchor="ctr">
                     <a:solidFill>
                       <a:srgbClr val="0E1F33"/>
                     </a:solidFill>
                   </a:tcPr>
                 </a:tc>
               </a:tr>
-              <a:tr h="603504">
+              <a:tr h="658367">
                 <a:tc>
                   <a:txBody>
                     <a:bodyPr wrap="square"/>
@@ -10510,7 +9863,7 @@
                       </a:r>
                     </a:p>
                   </a:txBody>
-                  <a:tcPr marL="152400" marR="152400" marT="76200" marB="76200" anchor="ctr">
+                  <a:tcPr marL="146304" marR="146304" marT="73152" marB="73152" anchor="ctr">
                     <a:solidFill>
                       <a:srgbClr val="FFFFFF"/>
                     </a:solidFill>
@@ -10532,7 +9885,7 @@
                       </a:r>
                     </a:p>
                   </a:txBody>
-                  <a:tcPr marL="152400" marR="152400" marT="76200" marB="76200" anchor="ctr">
+                  <a:tcPr marL="146304" marR="146304" marT="73152" marB="73152" anchor="ctr">
                     <a:solidFill>
                       <a:srgbClr val="FFFFFF"/>
                     </a:solidFill>
@@ -10554,7 +9907,7 @@
                       </a:r>
                     </a:p>
                   </a:txBody>
-                  <a:tcPr marL="152400" marR="152400" marT="76200" marB="76200" anchor="ctr">
+                  <a:tcPr marL="146304" marR="146304" marT="73152" marB="73152" anchor="ctr">
                     <a:solidFill>
                       <a:srgbClr val="FFFFFF"/>
                     </a:solidFill>
@@ -10576,14 +9929,14 @@
                       </a:r>
                     </a:p>
                   </a:txBody>
-                  <a:tcPr marL="152400" marR="152400" marT="76200" marB="76200" anchor="ctr">
+                  <a:tcPr marL="146304" marR="146304" marT="73152" marB="73152" anchor="ctr">
                     <a:solidFill>
                       <a:srgbClr val="FFFFFF"/>
                     </a:solidFill>
                   </a:tcPr>
                 </a:tc>
               </a:tr>
-              <a:tr h="603504">
+              <a:tr h="658367">
                 <a:tc>
                   <a:txBody>
                     <a:bodyPr wrap="square"/>
@@ -10600,7 +9953,7 @@
                       </a:r>
                     </a:p>
                   </a:txBody>
-                  <a:tcPr marL="152400" marR="152400" marT="76200" marB="76200" anchor="ctr">
+                  <a:tcPr marL="146304" marR="146304" marT="73152" marB="73152" anchor="ctr">
                     <a:solidFill>
                       <a:srgbClr val="F1EEE4"/>
                     </a:solidFill>
@@ -10622,7 +9975,7 @@
                       </a:r>
                     </a:p>
                   </a:txBody>
-                  <a:tcPr marL="152400" marR="152400" marT="76200" marB="76200" anchor="ctr">
+                  <a:tcPr marL="146304" marR="146304" marT="73152" marB="73152" anchor="ctr">
                     <a:solidFill>
                       <a:srgbClr val="F1EEE4"/>
                     </a:solidFill>
@@ -10644,7 +9997,7 @@
                       </a:r>
                     </a:p>
                   </a:txBody>
-                  <a:tcPr marL="152400" marR="152400" marT="76200" marB="76200" anchor="ctr">
+                  <a:tcPr marL="146304" marR="146304" marT="73152" marB="73152" anchor="ctr">
                     <a:solidFill>
                       <a:srgbClr val="F1EEE4"/>
                     </a:solidFill>
@@ -10666,14 +10019,14 @@
                       </a:r>
                     </a:p>
                   </a:txBody>
-                  <a:tcPr marL="152400" marR="152400" marT="76200" marB="76200" anchor="ctr">
+                  <a:tcPr marL="146304" marR="146304" marT="73152" marB="73152" anchor="ctr">
                     <a:solidFill>
                       <a:srgbClr val="F1EEE4"/>
                     </a:solidFill>
                   </a:tcPr>
                 </a:tc>
               </a:tr>
-              <a:tr h="603504">
+              <a:tr h="658367">
                 <a:tc>
                   <a:txBody>
                     <a:bodyPr wrap="square"/>
@@ -10690,7 +10043,7 @@
                       </a:r>
                     </a:p>
                   </a:txBody>
-                  <a:tcPr marL="152400" marR="152400" marT="76200" marB="76200" anchor="ctr">
+                  <a:tcPr marL="146304" marR="146304" marT="73152" marB="73152" anchor="ctr">
                     <a:solidFill>
                       <a:srgbClr val="FFFFFF"/>
                     </a:solidFill>
@@ -10712,7 +10065,7 @@
                       </a:r>
                     </a:p>
                   </a:txBody>
-                  <a:tcPr marL="152400" marR="152400" marT="76200" marB="76200" anchor="ctr">
+                  <a:tcPr marL="146304" marR="146304" marT="73152" marB="73152" anchor="ctr">
                     <a:solidFill>
                       <a:srgbClr val="FFFFFF"/>
                     </a:solidFill>
@@ -10734,7 +10087,7 @@
                       </a:r>
                     </a:p>
                   </a:txBody>
-                  <a:tcPr marL="152400" marR="152400" marT="76200" marB="76200" anchor="ctr">
+                  <a:tcPr marL="146304" marR="146304" marT="73152" marB="73152" anchor="ctr">
                     <a:solidFill>
                       <a:srgbClr val="FFFFFF"/>
                     </a:solidFill>
@@ -10756,14 +10109,14 @@
                       </a:r>
                     </a:p>
                   </a:txBody>
-                  <a:tcPr marL="152400" marR="152400" marT="76200" marB="76200" anchor="ctr">
+                  <a:tcPr marL="146304" marR="146304" marT="73152" marB="73152" anchor="ctr">
                     <a:solidFill>
                       <a:srgbClr val="FFFFFF"/>
                     </a:solidFill>
                   </a:tcPr>
                 </a:tc>
               </a:tr>
-              <a:tr h="603504">
+              <a:tr h="658371">
                 <a:tc>
                   <a:txBody>
                     <a:bodyPr wrap="square"/>
@@ -10780,7 +10133,7 @@
                       </a:r>
                     </a:p>
                   </a:txBody>
-                  <a:tcPr marL="152400" marR="152400" marT="76200" marB="76200" anchor="ctr">
+                  <a:tcPr marL="146304" marR="146304" marT="73152" marB="73152" anchor="ctr">
                     <a:solidFill>
                       <a:srgbClr val="F1EEE4"/>
                     </a:solidFill>
@@ -10802,7 +10155,7 @@
                       </a:r>
                     </a:p>
                   </a:txBody>
-                  <a:tcPr marL="152400" marR="152400" marT="76200" marB="76200" anchor="ctr">
+                  <a:tcPr marL="146304" marR="146304" marT="73152" marB="73152" anchor="ctr">
                     <a:solidFill>
                       <a:srgbClr val="F1EEE4"/>
                     </a:solidFill>
@@ -10824,7 +10177,7 @@
                       </a:r>
                     </a:p>
                   </a:txBody>
-                  <a:tcPr marL="152400" marR="152400" marT="76200" marB="76200" anchor="ctr">
+                  <a:tcPr marL="146304" marR="146304" marT="73152" marB="73152" anchor="ctr">
                     <a:solidFill>
                       <a:srgbClr val="F1EEE4"/>
                     </a:solidFill>
@@ -10846,7 +10199,7 @@
                       </a:r>
                     </a:p>
                   </a:txBody>
-                  <a:tcPr marL="152400" marR="152400" marT="76200" marB="76200" anchor="ctr">
+                  <a:tcPr marL="146304" marR="146304" marT="73152" marB="73152" anchor="ctr">
                     <a:solidFill>
                       <a:srgbClr val="F1EEE4"/>
                     </a:solidFill>
@@ -10859,14 +10212,14 @@
       </p:graphicFrame>
       <p:sp>
         <p:nvSpPr>
-          <p:cNvPr id="5" name="TextBox 4"/>
+          <p:cNvPr id="4" name="TextBox 3"/>
           <p:cNvSpPr txBox="1"/>
           <p:nvPr/>
         </p:nvSpPr>
         <p:spPr>
           <a:xfrm>
-            <a:off x="812800" y="6451600"/>
-            <a:ext cx="6350000" cy="190500"/>
+            <a:off x="822960" y="6419088"/>
+            <a:ext cx="8686800" cy="274320"/>
           </a:xfrm>
           <a:prstGeom prst="rect">
             <a:avLst/>
@@ -10885,7 +10238,7 @@
               </a:lnSpc>
             </a:pPr>
             <a:r>
-              <a:rPr sz="1100" b="0">
+              <a:rPr sz="1100" b="0" i="0">
                 <a:solidFill>
                   <a:srgbClr val="6A7179"/>
                 </a:solidFill>
@@ -10898,14 +10251,14 @@
       </p:sp>
       <p:sp>
         <p:nvSpPr>
-          <p:cNvPr id="6" name="TextBox 5"/>
+          <p:cNvPr id="5" name="TextBox 4"/>
           <p:cNvSpPr txBox="1"/>
           <p:nvPr/>
         </p:nvSpPr>
         <p:spPr>
           <a:xfrm>
-            <a:off x="10541000" y="6451600"/>
-            <a:ext cx="838200" cy="190500"/>
+            <a:off x="10454335" y="6419088"/>
+            <a:ext cx="914400" cy="274320"/>
           </a:xfrm>
           <a:prstGeom prst="rect">
             <a:avLst/>
@@ -10924,7 +10277,7 @@
               </a:lnSpc>
             </a:pPr>
             <a:r>
-              <a:rPr sz="1100" b="0">
+              <a:rPr sz="1100" b="0" i="0">
                 <a:solidFill>
                   <a:srgbClr val="6A7179"/>
                 </a:solidFill>

--- a/presentation/Mitron_Bank_Credit_Card_Launch_Strategy.pptx
+++ b/presentation/Mitron_Bank_Credit_Card_Launch_Strategy.pptx
@@ -3360,7 +3360,7 @@
         <p:spPr>
           <a:xfrm>
             <a:off x="822960" y="3246120"/>
-            <a:ext cx="10545775" cy="914400"/>
+            <a:ext cx="10545775" cy="822960"/>
           </a:xfrm>
           <a:prstGeom prst="roundRect">
             <a:avLst>
@@ -3407,7 +3407,7 @@
         </p:nvSpPr>
         <p:spPr>
           <a:xfrm>
-            <a:off x="1097280" y="3474720"/>
+            <a:off x="1097280" y="3429000"/>
             <a:ext cx="457200" cy="457200"/>
           </a:xfrm>
           <a:prstGeom prst="ellipse">
@@ -3451,7 +3451,7 @@
         </p:nvSpPr>
         <p:spPr>
           <a:xfrm>
-            <a:off x="1097280" y="3502151"/>
+            <a:off x="1097280" y="3456432"/>
             <a:ext cx="457200" cy="402336"/>
           </a:xfrm>
           <a:prstGeom prst="rect">
@@ -3568,8 +3568,8 @@
         </p:nvSpPr>
         <p:spPr>
           <a:xfrm>
-            <a:off x="822960" y="4361688"/>
-            <a:ext cx="10545775" cy="914400"/>
+            <a:off x="822960" y="4251960"/>
+            <a:ext cx="10545775" cy="822960"/>
           </a:xfrm>
           <a:prstGeom prst="roundRect">
             <a:avLst>
@@ -3616,7 +3616,7 @@
         </p:nvSpPr>
         <p:spPr>
           <a:xfrm>
-            <a:off x="1097280" y="4590288"/>
+            <a:off x="1097280" y="4434840"/>
             <a:ext cx="457200" cy="457200"/>
           </a:xfrm>
           <a:prstGeom prst="ellipse">
@@ -3660,7 +3660,7 @@
         </p:nvSpPr>
         <p:spPr>
           <a:xfrm>
-            <a:off x="1097280" y="4617720"/>
+            <a:off x="1097280" y="4462272"/>
             <a:ext cx="457200" cy="402336"/>
           </a:xfrm>
           <a:prstGeom prst="rect">
@@ -3699,7 +3699,7 @@
         </p:nvSpPr>
         <p:spPr>
           <a:xfrm>
-            <a:off x="1828800" y="4507992"/>
+            <a:off x="1828800" y="4398264"/>
             <a:ext cx="9265615" cy="320040"/>
           </a:xfrm>
           <a:prstGeom prst="rect">
@@ -3738,7 +3738,7 @@
         </p:nvSpPr>
         <p:spPr>
           <a:xfrm>
-            <a:off x="1828800" y="4846320"/>
+            <a:off x="1828800" y="4736592"/>
             <a:ext cx="9265615" cy="365760"/>
           </a:xfrm>
           <a:prstGeom prst="rect">
@@ -3777,8 +3777,8 @@
         </p:nvSpPr>
         <p:spPr>
           <a:xfrm>
-            <a:off x="822960" y="5477256"/>
-            <a:ext cx="10545775" cy="914400"/>
+            <a:off x="822960" y="5257800"/>
+            <a:ext cx="10545775" cy="822960"/>
           </a:xfrm>
           <a:prstGeom prst="roundRect">
             <a:avLst>
@@ -3825,7 +3825,7 @@
         </p:nvSpPr>
         <p:spPr>
           <a:xfrm>
-            <a:off x="1097280" y="5705856"/>
+            <a:off x="1097280" y="5440680"/>
             <a:ext cx="457200" cy="457200"/>
           </a:xfrm>
           <a:prstGeom prst="ellipse">
@@ -3869,7 +3869,7 @@
         </p:nvSpPr>
         <p:spPr>
           <a:xfrm>
-            <a:off x="1097280" y="5733288"/>
+            <a:off x="1097280" y="5468112"/>
             <a:ext cx="457200" cy="402336"/>
           </a:xfrm>
           <a:prstGeom prst="rect">
@@ -3908,7 +3908,7 @@
         </p:nvSpPr>
         <p:spPr>
           <a:xfrm>
-            <a:off x="1828800" y="5623560"/>
+            <a:off x="1828800" y="5404104"/>
             <a:ext cx="9265615" cy="320040"/>
           </a:xfrm>
           <a:prstGeom prst="rect">
@@ -3947,7 +3947,7 @@
         </p:nvSpPr>
         <p:spPr>
           <a:xfrm>
-            <a:off x="1828800" y="5961888"/>
+            <a:off x="1828800" y="5742432"/>
             <a:ext cx="9265615" cy="365760"/>
           </a:xfrm>
           <a:prstGeom prst="rect">
@@ -8655,7 +8655,7 @@
         </p:nvGraphicFramePr>
         <p:xfrm>
           <a:off x="822960" y="3246120"/>
-          <a:ext cx="10545774" cy="3108960"/>
+          <a:ext cx="10545774" cy="2487168"/>
         </p:xfrm>
         <a:graphic>
           <a:graphicData uri="http://schemas.openxmlformats.org/drawingml/2006/table">
@@ -8668,7 +8668,7 @@
                 <a:gridCol w="3585563"/>
                 <a:gridCol w="4218310"/>
               </a:tblGrid>
-              <a:tr h="777240">
+              <a:tr h="621792">
                 <a:tc>
                   <a:txBody>
                     <a:bodyPr wrap="square"/>
@@ -8736,7 +8736,7 @@
                   </a:tcPr>
                 </a:tc>
               </a:tr>
-              <a:tr h="777240">
+              <a:tr h="621792">
                 <a:tc>
                   <a:txBody>
                     <a:bodyPr wrap="square"/>
@@ -8804,7 +8804,7 @@
                   </a:tcPr>
                 </a:tc>
               </a:tr>
-              <a:tr h="777240">
+              <a:tr h="621792">
                 <a:tc>
                   <a:txBody>
                     <a:bodyPr wrap="square"/>
@@ -8872,7 +8872,7 @@
                   </a:tcPr>
                 </a:tc>
               </a:tr>
-              <a:tr h="777240">
+              <a:tr h="621792">
                 <a:tc>
                   <a:txBody>
                     <a:bodyPr wrap="square"/>
@@ -9185,7 +9185,7 @@
         <p:spPr>
           <a:xfrm>
             <a:off x="1097280" y="3502152"/>
-            <a:ext cx="2783738" cy="3081528"/>
+            <a:ext cx="2783738" cy="237744"/>
           </a:xfrm>
           <a:prstGeom prst="rect">
             <a:avLst/>
@@ -9193,21 +9193,18 @@
           <a:noFill/>
         </p:spPr>
         <p:txBody>
-          <a:bodyPr wrap="square" lIns="0" rIns="0" tIns="0" bIns="0">
+          <a:bodyPr wrap="square" anchor="t" lIns="0" rIns="0" tIns="0" bIns="0">
             <a:spAutoFit/>
           </a:bodyPr>
           <a:lstStyle/>
           <a:p>
-            <a:pPr>
-              <a:lnSpc>
-                <a:spcPct val="100000"/>
-              </a:lnSpc>
-              <a:spcAft>
-                <a:spcPts val="1000"/>
-              </a:spcAft>
-            </a:pPr>
-            <a:r>
-              <a:rPr sz="1100" b="1" spc="100">
+            <a:pPr algn="l">
+              <a:lnSpc>
+                <a:spcPct val="115000"/>
+              </a:lnSpc>
+            </a:pPr>
+            <a:r>
+              <a:rPr sz="1100" b="1" i="0" spc="100">
                 <a:solidFill>
                   <a:srgbClr val="7A5A1E"/>
                 </a:solidFill>
@@ -9216,17 +9213,37 @@
               <a:t>01 — MASS MARKET</a:t>
             </a:r>
           </a:p>
-          <a:p>
-            <a:pPr>
+        </p:txBody>
+      </p:sp>
+      <p:sp>
+        <p:nvSpPr>
+          <p:cNvPr id="5" name="TextBox 4"/>
+          <p:cNvSpPr txBox="1"/>
+          <p:nvPr/>
+        </p:nvSpPr>
+        <p:spPr>
+          <a:xfrm>
+            <a:off x="1097280" y="3776472"/>
+            <a:ext cx="2783738" cy="585216"/>
+          </a:xfrm>
+          <a:prstGeom prst="rect">
+            <a:avLst/>
+          </a:prstGeom>
+          <a:noFill/>
+        </p:spPr>
+        <p:txBody>
+          <a:bodyPr wrap="square" anchor="t" lIns="0" rIns="0" tIns="0" bIns="0">
+            <a:spAutoFit/>
+          </a:bodyPr>
+          <a:lstStyle/>
+          <a:p>
+            <a:pPr algn="l">
               <a:lnSpc>
                 <a:spcPct val="115000"/>
               </a:lnSpc>
-              <a:spcAft>
-                <a:spcPts val="800"/>
-              </a:spcAft>
-            </a:pPr>
-            <a:r>
-              <a:rPr sz="1700" b="1">
+            </a:pPr>
+            <a:r>
+              <a:rPr sz="1700" b="1" i="0">
                 <a:solidFill>
                   <a:srgbClr val="0E1F33"/>
                 </a:solidFill>
@@ -9235,17 +9252,37 @@
               <a:t>Mitron Tech &amp; Bills Elevate</a:t>
             </a:r>
           </a:p>
-          <a:p>
-            <a:pPr>
+        </p:txBody>
+      </p:sp>
+      <p:sp>
+        <p:nvSpPr>
+          <p:cNvPr id="6" name="TextBox 5"/>
+          <p:cNvSpPr txBox="1"/>
+          <p:nvPr/>
+        </p:nvSpPr>
+        <p:spPr>
+          <a:xfrm>
+            <a:off x="1097280" y="4489704"/>
+            <a:ext cx="2783738" cy="274320"/>
+          </a:xfrm>
+          <a:prstGeom prst="rect">
+            <a:avLst/>
+          </a:prstGeom>
+          <a:noFill/>
+        </p:spPr>
+        <p:txBody>
+          <a:bodyPr wrap="square" anchor="t" lIns="0" rIns="0" tIns="0" bIns="0">
+            <a:spAutoFit/>
+          </a:bodyPr>
+          <a:lstStyle/>
+          <a:p>
+            <a:pPr algn="l">
               <a:lnSpc>
                 <a:spcPct val="120000"/>
               </a:lnSpc>
-              <a:spcAft>
-                <a:spcPts val="1600"/>
-              </a:spcAft>
-            </a:pPr>
-            <a:r>
-              <a:rPr sz="1300" b="1">
+            </a:pPr>
+            <a:r>
+              <a:rPr sz="1300" b="1" i="0">
                 <a:solidFill>
                   <a:srgbClr val="7A5A1E"/>
                 </a:solidFill>
@@ -9254,17 +9291,37 @@
               <a:t>Salaried IT &amp; metro professionals</a:t>
             </a:r>
           </a:p>
-          <a:p>
-            <a:pPr>
+        </p:txBody>
+      </p:sp>
+      <p:sp>
+        <p:nvSpPr>
+          <p:cNvPr id="7" name="TextBox 6"/>
+          <p:cNvSpPr txBox="1"/>
+          <p:nvPr/>
+        </p:nvSpPr>
+        <p:spPr>
+          <a:xfrm>
+            <a:off x="1097280" y="4910328"/>
+            <a:ext cx="2783738" cy="841247"/>
+          </a:xfrm>
+          <a:prstGeom prst="rect">
+            <a:avLst/>
+          </a:prstGeom>
+          <a:noFill/>
+        </p:spPr>
+        <p:txBody>
+          <a:bodyPr wrap="square" anchor="t" lIns="0" rIns="0" tIns="0" bIns="0">
+            <a:spAutoFit/>
+          </a:bodyPr>
+          <a:lstStyle/>
+          <a:p>
+            <a:pPr algn="l">
               <a:lnSpc>
                 <a:spcPct val="140000"/>
               </a:lnSpc>
-              <a:spcAft>
-                <a:spcPts val="0"/>
-              </a:spcAft>
-            </a:pPr>
-            <a:r>
-              <a:rPr sz="1300" b="0">
+            </a:pPr>
+            <a:r>
+              <a:rPr sz="1300" b="0" i="0">
                 <a:solidFill>
                   <a:srgbClr val="4A5568"/>
                 </a:solidFill>
@@ -9277,7 +9334,7 @@
       </p:sp>
       <p:sp>
         <p:nvSpPr>
-          <p:cNvPr id="5" name="Rounded Rectangle 4"/>
+          <p:cNvPr id="8" name="Rounded Rectangle 7"/>
           <p:cNvSpPr/>
           <p:nvPr/>
         </p:nvSpPr>
@@ -9325,14 +9382,14 @@
       </p:sp>
       <p:sp>
         <p:nvSpPr>
-          <p:cNvPr id="6" name="TextBox 5"/>
+          <p:cNvPr id="9" name="TextBox 8"/>
           <p:cNvSpPr txBox="1"/>
           <p:nvPr/>
         </p:nvSpPr>
         <p:spPr>
           <a:xfrm>
             <a:off x="4703978" y="3502152"/>
-            <a:ext cx="2783738" cy="3081528"/>
+            <a:ext cx="2783738" cy="237744"/>
           </a:xfrm>
           <a:prstGeom prst="rect">
             <a:avLst/>
@@ -9340,21 +9397,18 @@
           <a:noFill/>
         </p:spPr>
         <p:txBody>
-          <a:bodyPr wrap="square" lIns="0" rIns="0" tIns="0" bIns="0">
+          <a:bodyPr wrap="square" anchor="t" lIns="0" rIns="0" tIns="0" bIns="0">
             <a:spAutoFit/>
           </a:bodyPr>
           <a:lstStyle/>
           <a:p>
-            <a:pPr>
-              <a:lnSpc>
-                <a:spcPct val="100000"/>
-              </a:lnSpc>
-              <a:spcAft>
-                <a:spcPts val="1000"/>
-              </a:spcAft>
-            </a:pPr>
-            <a:r>
-              <a:rPr sz="1100" b="1" spc="100">
+            <a:pPr algn="l">
+              <a:lnSpc>
+                <a:spcPct val="115000"/>
+              </a:lnSpc>
+            </a:pPr>
+            <a:r>
+              <a:rPr sz="1100" b="1" i="0" spc="100">
                 <a:solidFill>
                   <a:srgbClr val="7A5A1E"/>
                 </a:solidFill>
@@ -9363,17 +9417,37 @@
               <a:t>02 — MID-TIER VOLUME</a:t>
             </a:r>
           </a:p>
-          <a:p>
-            <a:pPr>
+        </p:txBody>
+      </p:sp>
+      <p:sp>
+        <p:nvSpPr>
+          <p:cNvPr id="10" name="TextBox 9"/>
+          <p:cNvSpPr txBox="1"/>
+          <p:nvPr/>
+        </p:nvSpPr>
+        <p:spPr>
+          <a:xfrm>
+            <a:off x="4703978" y="3776472"/>
+            <a:ext cx="2783738" cy="585216"/>
+          </a:xfrm>
+          <a:prstGeom prst="rect">
+            <a:avLst/>
+          </a:prstGeom>
+          <a:noFill/>
+        </p:spPr>
+        <p:txBody>
+          <a:bodyPr wrap="square" anchor="t" lIns="0" rIns="0" tIns="0" bIns="0">
+            <a:spAutoFit/>
+          </a:bodyPr>
+          <a:lstStyle/>
+          <a:p>
+            <a:pPr algn="l">
               <a:lnSpc>
                 <a:spcPct val="115000"/>
               </a:lnSpc>
-              <a:spcAft>
-                <a:spcPts val="800"/>
-              </a:spcAft>
-            </a:pPr>
-            <a:r>
-              <a:rPr sz="1700" b="1">
+            </a:pPr>
+            <a:r>
+              <a:rPr sz="1700" b="1" i="0">
                 <a:solidFill>
                   <a:srgbClr val="0E1F33"/>
                 </a:solidFill>
@@ -9382,17 +9456,37 @@
               <a:t>Mitron Family &amp; Lifestyle Rewards</a:t>
             </a:r>
           </a:p>
-          <a:p>
-            <a:pPr>
+        </p:txBody>
+      </p:sp>
+      <p:sp>
+        <p:nvSpPr>
+          <p:cNvPr id="11" name="TextBox 10"/>
+          <p:cNvSpPr txBox="1"/>
+          <p:nvPr/>
+        </p:nvSpPr>
+        <p:spPr>
+          <a:xfrm>
+            <a:off x="4703978" y="4489704"/>
+            <a:ext cx="2783738" cy="274320"/>
+          </a:xfrm>
+          <a:prstGeom prst="rect">
+            <a:avLst/>
+          </a:prstGeom>
+          <a:noFill/>
+        </p:spPr>
+        <p:txBody>
+          <a:bodyPr wrap="square" anchor="t" lIns="0" rIns="0" tIns="0" bIns="0">
+            <a:spAutoFit/>
+          </a:bodyPr>
+          <a:lstStyle/>
+          <a:p>
+            <a:pPr algn="l">
               <a:lnSpc>
                 <a:spcPct val="120000"/>
               </a:lnSpc>
-              <a:spcAft>
-                <a:spcPts val="1600"/>
-              </a:spcAft>
-            </a:pPr>
-            <a:r>
-              <a:rPr sz="1300" b="1">
+            </a:pPr>
+            <a:r>
+              <a:rPr sz="1300" b="1" i="0">
                 <a:solidFill>
                   <a:srgbClr val="7A5A1E"/>
                 </a:solidFill>
@@ -9401,17 +9495,37 @@
               <a:t>Age 35–45, Middle Class households</a:t>
             </a:r>
           </a:p>
-          <a:p>
-            <a:pPr>
+        </p:txBody>
+      </p:sp>
+      <p:sp>
+        <p:nvSpPr>
+          <p:cNvPr id="12" name="TextBox 11"/>
+          <p:cNvSpPr txBox="1"/>
+          <p:nvPr/>
+        </p:nvSpPr>
+        <p:spPr>
+          <a:xfrm>
+            <a:off x="4703978" y="4910328"/>
+            <a:ext cx="2783738" cy="841247"/>
+          </a:xfrm>
+          <a:prstGeom prst="rect">
+            <a:avLst/>
+          </a:prstGeom>
+          <a:noFill/>
+        </p:spPr>
+        <p:txBody>
+          <a:bodyPr wrap="square" anchor="t" lIns="0" rIns="0" tIns="0" bIns="0">
+            <a:spAutoFit/>
+          </a:bodyPr>
+          <a:lstStyle/>
+          <a:p>
+            <a:pPr algn="l">
               <a:lnSpc>
                 <a:spcPct val="140000"/>
               </a:lnSpc>
-              <a:spcAft>
-                <a:spcPts val="0"/>
-              </a:spcAft>
-            </a:pPr>
-            <a:r>
-              <a:rPr sz="1300" b="0">
+            </a:pPr>
+            <a:r>
+              <a:rPr sz="1300" b="0" i="0">
                 <a:solidFill>
                   <a:srgbClr val="4A5568"/>
                 </a:solidFill>
@@ -9424,7 +9538,7 @@
       </p:sp>
       <p:sp>
         <p:nvSpPr>
-          <p:cNvPr id="7" name="Rounded Rectangle 6"/>
+          <p:cNvPr id="13" name="Rounded Rectangle 12"/>
           <p:cNvSpPr/>
           <p:nvPr/>
         </p:nvSpPr>
@@ -9470,113 +9584,14 @@
       </p:sp>
       <p:sp>
         <p:nvSpPr>
-          <p:cNvPr id="8" name="TextBox 7"/>
+          <p:cNvPr id="14" name="TextBox 13"/>
           <p:cNvSpPr txBox="1"/>
           <p:nvPr/>
         </p:nvSpPr>
         <p:spPr>
           <a:xfrm>
             <a:off x="8310676" y="3502152"/>
-            <a:ext cx="2783738" cy="3081528"/>
-          </a:xfrm>
-          <a:prstGeom prst="rect">
-            <a:avLst/>
-          </a:prstGeom>
-          <a:noFill/>
-        </p:spPr>
-        <p:txBody>
-          <a:bodyPr wrap="square" lIns="0" rIns="0" tIns="0" bIns="0">
-            <a:spAutoFit/>
-          </a:bodyPr>
-          <a:lstStyle/>
-          <a:p>
-            <a:pPr>
-              <a:lnSpc>
-                <a:spcPct val="100000"/>
-              </a:lnSpc>
-              <a:spcAft>
-                <a:spcPts val="1000"/>
-              </a:spcAft>
-            </a:pPr>
-            <a:r>
-              <a:rPr sz="1100" b="1" spc="100">
-                <a:solidFill>
-                  <a:srgbClr val="D9A857"/>
-                </a:solidFill>
-                <a:latin typeface="IBM Plex Sans"/>
-              </a:rPr>
-              <a:t>03 — HIGH-MARGIN PREMIUM</a:t>
-            </a:r>
-          </a:p>
-          <a:p>
-            <a:pPr>
-              <a:lnSpc>
-                <a:spcPct val="115000"/>
-              </a:lnSpc>
-              <a:spcAft>
-                <a:spcPts val="800"/>
-              </a:spcAft>
-            </a:pPr>
-            <a:r>
-              <a:rPr sz="1700" b="1">
-                <a:solidFill>
-                  <a:srgbClr val="F8F6F1"/>
-                </a:solidFill>
-                <a:latin typeface="Source Serif 4"/>
-              </a:rPr>
-              <a:t>Mitron Privé Elite</a:t>
-            </a:r>
-          </a:p>
-          <a:p>
-            <a:pPr>
-              <a:lnSpc>
-                <a:spcPct val="120000"/>
-              </a:lnSpc>
-              <a:spcAft>
-                <a:spcPts val="1600"/>
-              </a:spcAft>
-            </a:pPr>
-            <a:r>
-              <a:rPr sz="1300" b="1">
-                <a:solidFill>
-                  <a:srgbClr val="D9A857"/>
-                </a:solidFill>
-                <a:latin typeface="IBM Plex Sans"/>
-              </a:rPr>
-              <a:t>Upper Class &amp; business owners</a:t>
-            </a:r>
-          </a:p>
-          <a:p>
-            <a:pPr>
-              <a:lnSpc>
-                <a:spcPct val="140000"/>
-              </a:lnSpc>
-              <a:spcAft>
-                <a:spcPts val="0"/>
-              </a:spcAft>
-            </a:pPr>
-            <a:r>
-              <a:rPr sz="1300" b="0">
-                <a:solidFill>
-                  <a:srgbClr val="B9C2D6"/>
-                </a:solidFill>
-                <a:latin typeface="IBM Plex Sans"/>
-              </a:rPr>
-              <a:t>2x points on travel, dining &amp; wellness, 1.5% forex markup, concierge &amp; golf access.</a:t>
-            </a:r>
-          </a:p>
-        </p:txBody>
-      </p:sp>
-      <p:sp>
-        <p:nvSpPr>
-          <p:cNvPr id="9" name="TextBox 8"/>
-          <p:cNvSpPr txBox="1"/>
-          <p:nvPr/>
-        </p:nvSpPr>
-        <p:spPr>
-          <a:xfrm>
-            <a:off x="822960" y="6419088"/>
-            <a:ext cx="8686800" cy="274320"/>
+            <a:ext cx="2783738" cy="237744"/>
           </a:xfrm>
           <a:prstGeom prst="rect">
             <a:avLst/>
@@ -9595,6 +9610,162 @@
               </a:lnSpc>
             </a:pPr>
             <a:r>
+              <a:rPr sz="1100" b="1" i="0" spc="100">
+                <a:solidFill>
+                  <a:srgbClr val="D9A857"/>
+                </a:solidFill>
+                <a:latin typeface="IBM Plex Sans"/>
+              </a:rPr>
+              <a:t>03 — HIGH-MARGIN PREMIUM</a:t>
+            </a:r>
+          </a:p>
+        </p:txBody>
+      </p:sp>
+      <p:sp>
+        <p:nvSpPr>
+          <p:cNvPr id="15" name="TextBox 14"/>
+          <p:cNvSpPr txBox="1"/>
+          <p:nvPr/>
+        </p:nvSpPr>
+        <p:spPr>
+          <a:xfrm>
+            <a:off x="8310676" y="3776472"/>
+            <a:ext cx="2783738" cy="585216"/>
+          </a:xfrm>
+          <a:prstGeom prst="rect">
+            <a:avLst/>
+          </a:prstGeom>
+          <a:noFill/>
+        </p:spPr>
+        <p:txBody>
+          <a:bodyPr wrap="square" anchor="t" lIns="0" rIns="0" tIns="0" bIns="0">
+            <a:spAutoFit/>
+          </a:bodyPr>
+          <a:lstStyle/>
+          <a:p>
+            <a:pPr algn="l">
+              <a:lnSpc>
+                <a:spcPct val="115000"/>
+              </a:lnSpc>
+            </a:pPr>
+            <a:r>
+              <a:rPr sz="1700" b="1" i="0">
+                <a:solidFill>
+                  <a:srgbClr val="F8F6F1"/>
+                </a:solidFill>
+                <a:latin typeface="Source Serif 4"/>
+              </a:rPr>
+              <a:t>Mitron Privé Elite</a:t>
+            </a:r>
+          </a:p>
+        </p:txBody>
+      </p:sp>
+      <p:sp>
+        <p:nvSpPr>
+          <p:cNvPr id="16" name="TextBox 15"/>
+          <p:cNvSpPr txBox="1"/>
+          <p:nvPr/>
+        </p:nvSpPr>
+        <p:spPr>
+          <a:xfrm>
+            <a:off x="8310676" y="4489704"/>
+            <a:ext cx="2783738" cy="274320"/>
+          </a:xfrm>
+          <a:prstGeom prst="rect">
+            <a:avLst/>
+          </a:prstGeom>
+          <a:noFill/>
+        </p:spPr>
+        <p:txBody>
+          <a:bodyPr wrap="square" anchor="t" lIns="0" rIns="0" tIns="0" bIns="0">
+            <a:spAutoFit/>
+          </a:bodyPr>
+          <a:lstStyle/>
+          <a:p>
+            <a:pPr algn="l">
+              <a:lnSpc>
+                <a:spcPct val="120000"/>
+              </a:lnSpc>
+            </a:pPr>
+            <a:r>
+              <a:rPr sz="1300" b="1" i="0">
+                <a:solidFill>
+                  <a:srgbClr val="D9A857"/>
+                </a:solidFill>
+                <a:latin typeface="IBM Plex Sans"/>
+              </a:rPr>
+              <a:t>Upper Class &amp; business owners</a:t>
+            </a:r>
+          </a:p>
+        </p:txBody>
+      </p:sp>
+      <p:sp>
+        <p:nvSpPr>
+          <p:cNvPr id="17" name="TextBox 16"/>
+          <p:cNvSpPr txBox="1"/>
+          <p:nvPr/>
+        </p:nvSpPr>
+        <p:spPr>
+          <a:xfrm>
+            <a:off x="8310676" y="4910328"/>
+            <a:ext cx="2783738" cy="841247"/>
+          </a:xfrm>
+          <a:prstGeom prst="rect">
+            <a:avLst/>
+          </a:prstGeom>
+          <a:noFill/>
+        </p:spPr>
+        <p:txBody>
+          <a:bodyPr wrap="square" anchor="t" lIns="0" rIns="0" tIns="0" bIns="0">
+            <a:spAutoFit/>
+          </a:bodyPr>
+          <a:lstStyle/>
+          <a:p>
+            <a:pPr algn="l">
+              <a:lnSpc>
+                <a:spcPct val="140000"/>
+              </a:lnSpc>
+            </a:pPr>
+            <a:r>
+              <a:rPr sz="1300" b="0" i="0">
+                <a:solidFill>
+                  <a:srgbClr val="B9C2D6"/>
+                </a:solidFill>
+                <a:latin typeface="IBM Plex Sans"/>
+              </a:rPr>
+              <a:t>2x points on travel, dining &amp; wellness, 1.5% forex markup, concierge &amp; golf access.</a:t>
+            </a:r>
+          </a:p>
+        </p:txBody>
+      </p:sp>
+      <p:sp>
+        <p:nvSpPr>
+          <p:cNvPr id="18" name="TextBox 17"/>
+          <p:cNvSpPr txBox="1"/>
+          <p:nvPr/>
+        </p:nvSpPr>
+        <p:spPr>
+          <a:xfrm>
+            <a:off x="822960" y="6419088"/>
+            <a:ext cx="8686800" cy="274320"/>
+          </a:xfrm>
+          <a:prstGeom prst="rect">
+            <a:avLst/>
+          </a:prstGeom>
+          <a:noFill/>
+        </p:spPr>
+        <p:txBody>
+          <a:bodyPr wrap="square" anchor="t" lIns="0" rIns="0" tIns="0" bIns="0">
+            <a:spAutoFit/>
+          </a:bodyPr>
+          <a:lstStyle/>
+          <a:p>
+            <a:pPr algn="l">
+              <a:lnSpc>
+                <a:spcPct val="115000"/>
+              </a:lnSpc>
+            </a:pPr>
+            <a:r>
               <a:rPr sz="1100" b="0" i="0">
                 <a:solidFill>
                   <a:srgbClr val="6A7179"/>
@@ -9608,7 +9779,7 @@
       </p:sp>
       <p:sp>
         <p:nvSpPr>
-          <p:cNvPr id="10" name="TextBox 9"/>
+          <p:cNvPr id="19" name="TextBox 18"/>
           <p:cNvSpPr txBox="1"/>
           <p:nvPr/>
         </p:nvSpPr>
@@ -9742,7 +9913,7 @@
         </p:nvGraphicFramePr>
         <p:xfrm>
           <a:off x="822960" y="3246120"/>
-          <a:ext cx="10545774" cy="3291839"/>
+          <a:ext cx="10545774" cy="2651760"/>
         </p:xfrm>
         <a:graphic>
           <a:graphicData uri="http://schemas.openxmlformats.org/drawingml/2006/table">
@@ -9756,7 +9927,7 @@
                 <a:gridCol w="2847359"/>
                 <a:gridCol w="2847359"/>
               </a:tblGrid>
-              <a:tr h="658367">
+              <a:tr h="530352">
                 <a:tc>
                   <a:txBody>
                     <a:bodyPr wrap="square"/>
@@ -9846,7 +10017,7 @@
                   </a:tcPr>
                 </a:tc>
               </a:tr>
-              <a:tr h="658367">
+              <a:tr h="530352">
                 <a:tc>
                   <a:txBody>
                     <a:bodyPr wrap="square"/>
@@ -9936,7 +10107,7 @@
                   </a:tcPr>
                 </a:tc>
               </a:tr>
-              <a:tr h="658367">
+              <a:tr h="530352">
                 <a:tc>
                   <a:txBody>
                     <a:bodyPr wrap="square"/>
@@ -10026,7 +10197,7 @@
                   </a:tcPr>
                 </a:tc>
               </a:tr>
-              <a:tr h="658367">
+              <a:tr h="530352">
                 <a:tc>
                   <a:txBody>
                     <a:bodyPr wrap="square"/>
@@ -10116,7 +10287,7 @@
                   </a:tcPr>
                 </a:tc>
               </a:tr>
-              <a:tr h="658371">
+              <a:tr h="530352">
                 <a:tc>
                   <a:txBody>
                     <a:bodyPr wrap="square"/>
